--- a/chapter_06/figures/verif_training_test_overall.pptx
+++ b/chapter_06/figures/verif_training_test_overall.pptx
@@ -115,7 +115,7 @@
 <file path=ppt/revisionInfo.xml><?xml version="1.0" encoding="utf-8"?>
 <p1510:revInfo xmlns:a="http://schemas.openxmlformats.org/drawingml/2006/main" xmlns:r="http://schemas.openxmlformats.org/officeDocument/2006/relationships" xmlns:p1510="http://schemas.microsoft.com/office/powerpoint/2015/10/main">
   <p1510:revLst>
-    <p1510:client id="{9EBBFA1C-5226-4AE6-954C-C02393E29BD8}" v="107" dt="2025-07-10T11:05:02.550"/>
+    <p1510:client id="{813C141E-0375-439C-ABB4-2AEF7A1F8DC9}" v="5" dt="2026-01-15T15:13:13.210"/>
   </p1510:revLst>
 </p1510:revInfo>
 </file>
@@ -123,3881 +123,98 @@
 <file path=ppt/changesInfos/changesInfo1.xml><?xml version="1.0" encoding="utf-8"?>
 <pc:chgInfo xmlns:a="http://schemas.openxmlformats.org/drawingml/2006/main" xmlns:r="http://schemas.openxmlformats.org/officeDocument/2006/relationships" xmlns:ac="http://schemas.microsoft.com/office/drawing/2013/main/command" xmlns:pc="http://schemas.microsoft.com/office/powerpoint/2013/main/command">
   <pc:docChgLst>
-    <pc:chgData name="Fatima Pillosu" userId="a6295d4dc9e22643" providerId="LiveId" clId="{9EBBFA1C-5226-4AE6-954C-C02393E29BD8}"/>
-    <pc:docChg chg="undo custSel addSld delSld modSld">
-      <pc:chgData name="Fatima Pillosu" userId="a6295d4dc9e22643" providerId="LiveId" clId="{9EBBFA1C-5226-4AE6-954C-C02393E29BD8}" dt="2025-07-10T11:07:35.119" v="1839" actId="20577"/>
+    <pc:chgData name="Fatima Pillosu" userId="a6295d4dc9e22643" providerId="LiveId" clId="{87453732-75AC-4426-B5D3-B7C69C2D4F54}"/>
+    <pc:docChg chg="modSld">
+      <pc:chgData name="Fatima Pillosu" userId="a6295d4dc9e22643" providerId="LiveId" clId="{87453732-75AC-4426-B5D3-B7C69C2D4F54}" dt="2026-01-15T15:13:29.050" v="108" actId="1037"/>
       <pc:docMkLst>
         <pc:docMk/>
       </pc:docMkLst>
-      <pc:sldChg chg="addSp delSp modSp mod">
-        <pc:chgData name="Fatima Pillosu" userId="a6295d4dc9e22643" providerId="LiveId" clId="{9EBBFA1C-5226-4AE6-954C-C02393E29BD8}" dt="2025-07-10T11:07:35.119" v="1839" actId="20577"/>
+      <pc:sldChg chg="addSp modSp mod">
+        <pc:chgData name="Fatima Pillosu" userId="a6295d4dc9e22643" providerId="LiveId" clId="{87453732-75AC-4426-B5D3-B7C69C2D4F54}" dt="2026-01-15T15:13:29.050" v="108" actId="1037"/>
         <pc:sldMkLst>
           <pc:docMk/>
           <pc:sldMk cId="1077421182" sldId="256"/>
         </pc:sldMkLst>
-        <pc:spChg chg="add del mod">
-          <ac:chgData name="Fatima Pillosu" userId="a6295d4dc9e22643" providerId="LiveId" clId="{9EBBFA1C-5226-4AE6-954C-C02393E29BD8}" dt="2025-07-05T00:26:28.611" v="474" actId="21"/>
+        <pc:spChg chg="add mod">
+          <ac:chgData name="Fatima Pillosu" userId="a6295d4dc9e22643" providerId="LiveId" clId="{87453732-75AC-4426-B5D3-B7C69C2D4F54}" dt="2026-01-15T15:11:24.927" v="13" actId="1076"/>
           <ac:spMkLst>
             <pc:docMk/>
             <pc:sldMk cId="1077421182" sldId="256"/>
-            <ac:spMk id="2" creationId="{73B4CEF0-7344-1176-C2AA-7C4FA2171FE1}"/>
+            <ac:spMk id="2" creationId="{F594DD68-6077-B8F7-4559-E4BBDC6E9D6F}"/>
           </ac:spMkLst>
         </pc:spChg>
-        <pc:spChg chg="add del mod">
-          <ac:chgData name="Fatima Pillosu" userId="a6295d4dc9e22643" providerId="LiveId" clId="{9EBBFA1C-5226-4AE6-954C-C02393E29BD8}" dt="2025-07-10T11:03:47.421" v="1780" actId="478"/>
-          <ac:spMkLst>
-            <pc:docMk/>
-            <pc:sldMk cId="1077421182" sldId="256"/>
-            <ac:spMk id="2" creationId="{82BD147D-9913-E309-A18B-A54F55F30157}"/>
-          </ac:spMkLst>
-        </pc:spChg>
-        <pc:spChg chg="add mod">
-          <ac:chgData name="Fatima Pillosu" userId="a6295d4dc9e22643" providerId="LiveId" clId="{9EBBFA1C-5226-4AE6-954C-C02393E29BD8}" dt="2025-07-10T11:06:14.248" v="1810" actId="555"/>
-          <ac:spMkLst>
-            <pc:docMk/>
-            <pc:sldMk cId="1077421182" sldId="256"/>
-            <ac:spMk id="3" creationId="{42B96693-491A-CE74-303A-FB083B7FCD91}"/>
-          </ac:spMkLst>
-        </pc:spChg>
-        <pc:spChg chg="add mod">
-          <ac:chgData name="Fatima Pillosu" userId="a6295d4dc9e22643" providerId="LiveId" clId="{9EBBFA1C-5226-4AE6-954C-C02393E29BD8}" dt="2025-07-10T11:07:03.351" v="1821" actId="20577"/>
-          <ac:spMkLst>
-            <pc:docMk/>
-            <pc:sldMk cId="1077421182" sldId="256"/>
-            <ac:spMk id="4" creationId="{03CE4E53-5951-CD3B-2856-7F75D61FC7AD}"/>
-          </ac:spMkLst>
-        </pc:spChg>
-        <pc:spChg chg="add del mod">
-          <ac:chgData name="Fatima Pillosu" userId="a6295d4dc9e22643" providerId="LiveId" clId="{9EBBFA1C-5226-4AE6-954C-C02393E29BD8}" dt="2025-07-08T11:26:53.185" v="1776" actId="21"/>
-          <ac:spMkLst>
-            <pc:docMk/>
-            <pc:sldMk cId="1077421182" sldId="256"/>
-            <ac:spMk id="4" creationId="{73B4CEF0-7344-1176-C2AA-7C4FA2171FE1}"/>
-          </ac:spMkLst>
-        </pc:spChg>
-        <pc:spChg chg="add mod">
-          <ac:chgData name="Fatima Pillosu" userId="a6295d4dc9e22643" providerId="LiveId" clId="{9EBBFA1C-5226-4AE6-954C-C02393E29BD8}" dt="2025-07-10T11:07:25.734" v="1831" actId="20577"/>
+        <pc:spChg chg="mod">
+          <ac:chgData name="Fatima Pillosu" userId="a6295d4dc9e22643" providerId="LiveId" clId="{87453732-75AC-4426-B5D3-B7C69C2D4F54}" dt="2026-01-15T15:12:53.972" v="59" actId="1038"/>
           <ac:spMkLst>
             <pc:docMk/>
             <pc:sldMk cId="1077421182" sldId="256"/>
             <ac:spMk id="5" creationId="{088AC917-5E14-0216-E94F-0A6308FF7DD7}"/>
           </ac:spMkLst>
         </pc:spChg>
-        <pc:spChg chg="add del mod">
-          <ac:chgData name="Fatima Pillosu" userId="a6295d4dc9e22643" providerId="LiveId" clId="{9EBBFA1C-5226-4AE6-954C-C02393E29BD8}" dt="2025-07-08T11:26:53.185" v="1776" actId="21"/>
-          <ac:spMkLst>
-            <pc:docMk/>
-            <pc:sldMk cId="1077421182" sldId="256"/>
-            <ac:spMk id="6" creationId="{11D0BEA8-4C97-735F-B454-B20FE6FD6664}"/>
-          </ac:spMkLst>
-        </pc:spChg>
-        <pc:spChg chg="add mod">
-          <ac:chgData name="Fatima Pillosu" userId="a6295d4dc9e22643" providerId="LiveId" clId="{9EBBFA1C-5226-4AE6-954C-C02393E29BD8}" dt="2025-07-10T11:06:54.227" v="1815" actId="20577"/>
-          <ac:spMkLst>
-            <pc:docMk/>
-            <pc:sldMk cId="1077421182" sldId="256"/>
-            <ac:spMk id="6" creationId="{A7C240FB-1907-4A81-AD5E-44A53BF56BA5}"/>
-          </ac:spMkLst>
-        </pc:spChg>
-        <pc:spChg chg="add mod">
-          <ac:chgData name="Fatima Pillosu" userId="a6295d4dc9e22643" providerId="LiveId" clId="{9EBBFA1C-5226-4AE6-954C-C02393E29BD8}" dt="2025-07-10T11:07:06.760" v="1823" actId="20577"/>
-          <ac:spMkLst>
-            <pc:docMk/>
-            <pc:sldMk cId="1077421182" sldId="256"/>
-            <ac:spMk id="7" creationId="{D465A606-BCDA-0420-3BE5-DC8782B718DB}"/>
-          </ac:spMkLst>
-        </pc:spChg>
-        <pc:spChg chg="add del mod">
-          <ac:chgData name="Fatima Pillosu" userId="a6295d4dc9e22643" providerId="LiveId" clId="{9EBBFA1C-5226-4AE6-954C-C02393E29BD8}" dt="2025-07-08T11:26:53.185" v="1776" actId="21"/>
-          <ac:spMkLst>
-            <pc:docMk/>
-            <pc:sldMk cId="1077421182" sldId="256"/>
-            <ac:spMk id="8" creationId="{C958D7B8-BC29-7508-F405-77D6128B8AFF}"/>
-          </ac:spMkLst>
-        </pc:spChg>
-        <pc:spChg chg="add mod">
-          <ac:chgData name="Fatima Pillosu" userId="a6295d4dc9e22643" providerId="LiveId" clId="{9EBBFA1C-5226-4AE6-954C-C02393E29BD8}" dt="2025-07-10T11:07:28.237" v="1833" actId="20577"/>
+        <pc:spChg chg="mod">
+          <ac:chgData name="Fatima Pillosu" userId="a6295d4dc9e22643" providerId="LiveId" clId="{87453732-75AC-4426-B5D3-B7C69C2D4F54}" dt="2026-01-15T15:12:53.972" v="59" actId="1038"/>
           <ac:spMkLst>
             <pc:docMk/>
             <pc:sldMk cId="1077421182" sldId="256"/>
             <ac:spMk id="8" creationId="{E89F48B4-118E-1E08-9F04-54DC1299C344}"/>
           </ac:spMkLst>
         </pc:spChg>
-        <pc:spChg chg="add mod">
-          <ac:chgData name="Fatima Pillosu" userId="a6295d4dc9e22643" providerId="LiveId" clId="{9EBBFA1C-5226-4AE6-954C-C02393E29BD8}" dt="2025-07-10T11:06:57.011" v="1817" actId="20577"/>
-          <ac:spMkLst>
-            <pc:docMk/>
-            <pc:sldMk cId="1077421182" sldId="256"/>
-            <ac:spMk id="9" creationId="{78BF399B-43DB-1959-8B0D-2127CF7FC5B2}"/>
-          </ac:spMkLst>
-        </pc:spChg>
-        <pc:spChg chg="add del mod">
-          <ac:chgData name="Fatima Pillosu" userId="a6295d4dc9e22643" providerId="LiveId" clId="{9EBBFA1C-5226-4AE6-954C-C02393E29BD8}" dt="2025-07-08T11:26:53.185" v="1776" actId="21"/>
-          <ac:spMkLst>
-            <pc:docMk/>
-            <pc:sldMk cId="1077421182" sldId="256"/>
-            <ac:spMk id="10" creationId="{204795FA-B9E8-F8C0-D0CC-0DA8FCD26B47}"/>
-          </ac:spMkLst>
-        </pc:spChg>
-        <pc:spChg chg="add del mod">
-          <ac:chgData name="Fatima Pillosu" userId="a6295d4dc9e22643" providerId="LiveId" clId="{9EBBFA1C-5226-4AE6-954C-C02393E29BD8}" dt="2025-07-10T11:07:17.895" v="1827" actId="20577"/>
-          <ac:spMkLst>
-            <pc:docMk/>
-            <pc:sldMk cId="1077421182" sldId="256"/>
-            <ac:spMk id="10" creationId="{AE74F444-D386-A3CA-BA88-683B4926A331}"/>
-          </ac:spMkLst>
-        </pc:spChg>
-        <pc:spChg chg="add mod">
-          <ac:chgData name="Fatima Pillosu" userId="a6295d4dc9e22643" providerId="LiveId" clId="{9EBBFA1C-5226-4AE6-954C-C02393E29BD8}" dt="2025-07-10T11:07:32.243" v="1837" actId="20577"/>
+        <pc:spChg chg="mod">
+          <ac:chgData name="Fatima Pillosu" userId="a6295d4dc9e22643" providerId="LiveId" clId="{87453732-75AC-4426-B5D3-B7C69C2D4F54}" dt="2026-01-15T15:12:53.972" v="59" actId="1038"/>
           <ac:spMkLst>
             <pc:docMk/>
             <pc:sldMk cId="1077421182" sldId="256"/>
             <ac:spMk id="11" creationId="{32783AA5-937C-5379-74F8-AED22201A808}"/>
           </ac:spMkLst>
         </pc:spChg>
-        <pc:spChg chg="add del mod">
-          <ac:chgData name="Fatima Pillosu" userId="a6295d4dc9e22643" providerId="LiveId" clId="{9EBBFA1C-5226-4AE6-954C-C02393E29BD8}" dt="2025-07-05T00:26:28.611" v="474" actId="21"/>
-          <ac:spMkLst>
-            <pc:docMk/>
-            <pc:sldMk cId="1077421182" sldId="256"/>
-            <ac:spMk id="11" creationId="{F905F2F6-5287-BF9A-2843-E3939A3C8FE8}"/>
-          </ac:spMkLst>
-        </pc:spChg>
-        <pc:spChg chg="add del mod topLvl">
-          <ac:chgData name="Fatima Pillosu" userId="a6295d4dc9e22643" providerId="LiveId" clId="{9EBBFA1C-5226-4AE6-954C-C02393E29BD8}" dt="2025-07-08T11:26:53.185" v="1776" actId="21"/>
-          <ac:spMkLst>
-            <pc:docMk/>
-            <pc:sldMk cId="1077421182" sldId="256"/>
-            <ac:spMk id="12" creationId="{AEF58A4C-D7E5-1DB7-8CBA-638A2D2BAD88}"/>
-          </ac:spMkLst>
-        </pc:spChg>
-        <pc:spChg chg="add mod">
-          <ac:chgData name="Fatima Pillosu" userId="a6295d4dc9e22643" providerId="LiveId" clId="{9EBBFA1C-5226-4AE6-954C-C02393E29BD8}" dt="2025-07-10T11:06:59.859" v="1819" actId="20577"/>
-          <ac:spMkLst>
-            <pc:docMk/>
-            <pc:sldMk cId="1077421182" sldId="256"/>
-            <ac:spMk id="12" creationId="{D1110985-DEB9-2B35-3A26-07F923B17020}"/>
-          </ac:spMkLst>
-        </pc:spChg>
-        <pc:spChg chg="add del mod">
-          <ac:chgData name="Fatima Pillosu" userId="a6295d4dc9e22643" providerId="LiveId" clId="{9EBBFA1C-5226-4AE6-954C-C02393E29BD8}" dt="2025-07-05T00:26:28.611" v="474" actId="21"/>
-          <ac:spMkLst>
-            <pc:docMk/>
-            <pc:sldMk cId="1077421182" sldId="256"/>
-            <ac:spMk id="12" creationId="{E023D3EF-D016-072E-69C4-85EFF20CE2E9}"/>
-          </ac:spMkLst>
-        </pc:spChg>
-        <pc:spChg chg="add del mod">
-          <ac:chgData name="Fatima Pillosu" userId="a6295d4dc9e22643" providerId="LiveId" clId="{9EBBFA1C-5226-4AE6-954C-C02393E29BD8}" dt="2025-07-05T00:26:28.611" v="474" actId="21"/>
-          <ac:spMkLst>
-            <pc:docMk/>
-            <pc:sldMk cId="1077421182" sldId="256"/>
-            <ac:spMk id="13" creationId="{2F346E7C-1DC4-3E2A-C37F-569187852DE4}"/>
-          </ac:spMkLst>
-        </pc:spChg>
-        <pc:spChg chg="add mod">
-          <ac:chgData name="Fatima Pillosu" userId="a6295d4dc9e22643" providerId="LiveId" clId="{9EBBFA1C-5226-4AE6-954C-C02393E29BD8}" dt="2025-07-10T11:07:22.400" v="1829" actId="20577"/>
-          <ac:spMkLst>
-            <pc:docMk/>
-            <pc:sldMk cId="1077421182" sldId="256"/>
-            <ac:spMk id="13" creationId="{6BD5088E-6C0A-A786-F657-716D7DD77729}"/>
-          </ac:spMkLst>
-        </pc:spChg>
-        <pc:spChg chg="add del mod">
-          <ac:chgData name="Fatima Pillosu" userId="a6295d4dc9e22643" providerId="LiveId" clId="{9EBBFA1C-5226-4AE6-954C-C02393E29BD8}" dt="2025-07-08T11:26:53.185" v="1776" actId="21"/>
-          <ac:spMkLst>
-            <pc:docMk/>
-            <pc:sldMk cId="1077421182" sldId="256"/>
-            <ac:spMk id="13" creationId="{F905F2F6-5287-BF9A-2843-E3939A3C8FE8}"/>
-          </ac:spMkLst>
-        </pc:spChg>
-        <pc:spChg chg="add mod">
-          <ac:chgData name="Fatima Pillosu" userId="a6295d4dc9e22643" providerId="LiveId" clId="{9EBBFA1C-5226-4AE6-954C-C02393E29BD8}" dt="2025-07-10T11:07:35.119" v="1839" actId="20577"/>
+        <pc:spChg chg="mod">
+          <ac:chgData name="Fatima Pillosu" userId="a6295d4dc9e22643" providerId="LiveId" clId="{87453732-75AC-4426-B5D3-B7C69C2D4F54}" dt="2026-01-15T15:13:09.285" v="88" actId="1036"/>
           <ac:spMkLst>
             <pc:docMk/>
             <pc:sldMk cId="1077421182" sldId="256"/>
             <ac:spMk id="14" creationId="{0B191BFA-9513-623C-547C-5559F1D0DB0B}"/>
           </ac:spMkLst>
         </pc:spChg>
-        <pc:spChg chg="add del mod">
-          <ac:chgData name="Fatima Pillosu" userId="a6295d4dc9e22643" providerId="LiveId" clId="{9EBBFA1C-5226-4AE6-954C-C02393E29BD8}" dt="2025-07-05T00:26:28.611" v="474" actId="21"/>
+        <pc:spChg chg="add mod">
+          <ac:chgData name="Fatima Pillosu" userId="a6295d4dc9e22643" providerId="LiveId" clId="{87453732-75AC-4426-B5D3-B7C69C2D4F54}" dt="2026-01-15T15:11:42.715" v="15" actId="1076"/>
           <ac:spMkLst>
             <pc:docMk/>
             <pc:sldMk cId="1077421182" sldId="256"/>
-            <ac:spMk id="14" creationId="{D1B7680E-5783-A793-F676-162B99024C21}"/>
+            <ac:spMk id="15" creationId="{A1FA5D73-76D9-F5FC-CD81-0ADF5B5B845B}"/>
           </ac:spMkLst>
         </pc:spChg>
-        <pc:spChg chg="add del mod">
-          <ac:chgData name="Fatima Pillosu" userId="a6295d4dc9e22643" providerId="LiveId" clId="{9EBBFA1C-5226-4AE6-954C-C02393E29BD8}" dt="2025-07-08T10:11:50.307" v="676" actId="478"/>
+        <pc:spChg chg="add mod">
+          <ac:chgData name="Fatima Pillosu" userId="a6295d4dc9e22643" providerId="LiveId" clId="{87453732-75AC-4426-B5D3-B7C69C2D4F54}" dt="2026-01-15T15:12:12.756" v="34" actId="20577"/>
           <ac:spMkLst>
             <pc:docMk/>
             <pc:sldMk cId="1077421182" sldId="256"/>
-            <ac:spMk id="14" creationId="{E023D3EF-D016-072E-69C4-85EFF20CE2E9}"/>
+            <ac:spMk id="18" creationId="{11317708-710B-0818-A9AD-4B69D3FE07B9}"/>
           </ac:spMkLst>
         </pc:spChg>
-        <pc:spChg chg="add del mod">
-          <ac:chgData name="Fatima Pillosu" userId="a6295d4dc9e22643" providerId="LiveId" clId="{9EBBFA1C-5226-4AE6-954C-C02393E29BD8}" dt="2025-07-08T10:11:49.052" v="675" actId="478"/>
+        <pc:spChg chg="add mod">
+          <ac:chgData name="Fatima Pillosu" userId="a6295d4dc9e22643" providerId="LiveId" clId="{87453732-75AC-4426-B5D3-B7C69C2D4F54}" dt="2026-01-15T15:13:01.294" v="72" actId="1038"/>
           <ac:spMkLst>
             <pc:docMk/>
             <pc:sldMk cId="1077421182" sldId="256"/>
-            <ac:spMk id="15" creationId="{2F346E7C-1DC4-3E2A-C37F-569187852DE4}"/>
+            <ac:spMk id="19" creationId="{0181E6C9-305B-B00E-0E3B-2E6DB4B1BD3D}"/>
           </ac:spMkLst>
         </pc:spChg>
-        <pc:spChg chg="add del mod">
-          <ac:chgData name="Fatima Pillosu" userId="a6295d4dc9e22643" providerId="LiveId" clId="{9EBBFA1C-5226-4AE6-954C-C02393E29BD8}" dt="2025-07-05T00:26:28.611" v="474" actId="21"/>
+        <pc:spChg chg="add mod">
+          <ac:chgData name="Fatima Pillosu" userId="a6295d4dc9e22643" providerId="LiveId" clId="{87453732-75AC-4426-B5D3-B7C69C2D4F54}" dt="2026-01-15T15:13:29.050" v="108" actId="1037"/>
           <ac:spMkLst>
             <pc:docMk/>
             <pc:sldMk cId="1077421182" sldId="256"/>
-            <ac:spMk id="15" creationId="{7F93C654-DF21-285F-29DF-14068DF0E924}"/>
+            <ac:spMk id="20" creationId="{C179A471-9FB0-A3D7-54EB-9A69D4D86A00}"/>
           </ac:spMkLst>
         </pc:spChg>
-        <pc:spChg chg="add del mod">
-          <ac:chgData name="Fatima Pillosu" userId="a6295d4dc9e22643" providerId="LiveId" clId="{9EBBFA1C-5226-4AE6-954C-C02393E29BD8}" dt="2025-07-05T00:26:28.611" v="474" actId="21"/>
-          <ac:spMkLst>
-            <pc:docMk/>
-            <pc:sldMk cId="1077421182" sldId="256"/>
-            <ac:spMk id="16" creationId="{5BC06B07-E0C4-1D8C-26E3-B0DB5E39B1F8}"/>
-          </ac:spMkLst>
-        </pc:spChg>
-        <pc:spChg chg="add del mod">
-          <ac:chgData name="Fatima Pillosu" userId="a6295d4dc9e22643" providerId="LiveId" clId="{9EBBFA1C-5226-4AE6-954C-C02393E29BD8}" dt="2025-07-08T10:11:51.685" v="677" actId="478"/>
-          <ac:spMkLst>
-            <pc:docMk/>
-            <pc:sldMk cId="1077421182" sldId="256"/>
-            <ac:spMk id="16" creationId="{D1B7680E-5783-A793-F676-162B99024C21}"/>
-          </ac:spMkLst>
-        </pc:spChg>
-        <pc:spChg chg="add del mod">
-          <ac:chgData name="Fatima Pillosu" userId="a6295d4dc9e22643" providerId="LiveId" clId="{9EBBFA1C-5226-4AE6-954C-C02393E29BD8}" dt="2025-07-08T11:26:53.185" v="1776" actId="21"/>
-          <ac:spMkLst>
-            <pc:docMk/>
-            <pc:sldMk cId="1077421182" sldId="256"/>
-            <ac:spMk id="17" creationId="{7F93C654-DF21-285F-29DF-14068DF0E924}"/>
-          </ac:spMkLst>
-        </pc:spChg>
-        <pc:spChg chg="add del mod">
-          <ac:chgData name="Fatima Pillosu" userId="a6295d4dc9e22643" providerId="LiveId" clId="{9EBBFA1C-5226-4AE6-954C-C02393E29BD8}" dt="2025-07-05T00:26:28.611" v="474" actId="21"/>
-          <ac:spMkLst>
-            <pc:docMk/>
-            <pc:sldMk cId="1077421182" sldId="256"/>
-            <ac:spMk id="17" creationId="{8EC336CC-6D57-3EEF-2A6C-A56380CB8873}"/>
-          </ac:spMkLst>
-        </pc:spChg>
-        <pc:spChg chg="add del mod">
-          <ac:chgData name="Fatima Pillosu" userId="a6295d4dc9e22643" providerId="LiveId" clId="{9EBBFA1C-5226-4AE6-954C-C02393E29BD8}" dt="2025-07-05T00:26:28.611" v="474" actId="21"/>
-          <ac:spMkLst>
-            <pc:docMk/>
-            <pc:sldMk cId="1077421182" sldId="256"/>
-            <ac:spMk id="18" creationId="{1D7A2307-99C5-6B69-79DD-B0693D965F9C}"/>
-          </ac:spMkLst>
-        </pc:spChg>
-        <pc:spChg chg="add del mod ord">
-          <ac:chgData name="Fatima Pillosu" userId="a6295d4dc9e22643" providerId="LiveId" clId="{9EBBFA1C-5226-4AE6-954C-C02393E29BD8}" dt="2025-07-08T11:26:53.185" v="1776" actId="21"/>
-          <ac:spMkLst>
-            <pc:docMk/>
-            <pc:sldMk cId="1077421182" sldId="256"/>
-            <ac:spMk id="18" creationId="{5BC06B07-E0C4-1D8C-26E3-B0DB5E39B1F8}"/>
-          </ac:spMkLst>
-        </pc:spChg>
-        <pc:spChg chg="add del mod">
-          <ac:chgData name="Fatima Pillosu" userId="a6295d4dc9e22643" providerId="LiveId" clId="{9EBBFA1C-5226-4AE6-954C-C02393E29BD8}" dt="2025-07-08T11:26:53.185" v="1776" actId="21"/>
-          <ac:spMkLst>
-            <pc:docMk/>
-            <pc:sldMk cId="1077421182" sldId="256"/>
-            <ac:spMk id="19" creationId="{8EC336CC-6D57-3EEF-2A6C-A56380CB8873}"/>
-          </ac:spMkLst>
-        </pc:spChg>
-        <pc:spChg chg="add del mod">
-          <ac:chgData name="Fatima Pillosu" userId="a6295d4dc9e22643" providerId="LiveId" clId="{9EBBFA1C-5226-4AE6-954C-C02393E29BD8}" dt="2025-07-05T00:26:28.611" v="474" actId="21"/>
-          <ac:spMkLst>
-            <pc:docMk/>
-            <pc:sldMk cId="1077421182" sldId="256"/>
-            <ac:spMk id="19" creationId="{BBA8908B-35D8-5B89-D526-CE4ED5F9EE59}"/>
-          </ac:spMkLst>
-        </pc:spChg>
-        <pc:spChg chg="add del mod">
-          <ac:chgData name="Fatima Pillosu" userId="a6295d4dc9e22643" providerId="LiveId" clId="{9EBBFA1C-5226-4AE6-954C-C02393E29BD8}" dt="2025-07-08T11:26:53.185" v="1776" actId="21"/>
-          <ac:spMkLst>
-            <pc:docMk/>
-            <pc:sldMk cId="1077421182" sldId="256"/>
-            <ac:spMk id="20" creationId="{1D7A2307-99C5-6B69-79DD-B0693D965F9C}"/>
-          </ac:spMkLst>
-        </pc:spChg>
-        <pc:spChg chg="add del mod">
-          <ac:chgData name="Fatima Pillosu" userId="a6295d4dc9e22643" providerId="LiveId" clId="{9EBBFA1C-5226-4AE6-954C-C02393E29BD8}" dt="2025-07-05T00:26:28.611" v="474" actId="21"/>
-          <ac:spMkLst>
-            <pc:docMk/>
-            <pc:sldMk cId="1077421182" sldId="256"/>
-            <ac:spMk id="20" creationId="{F9D74EAF-3CFE-347D-2DD8-53F82E0D4697}"/>
-          </ac:spMkLst>
-        </pc:spChg>
-        <pc:spChg chg="add del mod">
-          <ac:chgData name="Fatima Pillosu" userId="a6295d4dc9e22643" providerId="LiveId" clId="{9EBBFA1C-5226-4AE6-954C-C02393E29BD8}" dt="2025-07-05T00:26:28.611" v="474" actId="21"/>
-          <ac:spMkLst>
-            <pc:docMk/>
-            <pc:sldMk cId="1077421182" sldId="256"/>
-            <ac:spMk id="21" creationId="{9337ED95-58F5-BE8E-A6E2-C2CF9D05D6F5}"/>
-          </ac:spMkLst>
-        </pc:spChg>
-        <pc:spChg chg="add del mod">
-          <ac:chgData name="Fatima Pillosu" userId="a6295d4dc9e22643" providerId="LiveId" clId="{9EBBFA1C-5226-4AE6-954C-C02393E29BD8}" dt="2025-07-08T11:26:53.185" v="1776" actId="21"/>
-          <ac:spMkLst>
-            <pc:docMk/>
-            <pc:sldMk cId="1077421182" sldId="256"/>
-            <ac:spMk id="21" creationId="{BBA8908B-35D8-5B89-D526-CE4ED5F9EE59}"/>
-          </ac:spMkLst>
-        </pc:spChg>
-        <pc:spChg chg="add del mod">
-          <ac:chgData name="Fatima Pillosu" userId="a6295d4dc9e22643" providerId="LiveId" clId="{9EBBFA1C-5226-4AE6-954C-C02393E29BD8}" dt="2025-07-08T11:26:53.185" v="1776" actId="21"/>
-          <ac:spMkLst>
-            <pc:docMk/>
-            <pc:sldMk cId="1077421182" sldId="256"/>
-            <ac:spMk id="22" creationId="{F9D74EAF-3CFE-347D-2DD8-53F82E0D4697}"/>
-          </ac:spMkLst>
-        </pc:spChg>
-        <pc:spChg chg="add del mod">
-          <ac:chgData name="Fatima Pillosu" userId="a6295d4dc9e22643" providerId="LiveId" clId="{9EBBFA1C-5226-4AE6-954C-C02393E29BD8}" dt="2025-07-08T10:25:26.779" v="1117" actId="478"/>
-          <ac:spMkLst>
-            <pc:docMk/>
-            <pc:sldMk cId="1077421182" sldId="256"/>
-            <ac:spMk id="23" creationId="{9337ED95-58F5-BE8E-A6E2-C2CF9D05D6F5}"/>
-          </ac:spMkLst>
-        </pc:spChg>
-        <pc:spChg chg="add del mod">
-          <ac:chgData name="Fatima Pillosu" userId="a6295d4dc9e22643" providerId="LiveId" clId="{9EBBFA1C-5226-4AE6-954C-C02393E29BD8}" dt="2025-07-08T10:25:26.779" v="1117" actId="478"/>
-          <ac:spMkLst>
-            <pc:docMk/>
-            <pc:sldMk cId="1077421182" sldId="256"/>
-            <ac:spMk id="24" creationId="{8B6D3A82-BB09-F970-C0FF-F887344F34AE}"/>
-          </ac:spMkLst>
-        </pc:spChg>
-        <pc:spChg chg="add del mod">
-          <ac:chgData name="Fatima Pillosu" userId="a6295d4dc9e22643" providerId="LiveId" clId="{9EBBFA1C-5226-4AE6-954C-C02393E29BD8}" dt="2025-07-08T10:25:26.779" v="1117" actId="478"/>
-          <ac:spMkLst>
-            <pc:docMk/>
-            <pc:sldMk cId="1077421182" sldId="256"/>
-            <ac:spMk id="25" creationId="{35321454-EEB6-C5A4-C101-0A07B2A1DDF6}"/>
-          </ac:spMkLst>
-        </pc:spChg>
-        <pc:spChg chg="add del mod">
-          <ac:chgData name="Fatima Pillosu" userId="a6295d4dc9e22643" providerId="LiveId" clId="{9EBBFA1C-5226-4AE6-954C-C02393E29BD8}" dt="2025-07-08T10:25:26.779" v="1117" actId="478"/>
-          <ac:spMkLst>
-            <pc:docMk/>
-            <pc:sldMk cId="1077421182" sldId="256"/>
-            <ac:spMk id="26" creationId="{398851B6-E9D8-BA20-6C6F-C079D3922A75}"/>
-          </ac:spMkLst>
-        </pc:spChg>
-        <pc:spChg chg="add del mod">
-          <ac:chgData name="Fatima Pillosu" userId="a6295d4dc9e22643" providerId="LiveId" clId="{9EBBFA1C-5226-4AE6-954C-C02393E29BD8}" dt="2025-07-08T10:25:26.779" v="1117" actId="478"/>
-          <ac:spMkLst>
-            <pc:docMk/>
-            <pc:sldMk cId="1077421182" sldId="256"/>
-            <ac:spMk id="27" creationId="{81736EF8-9A99-7D54-6EAC-8D974AB20B69}"/>
-          </ac:spMkLst>
-        </pc:spChg>
-        <pc:spChg chg="add del mod">
-          <ac:chgData name="Fatima Pillosu" userId="a6295d4dc9e22643" providerId="LiveId" clId="{9EBBFA1C-5226-4AE6-954C-C02393E29BD8}" dt="2025-07-08T10:25:26.779" v="1117" actId="478"/>
-          <ac:spMkLst>
-            <pc:docMk/>
-            <pc:sldMk cId="1077421182" sldId="256"/>
-            <ac:spMk id="28" creationId="{FF95CB35-03C1-489D-5889-094A1B388D70}"/>
-          </ac:spMkLst>
-        </pc:spChg>
-        <pc:spChg chg="del">
-          <ac:chgData name="Fatima Pillosu" userId="a6295d4dc9e22643" providerId="LiveId" clId="{9EBBFA1C-5226-4AE6-954C-C02393E29BD8}" dt="2025-07-05T00:08:39.560" v="0" actId="478"/>
-          <ac:spMkLst>
-            <pc:docMk/>
-            <pc:sldMk cId="1077421182" sldId="256"/>
-            <ac:spMk id="29" creationId="{7CA80247-944D-A79D-DD75-278A2FC157C4}"/>
-          </ac:spMkLst>
-        </pc:spChg>
-        <pc:spChg chg="add del mod ord">
-          <ac:chgData name="Fatima Pillosu" userId="a6295d4dc9e22643" providerId="LiveId" clId="{9EBBFA1C-5226-4AE6-954C-C02393E29BD8}" dt="2025-07-05T00:26:28.611" v="474" actId="21"/>
-          <ac:spMkLst>
-            <pc:docMk/>
-            <pc:sldMk cId="1077421182" sldId="256"/>
-            <ac:spMk id="30" creationId="{11D0BEA8-4C97-735F-B454-B20FE6FD6664}"/>
-          </ac:spMkLst>
-        </pc:spChg>
-        <pc:spChg chg="add del mod">
-          <ac:chgData name="Fatima Pillosu" userId="a6295d4dc9e22643" providerId="LiveId" clId="{9EBBFA1C-5226-4AE6-954C-C02393E29BD8}" dt="2025-07-05T00:26:28.611" v="474" actId="21"/>
-          <ac:spMkLst>
-            <pc:docMk/>
-            <pc:sldMk cId="1077421182" sldId="256"/>
-            <ac:spMk id="31" creationId="{81736EF8-9A99-7D54-6EAC-8D974AB20B69}"/>
-          </ac:spMkLst>
-        </pc:spChg>
-        <pc:spChg chg="add del mod">
-          <ac:chgData name="Fatima Pillosu" userId="a6295d4dc9e22643" providerId="LiveId" clId="{9EBBFA1C-5226-4AE6-954C-C02393E29BD8}" dt="2025-07-05T00:26:28.611" v="474" actId="21"/>
-          <ac:spMkLst>
-            <pc:docMk/>
-            <pc:sldMk cId="1077421182" sldId="256"/>
-            <ac:spMk id="32" creationId="{FF95CB35-03C1-489D-5889-094A1B388D70}"/>
-          </ac:spMkLst>
-        </pc:spChg>
-        <pc:spChg chg="add del mod ord">
-          <ac:chgData name="Fatima Pillosu" userId="a6295d4dc9e22643" providerId="LiveId" clId="{9EBBFA1C-5226-4AE6-954C-C02393E29BD8}" dt="2025-07-05T00:26:28.611" v="474" actId="21"/>
-          <ac:spMkLst>
-            <pc:docMk/>
-            <pc:sldMk cId="1077421182" sldId="256"/>
-            <ac:spMk id="33" creationId="{C958D7B8-BC29-7508-F405-77D6128B8AFF}"/>
-          </ac:spMkLst>
-        </pc:spChg>
-        <pc:spChg chg="add del mod ord">
-          <ac:chgData name="Fatima Pillosu" userId="a6295d4dc9e22643" providerId="LiveId" clId="{9EBBFA1C-5226-4AE6-954C-C02393E29BD8}" dt="2025-07-05T00:26:28.611" v="474" actId="21"/>
-          <ac:spMkLst>
-            <pc:docMk/>
-            <pc:sldMk cId="1077421182" sldId="256"/>
-            <ac:spMk id="34" creationId="{204795FA-B9E8-F8C0-D0CC-0DA8FCD26B47}"/>
-          </ac:spMkLst>
-        </pc:spChg>
-        <pc:spChg chg="add del mod ord">
-          <ac:chgData name="Fatima Pillosu" userId="a6295d4dc9e22643" providerId="LiveId" clId="{9EBBFA1C-5226-4AE6-954C-C02393E29BD8}" dt="2025-07-08T11:26:53.185" v="1776" actId="21"/>
-          <ac:spMkLst>
-            <pc:docMk/>
-            <pc:sldMk cId="1077421182" sldId="256"/>
-            <ac:spMk id="35" creationId="{9C1A1E7F-FA5E-4B5B-25C5-907F55A6CF15}"/>
-          </ac:spMkLst>
-        </pc:spChg>
-        <pc:spChg chg="add del mod ord">
-          <ac:chgData name="Fatima Pillosu" userId="a6295d4dc9e22643" providerId="LiveId" clId="{9EBBFA1C-5226-4AE6-954C-C02393E29BD8}" dt="2025-07-05T00:26:28.611" v="474" actId="21"/>
-          <ac:spMkLst>
-            <pc:docMk/>
-            <pc:sldMk cId="1077421182" sldId="256"/>
-            <ac:spMk id="35" creationId="{AEF58A4C-D7E5-1DB7-8CBA-638A2D2BAD88}"/>
-          </ac:spMkLst>
-        </pc:spChg>
-        <pc:spChg chg="add del mod">
-          <ac:chgData name="Fatima Pillosu" userId="a6295d4dc9e22643" providerId="LiveId" clId="{9EBBFA1C-5226-4AE6-954C-C02393E29BD8}" dt="2025-07-08T10:14:04" v="750" actId="478"/>
-          <ac:spMkLst>
-            <pc:docMk/>
-            <pc:sldMk cId="1077421182" sldId="256"/>
-            <ac:spMk id="36" creationId="{9AAE4BC7-86F6-668E-22CD-34F5FC3E0109}"/>
-          </ac:spMkLst>
-        </pc:spChg>
-        <pc:spChg chg="del">
-          <ac:chgData name="Fatima Pillosu" userId="a6295d4dc9e22643" providerId="LiveId" clId="{9EBBFA1C-5226-4AE6-954C-C02393E29BD8}" dt="2025-07-05T00:09:06.328" v="31" actId="478"/>
-          <ac:spMkLst>
-            <pc:docMk/>
-            <pc:sldMk cId="1077421182" sldId="256"/>
-            <ac:spMk id="36" creationId="{EF33B4CF-E544-0981-3F38-6470DAE498C6}"/>
-          </ac:spMkLst>
-        </pc:spChg>
-        <pc:spChg chg="del">
-          <ac:chgData name="Fatima Pillosu" userId="a6295d4dc9e22643" providerId="LiveId" clId="{9EBBFA1C-5226-4AE6-954C-C02393E29BD8}" dt="2025-07-05T00:09:06.328" v="31" actId="478"/>
-          <ac:spMkLst>
-            <pc:docMk/>
-            <pc:sldMk cId="1077421182" sldId="256"/>
-            <ac:spMk id="37" creationId="{15DA2081-548E-0ABB-3536-BB36B41A84BE}"/>
-          </ac:spMkLst>
-        </pc:spChg>
-        <pc:spChg chg="add del mod">
-          <ac:chgData name="Fatima Pillosu" userId="a6295d4dc9e22643" providerId="LiveId" clId="{9EBBFA1C-5226-4AE6-954C-C02393E29BD8}" dt="2025-07-08T11:26:53.185" v="1776" actId="21"/>
-          <ac:spMkLst>
-            <pc:docMk/>
-            <pc:sldMk cId="1077421182" sldId="256"/>
-            <ac:spMk id="37" creationId="{8E6D92FE-9CCF-E535-4712-749BC5D49097}"/>
-          </ac:spMkLst>
-        </pc:spChg>
-        <pc:spChg chg="del">
-          <ac:chgData name="Fatima Pillosu" userId="a6295d4dc9e22643" providerId="LiveId" clId="{9EBBFA1C-5226-4AE6-954C-C02393E29BD8}" dt="2025-07-05T00:09:06.328" v="31" actId="478"/>
-          <ac:spMkLst>
-            <pc:docMk/>
-            <pc:sldMk cId="1077421182" sldId="256"/>
-            <ac:spMk id="38" creationId="{3EFAA06B-C3D4-AAD4-ACF6-E55FA1255025}"/>
-          </ac:spMkLst>
-        </pc:spChg>
-        <pc:spChg chg="add del mod topLvl">
-          <ac:chgData name="Fatima Pillosu" userId="a6295d4dc9e22643" providerId="LiveId" clId="{9EBBFA1C-5226-4AE6-954C-C02393E29BD8}" dt="2025-07-08T11:26:53.185" v="1776" actId="21"/>
-          <ac:spMkLst>
-            <pc:docMk/>
-            <pc:sldMk cId="1077421182" sldId="256"/>
-            <ac:spMk id="38" creationId="{7B0D5160-46AD-D54D-2173-441E44C8D34B}"/>
-          </ac:spMkLst>
-        </pc:spChg>
-        <pc:spChg chg="add del mod topLvl">
-          <ac:chgData name="Fatima Pillosu" userId="a6295d4dc9e22643" providerId="LiveId" clId="{9EBBFA1C-5226-4AE6-954C-C02393E29BD8}" dt="2025-07-08T11:26:53.185" v="1776" actId="21"/>
-          <ac:spMkLst>
-            <pc:docMk/>
-            <pc:sldMk cId="1077421182" sldId="256"/>
-            <ac:spMk id="39" creationId="{1362F491-3E57-1D9B-DB03-271E44F061A5}"/>
-          </ac:spMkLst>
-        </pc:spChg>
-        <pc:spChg chg="del">
-          <ac:chgData name="Fatima Pillosu" userId="a6295d4dc9e22643" providerId="LiveId" clId="{9EBBFA1C-5226-4AE6-954C-C02393E29BD8}" dt="2025-07-05T00:09:06.328" v="31" actId="478"/>
-          <ac:spMkLst>
-            <pc:docMk/>
-            <pc:sldMk cId="1077421182" sldId="256"/>
-            <ac:spMk id="39" creationId="{38876436-DD07-918B-DDE2-4E4B4EE1525C}"/>
-          </ac:spMkLst>
-        </pc:spChg>
-        <pc:spChg chg="add del mod topLvl">
-          <ac:chgData name="Fatima Pillosu" userId="a6295d4dc9e22643" providerId="LiveId" clId="{9EBBFA1C-5226-4AE6-954C-C02393E29BD8}" dt="2025-07-08T11:26:53.185" v="1776" actId="21"/>
-          <ac:spMkLst>
-            <pc:docMk/>
-            <pc:sldMk cId="1077421182" sldId="256"/>
-            <ac:spMk id="40" creationId="{C922A374-9135-45AE-F348-21470D4EBDF2}"/>
-          </ac:spMkLst>
-        </pc:spChg>
-        <pc:spChg chg="add del mod topLvl">
-          <ac:chgData name="Fatima Pillosu" userId="a6295d4dc9e22643" providerId="LiveId" clId="{9EBBFA1C-5226-4AE6-954C-C02393E29BD8}" dt="2025-07-08T11:26:53.185" v="1776" actId="21"/>
-          <ac:spMkLst>
-            <pc:docMk/>
-            <pc:sldMk cId="1077421182" sldId="256"/>
-            <ac:spMk id="41" creationId="{5D0B19A4-B2A2-D20E-9F72-96A863DE9165}"/>
-          </ac:spMkLst>
-        </pc:spChg>
-        <pc:spChg chg="add del mod topLvl">
-          <ac:chgData name="Fatima Pillosu" userId="a6295d4dc9e22643" providerId="LiveId" clId="{9EBBFA1C-5226-4AE6-954C-C02393E29BD8}" dt="2025-07-08T11:26:53.185" v="1776" actId="21"/>
-          <ac:spMkLst>
-            <pc:docMk/>
-            <pc:sldMk cId="1077421182" sldId="256"/>
-            <ac:spMk id="42" creationId="{CB3164D9-248A-ED3E-F9E7-F2107AE72F3E}"/>
-          </ac:spMkLst>
-        </pc:spChg>
-        <pc:spChg chg="del">
-          <ac:chgData name="Fatima Pillosu" userId="a6295d4dc9e22643" providerId="LiveId" clId="{9EBBFA1C-5226-4AE6-954C-C02393E29BD8}" dt="2025-07-05T00:09:06.328" v="31" actId="478"/>
-          <ac:spMkLst>
-            <pc:docMk/>
-            <pc:sldMk cId="1077421182" sldId="256"/>
-            <ac:spMk id="43" creationId="{F213C0E8-B47C-2D15-4C6A-F207529E1FE3}"/>
-          </ac:spMkLst>
-        </pc:spChg>
-        <pc:spChg chg="add del mod topLvl">
-          <ac:chgData name="Fatima Pillosu" userId="a6295d4dc9e22643" providerId="LiveId" clId="{9EBBFA1C-5226-4AE6-954C-C02393E29BD8}" dt="2025-07-08T11:26:53.185" v="1776" actId="21"/>
-          <ac:spMkLst>
-            <pc:docMk/>
-            <pc:sldMk cId="1077421182" sldId="256"/>
-            <ac:spMk id="44" creationId="{1B705EDE-2279-1B9A-3348-484B4D25E06B}"/>
-          </ac:spMkLst>
-        </pc:spChg>
-        <pc:spChg chg="del">
-          <ac:chgData name="Fatima Pillosu" userId="a6295d4dc9e22643" providerId="LiveId" clId="{9EBBFA1C-5226-4AE6-954C-C02393E29BD8}" dt="2025-07-05T00:09:06.328" v="31" actId="478"/>
-          <ac:spMkLst>
-            <pc:docMk/>
-            <pc:sldMk cId="1077421182" sldId="256"/>
-            <ac:spMk id="44" creationId="{707EDAB5-6595-3FA3-AC11-6D8719C02089}"/>
-          </ac:spMkLst>
-        </pc:spChg>
-        <pc:spChg chg="add del">
-          <ac:chgData name="Fatima Pillosu" userId="a6295d4dc9e22643" providerId="LiveId" clId="{9EBBFA1C-5226-4AE6-954C-C02393E29BD8}" dt="2025-07-05T00:26:25.956" v="473" actId="478"/>
-          <ac:spMkLst>
-            <pc:docMk/>
-            <pc:sldMk cId="1077421182" sldId="256"/>
-            <ac:spMk id="45" creationId="{6DC8E7A3-31EF-2BB1-6640-0DC81C9D9C3D}"/>
-          </ac:spMkLst>
-        </pc:spChg>
-        <pc:spChg chg="add del mod topLvl">
-          <ac:chgData name="Fatima Pillosu" userId="a6295d4dc9e22643" providerId="LiveId" clId="{9EBBFA1C-5226-4AE6-954C-C02393E29BD8}" dt="2025-07-08T11:26:53.185" v="1776" actId="21"/>
-          <ac:spMkLst>
-            <pc:docMk/>
-            <pc:sldMk cId="1077421182" sldId="256"/>
-            <ac:spMk id="45" creationId="{817946E3-6C8F-4D67-07DB-B8C82876D2A4}"/>
-          </ac:spMkLst>
-        </pc:spChg>
-        <pc:spChg chg="add del mod topLvl">
-          <ac:chgData name="Fatima Pillosu" userId="a6295d4dc9e22643" providerId="LiveId" clId="{9EBBFA1C-5226-4AE6-954C-C02393E29BD8}" dt="2025-07-08T11:26:53.185" v="1776" actId="21"/>
-          <ac:spMkLst>
-            <pc:docMk/>
-            <pc:sldMk cId="1077421182" sldId="256"/>
-            <ac:spMk id="46" creationId="{3DA9995A-2F39-86B0-AE43-80C06021718C}"/>
-          </ac:spMkLst>
-        </pc:spChg>
-        <pc:spChg chg="add del mod topLvl">
-          <ac:chgData name="Fatima Pillosu" userId="a6295d4dc9e22643" providerId="LiveId" clId="{9EBBFA1C-5226-4AE6-954C-C02393E29BD8}" dt="2025-07-08T11:26:53.185" v="1776" actId="21"/>
-          <ac:spMkLst>
-            <pc:docMk/>
-            <pc:sldMk cId="1077421182" sldId="256"/>
-            <ac:spMk id="47" creationId="{F8D21F9B-5C62-508B-72A4-FDE3701CFC1F}"/>
-          </ac:spMkLst>
-        </pc:spChg>
-        <pc:spChg chg="add del mod">
-          <ac:chgData name="Fatima Pillosu" userId="a6295d4dc9e22643" providerId="LiveId" clId="{9EBBFA1C-5226-4AE6-954C-C02393E29BD8}" dt="2025-07-05T00:27:08.404" v="488" actId="21"/>
-          <ac:spMkLst>
-            <pc:docMk/>
-            <pc:sldMk cId="1077421182" sldId="256"/>
-            <ac:spMk id="48" creationId="{73B4CEF0-7344-1176-C2AA-7C4FA2171FE1}"/>
-          </ac:spMkLst>
-        </pc:spChg>
-        <pc:spChg chg="add del mod topLvl">
-          <ac:chgData name="Fatima Pillosu" userId="a6295d4dc9e22643" providerId="LiveId" clId="{9EBBFA1C-5226-4AE6-954C-C02393E29BD8}" dt="2025-07-08T11:26:53.185" v="1776" actId="21"/>
-          <ac:spMkLst>
-            <pc:docMk/>
-            <pc:sldMk cId="1077421182" sldId="256"/>
-            <ac:spMk id="48" creationId="{B2214090-534F-3E76-D77A-656834F6C453}"/>
-          </ac:spMkLst>
-        </pc:spChg>
-        <pc:spChg chg="add del mod topLvl">
-          <ac:chgData name="Fatima Pillosu" userId="a6295d4dc9e22643" providerId="LiveId" clId="{9EBBFA1C-5226-4AE6-954C-C02393E29BD8}" dt="2025-07-08T11:26:53.185" v="1776" actId="21"/>
-          <ac:spMkLst>
-            <pc:docMk/>
-            <pc:sldMk cId="1077421182" sldId="256"/>
-            <ac:spMk id="49" creationId="{91C38AA6-715D-A739-7922-B79CDE6205C3}"/>
-          </ac:spMkLst>
-        </pc:spChg>
-        <pc:spChg chg="add del mod">
-          <ac:chgData name="Fatima Pillosu" userId="a6295d4dc9e22643" providerId="LiveId" clId="{9EBBFA1C-5226-4AE6-954C-C02393E29BD8}" dt="2025-07-05T00:27:08.404" v="488" actId="21"/>
-          <ac:spMkLst>
-            <pc:docMk/>
-            <pc:sldMk cId="1077421182" sldId="256"/>
-            <ac:spMk id="51" creationId="{11D0BEA8-4C97-735F-B454-B20FE6FD6664}"/>
-          </ac:spMkLst>
-        </pc:spChg>
-        <pc:spChg chg="add del mod topLvl">
-          <ac:chgData name="Fatima Pillosu" userId="a6295d4dc9e22643" providerId="LiveId" clId="{9EBBFA1C-5226-4AE6-954C-C02393E29BD8}" dt="2025-07-08T11:26:53.185" v="1776" actId="21"/>
-          <ac:spMkLst>
-            <pc:docMk/>
-            <pc:sldMk cId="1077421182" sldId="256"/>
-            <ac:spMk id="52" creationId="{7BF1475F-5E3E-FB2E-6C3B-67741103E1B0}"/>
-          </ac:spMkLst>
-        </pc:spChg>
-        <pc:spChg chg="add del mod">
-          <ac:chgData name="Fatima Pillosu" userId="a6295d4dc9e22643" providerId="LiveId" clId="{9EBBFA1C-5226-4AE6-954C-C02393E29BD8}" dt="2025-07-05T00:27:08.404" v="488" actId="21"/>
-          <ac:spMkLst>
-            <pc:docMk/>
-            <pc:sldMk cId="1077421182" sldId="256"/>
-            <ac:spMk id="52" creationId="{C958D7B8-BC29-7508-F405-77D6128B8AFF}"/>
-          </ac:spMkLst>
-        </pc:spChg>
-        <pc:spChg chg="add del mod topLvl">
-          <ac:chgData name="Fatima Pillosu" userId="a6295d4dc9e22643" providerId="LiveId" clId="{9EBBFA1C-5226-4AE6-954C-C02393E29BD8}" dt="2025-07-08T11:26:53.185" v="1776" actId="21"/>
-          <ac:spMkLst>
-            <pc:docMk/>
-            <pc:sldMk cId="1077421182" sldId="256"/>
-            <ac:spMk id="53" creationId="{17D045C9-2785-8D0B-48BC-9623A20A95BE}"/>
-          </ac:spMkLst>
-        </pc:spChg>
-        <pc:spChg chg="add del mod">
-          <ac:chgData name="Fatima Pillosu" userId="a6295d4dc9e22643" providerId="LiveId" clId="{9EBBFA1C-5226-4AE6-954C-C02393E29BD8}" dt="2025-07-05T00:27:08.404" v="488" actId="21"/>
-          <ac:spMkLst>
-            <pc:docMk/>
-            <pc:sldMk cId="1077421182" sldId="256"/>
-            <ac:spMk id="53" creationId="{204795FA-B9E8-F8C0-D0CC-0DA8FCD26B47}"/>
-          </ac:spMkLst>
-        </pc:spChg>
-        <pc:spChg chg="add del mod">
-          <ac:chgData name="Fatima Pillosu" userId="a6295d4dc9e22643" providerId="LiveId" clId="{9EBBFA1C-5226-4AE6-954C-C02393E29BD8}" dt="2025-07-05T00:27:08.404" v="488" actId="21"/>
-          <ac:spMkLst>
-            <pc:docMk/>
-            <pc:sldMk cId="1077421182" sldId="256"/>
-            <ac:spMk id="54" creationId="{AEF58A4C-D7E5-1DB7-8CBA-638A2D2BAD88}"/>
-          </ac:spMkLst>
-        </pc:spChg>
-        <pc:spChg chg="add del mod topLvl">
-          <ac:chgData name="Fatima Pillosu" userId="a6295d4dc9e22643" providerId="LiveId" clId="{9EBBFA1C-5226-4AE6-954C-C02393E29BD8}" dt="2025-07-08T11:26:53.185" v="1776" actId="21"/>
-          <ac:spMkLst>
-            <pc:docMk/>
-            <pc:sldMk cId="1077421182" sldId="256"/>
-            <ac:spMk id="54" creationId="{FA1ADE2D-7850-5D25-BBF5-BDBEC7AC4EB2}"/>
-          </ac:spMkLst>
-        </pc:spChg>
-        <pc:spChg chg="add del mod topLvl">
-          <ac:chgData name="Fatima Pillosu" userId="a6295d4dc9e22643" providerId="LiveId" clId="{9EBBFA1C-5226-4AE6-954C-C02393E29BD8}" dt="2025-07-08T11:26:53.185" v="1776" actId="21"/>
-          <ac:spMkLst>
-            <pc:docMk/>
-            <pc:sldMk cId="1077421182" sldId="256"/>
-            <ac:spMk id="55" creationId="{E91390B2-8AB6-5B18-1187-7AAF22EB9C01}"/>
-          </ac:spMkLst>
-        </pc:spChg>
-        <pc:spChg chg="add del mod">
-          <ac:chgData name="Fatima Pillosu" userId="a6295d4dc9e22643" providerId="LiveId" clId="{9EBBFA1C-5226-4AE6-954C-C02393E29BD8}" dt="2025-07-05T00:27:08.404" v="488" actId="21"/>
-          <ac:spMkLst>
-            <pc:docMk/>
-            <pc:sldMk cId="1077421182" sldId="256"/>
-            <ac:spMk id="55" creationId="{F905F2F6-5287-BF9A-2843-E3939A3C8FE8}"/>
-          </ac:spMkLst>
-        </pc:spChg>
-        <pc:spChg chg="add del mod topLvl">
-          <ac:chgData name="Fatima Pillosu" userId="a6295d4dc9e22643" providerId="LiveId" clId="{9EBBFA1C-5226-4AE6-954C-C02393E29BD8}" dt="2025-07-08T11:26:53.185" v="1776" actId="21"/>
-          <ac:spMkLst>
-            <pc:docMk/>
-            <pc:sldMk cId="1077421182" sldId="256"/>
-            <ac:spMk id="56" creationId="{51D56ED1-D88E-B438-88A3-31C2A3C03D2F}"/>
-          </ac:spMkLst>
-        </pc:spChg>
-        <pc:spChg chg="add del mod">
-          <ac:chgData name="Fatima Pillosu" userId="a6295d4dc9e22643" providerId="LiveId" clId="{9EBBFA1C-5226-4AE6-954C-C02393E29BD8}" dt="2025-07-05T00:27:08.404" v="488" actId="21"/>
-          <ac:spMkLst>
-            <pc:docMk/>
-            <pc:sldMk cId="1077421182" sldId="256"/>
-            <ac:spMk id="56" creationId="{E023D3EF-D016-072E-69C4-85EFF20CE2E9}"/>
-          </ac:spMkLst>
-        </pc:spChg>
-        <pc:spChg chg="add del mod">
-          <ac:chgData name="Fatima Pillosu" userId="a6295d4dc9e22643" providerId="LiveId" clId="{9EBBFA1C-5226-4AE6-954C-C02393E29BD8}" dt="2025-07-05T00:27:08.404" v="488" actId="21"/>
-          <ac:spMkLst>
-            <pc:docMk/>
-            <pc:sldMk cId="1077421182" sldId="256"/>
-            <ac:spMk id="57" creationId="{2F346E7C-1DC4-3E2A-C37F-569187852DE4}"/>
-          </ac:spMkLst>
-        </pc:spChg>
-        <pc:spChg chg="add del mod topLvl">
-          <ac:chgData name="Fatima Pillosu" userId="a6295d4dc9e22643" providerId="LiveId" clId="{9EBBFA1C-5226-4AE6-954C-C02393E29BD8}" dt="2025-07-08T11:26:53.185" v="1776" actId="21"/>
-          <ac:spMkLst>
-            <pc:docMk/>
-            <pc:sldMk cId="1077421182" sldId="256"/>
-            <ac:spMk id="57" creationId="{56AC75A2-3246-5725-FAD8-FE1062B2E193}"/>
-          </ac:spMkLst>
-        </pc:spChg>
-        <pc:spChg chg="add del mod topLvl">
-          <ac:chgData name="Fatima Pillosu" userId="a6295d4dc9e22643" providerId="LiveId" clId="{9EBBFA1C-5226-4AE6-954C-C02393E29BD8}" dt="2025-07-08T11:26:53.185" v="1776" actId="21"/>
-          <ac:spMkLst>
-            <pc:docMk/>
-            <pc:sldMk cId="1077421182" sldId="256"/>
-            <ac:spMk id="58" creationId="{9066BB45-58DA-1A23-5E05-3896F36EA204}"/>
-          </ac:spMkLst>
-        </pc:spChg>
-        <pc:spChg chg="add del mod">
-          <ac:chgData name="Fatima Pillosu" userId="a6295d4dc9e22643" providerId="LiveId" clId="{9EBBFA1C-5226-4AE6-954C-C02393E29BD8}" dt="2025-07-05T00:27:08.404" v="488" actId="21"/>
-          <ac:spMkLst>
-            <pc:docMk/>
-            <pc:sldMk cId="1077421182" sldId="256"/>
-            <ac:spMk id="58" creationId="{D1B7680E-5783-A793-F676-162B99024C21}"/>
-          </ac:spMkLst>
-        </pc:spChg>
-        <pc:spChg chg="add del mod">
-          <ac:chgData name="Fatima Pillosu" userId="a6295d4dc9e22643" providerId="LiveId" clId="{9EBBFA1C-5226-4AE6-954C-C02393E29BD8}" dt="2025-07-05T00:27:08.404" v="488" actId="21"/>
-          <ac:spMkLst>
-            <pc:docMk/>
-            <pc:sldMk cId="1077421182" sldId="256"/>
-            <ac:spMk id="59" creationId="{7F93C654-DF21-285F-29DF-14068DF0E924}"/>
-          </ac:spMkLst>
-        </pc:spChg>
-        <pc:spChg chg="add del mod topLvl">
-          <ac:chgData name="Fatima Pillosu" userId="a6295d4dc9e22643" providerId="LiveId" clId="{9EBBFA1C-5226-4AE6-954C-C02393E29BD8}" dt="2025-07-08T11:26:53.185" v="1776" actId="21"/>
-          <ac:spMkLst>
-            <pc:docMk/>
-            <pc:sldMk cId="1077421182" sldId="256"/>
-            <ac:spMk id="59" creationId="{877F3CAD-29B8-385F-F497-1C8B89B60F90}"/>
-          </ac:spMkLst>
-        </pc:spChg>
-        <pc:spChg chg="add del mod topLvl">
-          <ac:chgData name="Fatima Pillosu" userId="a6295d4dc9e22643" providerId="LiveId" clId="{9EBBFA1C-5226-4AE6-954C-C02393E29BD8}" dt="2025-07-08T11:26:53.185" v="1776" actId="21"/>
-          <ac:spMkLst>
-            <pc:docMk/>
-            <pc:sldMk cId="1077421182" sldId="256"/>
-            <ac:spMk id="60" creationId="{2246992F-9F95-300A-7A7A-FBC532D42E51}"/>
-          </ac:spMkLst>
-        </pc:spChg>
-        <pc:spChg chg="add del mod">
-          <ac:chgData name="Fatima Pillosu" userId="a6295d4dc9e22643" providerId="LiveId" clId="{9EBBFA1C-5226-4AE6-954C-C02393E29BD8}" dt="2025-07-05T00:27:08.404" v="488" actId="21"/>
-          <ac:spMkLst>
-            <pc:docMk/>
-            <pc:sldMk cId="1077421182" sldId="256"/>
-            <ac:spMk id="60" creationId="{5BC06B07-E0C4-1D8C-26E3-B0DB5E39B1F8}"/>
-          </ac:spMkLst>
-        </pc:spChg>
-        <pc:spChg chg="add del mod topLvl">
-          <ac:chgData name="Fatima Pillosu" userId="a6295d4dc9e22643" providerId="LiveId" clId="{9EBBFA1C-5226-4AE6-954C-C02393E29BD8}" dt="2025-07-08T11:26:53.185" v="1776" actId="21"/>
-          <ac:spMkLst>
-            <pc:docMk/>
-            <pc:sldMk cId="1077421182" sldId="256"/>
-            <ac:spMk id="61" creationId="{74B76ABE-B26C-DDC1-0625-C3C6CF6C464D}"/>
-          </ac:spMkLst>
-        </pc:spChg>
-        <pc:spChg chg="add del mod">
-          <ac:chgData name="Fatima Pillosu" userId="a6295d4dc9e22643" providerId="LiveId" clId="{9EBBFA1C-5226-4AE6-954C-C02393E29BD8}" dt="2025-07-05T00:27:08.404" v="488" actId="21"/>
-          <ac:spMkLst>
-            <pc:docMk/>
-            <pc:sldMk cId="1077421182" sldId="256"/>
-            <ac:spMk id="61" creationId="{8EC336CC-6D57-3EEF-2A6C-A56380CB8873}"/>
-          </ac:spMkLst>
-        </pc:spChg>
-        <pc:spChg chg="add del mod">
-          <ac:chgData name="Fatima Pillosu" userId="a6295d4dc9e22643" providerId="LiveId" clId="{9EBBFA1C-5226-4AE6-954C-C02393E29BD8}" dt="2025-07-05T00:27:08.404" v="488" actId="21"/>
-          <ac:spMkLst>
-            <pc:docMk/>
-            <pc:sldMk cId="1077421182" sldId="256"/>
-            <ac:spMk id="62" creationId="{1D7A2307-99C5-6B69-79DD-B0693D965F9C}"/>
-          </ac:spMkLst>
-        </pc:spChg>
-        <pc:spChg chg="add del mod topLvl">
-          <ac:chgData name="Fatima Pillosu" userId="a6295d4dc9e22643" providerId="LiveId" clId="{9EBBFA1C-5226-4AE6-954C-C02393E29BD8}" dt="2025-07-08T11:26:53.185" v="1776" actId="21"/>
-          <ac:spMkLst>
-            <pc:docMk/>
-            <pc:sldMk cId="1077421182" sldId="256"/>
-            <ac:spMk id="62" creationId="{FE4AD5B6-9606-CB67-B1BB-1A180E96829A}"/>
-          </ac:spMkLst>
-        </pc:spChg>
-        <pc:spChg chg="add del mod topLvl">
-          <ac:chgData name="Fatima Pillosu" userId="a6295d4dc9e22643" providerId="LiveId" clId="{9EBBFA1C-5226-4AE6-954C-C02393E29BD8}" dt="2025-07-08T11:26:53.185" v="1776" actId="21"/>
-          <ac:spMkLst>
-            <pc:docMk/>
-            <pc:sldMk cId="1077421182" sldId="256"/>
-            <ac:spMk id="63" creationId="{33179324-EE31-86DC-725D-644F6C4CE99A}"/>
-          </ac:spMkLst>
-        </pc:spChg>
-        <pc:spChg chg="add del mod">
-          <ac:chgData name="Fatima Pillosu" userId="a6295d4dc9e22643" providerId="LiveId" clId="{9EBBFA1C-5226-4AE6-954C-C02393E29BD8}" dt="2025-07-05T00:27:08.404" v="488" actId="21"/>
-          <ac:spMkLst>
-            <pc:docMk/>
-            <pc:sldMk cId="1077421182" sldId="256"/>
-            <ac:spMk id="63" creationId="{BBA8908B-35D8-5B89-D526-CE4ED5F9EE59}"/>
-          </ac:spMkLst>
-        </pc:spChg>
-        <pc:spChg chg="add del mod">
-          <ac:chgData name="Fatima Pillosu" userId="a6295d4dc9e22643" providerId="LiveId" clId="{9EBBFA1C-5226-4AE6-954C-C02393E29BD8}" dt="2025-07-05T00:27:08.404" v="488" actId="21"/>
-          <ac:spMkLst>
-            <pc:docMk/>
-            <pc:sldMk cId="1077421182" sldId="256"/>
-            <ac:spMk id="64" creationId="{F9D74EAF-3CFE-347D-2DD8-53F82E0D4697}"/>
-          </ac:spMkLst>
-        </pc:spChg>
-        <pc:spChg chg="add del mod">
-          <ac:chgData name="Fatima Pillosu" userId="a6295d4dc9e22643" providerId="LiveId" clId="{9EBBFA1C-5226-4AE6-954C-C02393E29BD8}" dt="2025-07-05T00:27:08.404" v="488" actId="21"/>
-          <ac:spMkLst>
-            <pc:docMk/>
-            <pc:sldMk cId="1077421182" sldId="256"/>
-            <ac:spMk id="65" creationId="{9337ED95-58F5-BE8E-A6E2-C2CF9D05D6F5}"/>
-          </ac:spMkLst>
-        </pc:spChg>
-        <pc:spChg chg="add del mod">
-          <ac:chgData name="Fatima Pillosu" userId="a6295d4dc9e22643" providerId="LiveId" clId="{9EBBFA1C-5226-4AE6-954C-C02393E29BD8}" dt="2025-07-05T00:27:08.404" v="488" actId="21"/>
-          <ac:spMkLst>
-            <pc:docMk/>
-            <pc:sldMk cId="1077421182" sldId="256"/>
-            <ac:spMk id="66" creationId="{8B6D3A82-BB09-F970-C0FF-F887344F34AE}"/>
-          </ac:spMkLst>
-        </pc:spChg>
-        <pc:spChg chg="add del mod">
-          <ac:chgData name="Fatima Pillosu" userId="a6295d4dc9e22643" providerId="LiveId" clId="{9EBBFA1C-5226-4AE6-954C-C02393E29BD8}" dt="2025-07-05T00:27:08.404" v="488" actId="21"/>
-          <ac:spMkLst>
-            <pc:docMk/>
-            <pc:sldMk cId="1077421182" sldId="256"/>
-            <ac:spMk id="67" creationId="{35321454-EEB6-C5A4-C101-0A07B2A1DDF6}"/>
-          </ac:spMkLst>
-        </pc:spChg>
-        <pc:spChg chg="add del mod">
-          <ac:chgData name="Fatima Pillosu" userId="a6295d4dc9e22643" providerId="LiveId" clId="{9EBBFA1C-5226-4AE6-954C-C02393E29BD8}" dt="2025-07-05T00:27:08.404" v="488" actId="21"/>
-          <ac:spMkLst>
-            <pc:docMk/>
-            <pc:sldMk cId="1077421182" sldId="256"/>
-            <ac:spMk id="68" creationId="{398851B6-E9D8-BA20-6C6F-C079D3922A75}"/>
-          </ac:spMkLst>
-        </pc:spChg>
-        <pc:spChg chg="add del mod">
-          <ac:chgData name="Fatima Pillosu" userId="a6295d4dc9e22643" providerId="LiveId" clId="{9EBBFA1C-5226-4AE6-954C-C02393E29BD8}" dt="2025-07-08T11:26:53.185" v="1776" actId="21"/>
-          <ac:spMkLst>
-            <pc:docMk/>
-            <pc:sldMk cId="1077421182" sldId="256"/>
-            <ac:spMk id="68" creationId="{E09B7D08-5A90-12A8-26DF-79EFC0B64551}"/>
-          </ac:spMkLst>
-        </pc:spChg>
-        <pc:spChg chg="add del mod">
-          <ac:chgData name="Fatima Pillosu" userId="a6295d4dc9e22643" providerId="LiveId" clId="{9EBBFA1C-5226-4AE6-954C-C02393E29BD8}" dt="2025-07-05T00:27:08.404" v="488" actId="21"/>
-          <ac:spMkLst>
-            <pc:docMk/>
-            <pc:sldMk cId="1077421182" sldId="256"/>
-            <ac:spMk id="69" creationId="{81736EF8-9A99-7D54-6EAC-8D974AB20B69}"/>
-          </ac:spMkLst>
-        </pc:spChg>
-        <pc:spChg chg="add del mod">
-          <ac:chgData name="Fatima Pillosu" userId="a6295d4dc9e22643" providerId="LiveId" clId="{9EBBFA1C-5226-4AE6-954C-C02393E29BD8}" dt="2025-07-08T11:26:53.185" v="1776" actId="21"/>
-          <ac:spMkLst>
-            <pc:docMk/>
-            <pc:sldMk cId="1077421182" sldId="256"/>
-            <ac:spMk id="69" creationId="{AB0A9411-88CA-B07E-0168-7427E4178170}"/>
-          </ac:spMkLst>
-        </pc:spChg>
-        <pc:spChg chg="add del mod">
-          <ac:chgData name="Fatima Pillosu" userId="a6295d4dc9e22643" providerId="LiveId" clId="{9EBBFA1C-5226-4AE6-954C-C02393E29BD8}" dt="2025-07-05T00:27:08.404" v="488" actId="21"/>
-          <ac:spMkLst>
-            <pc:docMk/>
-            <pc:sldMk cId="1077421182" sldId="256"/>
-            <ac:spMk id="70" creationId="{FF95CB35-03C1-489D-5889-094A1B388D70}"/>
-          </ac:spMkLst>
-        </pc:spChg>
-        <pc:spChg chg="add del mod">
-          <ac:chgData name="Fatima Pillosu" userId="a6295d4dc9e22643" providerId="LiveId" clId="{9EBBFA1C-5226-4AE6-954C-C02393E29BD8}" dt="2025-07-05T00:27:22.331" v="490" actId="21"/>
-          <ac:spMkLst>
-            <pc:docMk/>
-            <pc:sldMk cId="1077421182" sldId="256"/>
-            <ac:spMk id="73" creationId="{73B4CEF0-7344-1176-C2AA-7C4FA2171FE1}"/>
-          </ac:spMkLst>
-        </pc:spChg>
-        <pc:spChg chg="add del mod">
-          <ac:chgData name="Fatima Pillosu" userId="a6295d4dc9e22643" providerId="LiveId" clId="{9EBBFA1C-5226-4AE6-954C-C02393E29BD8}" dt="2025-07-05T00:27:22.331" v="490" actId="21"/>
-          <ac:spMkLst>
-            <pc:docMk/>
-            <pc:sldMk cId="1077421182" sldId="256"/>
-            <ac:spMk id="76" creationId="{11D0BEA8-4C97-735F-B454-B20FE6FD6664}"/>
-          </ac:spMkLst>
-        </pc:spChg>
-        <pc:spChg chg="add del mod">
-          <ac:chgData name="Fatima Pillosu" userId="a6295d4dc9e22643" providerId="LiveId" clId="{9EBBFA1C-5226-4AE6-954C-C02393E29BD8}" dt="2025-07-05T00:27:22.331" v="490" actId="21"/>
-          <ac:spMkLst>
-            <pc:docMk/>
-            <pc:sldMk cId="1077421182" sldId="256"/>
-            <ac:spMk id="77" creationId="{C958D7B8-BC29-7508-F405-77D6128B8AFF}"/>
-          </ac:spMkLst>
-        </pc:spChg>
-        <pc:spChg chg="add del mod">
-          <ac:chgData name="Fatima Pillosu" userId="a6295d4dc9e22643" providerId="LiveId" clId="{9EBBFA1C-5226-4AE6-954C-C02393E29BD8}" dt="2025-07-05T00:27:22.331" v="490" actId="21"/>
-          <ac:spMkLst>
-            <pc:docMk/>
-            <pc:sldMk cId="1077421182" sldId="256"/>
-            <ac:spMk id="78" creationId="{204795FA-B9E8-F8C0-D0CC-0DA8FCD26B47}"/>
-          </ac:spMkLst>
-        </pc:spChg>
-        <pc:spChg chg="add del mod">
-          <ac:chgData name="Fatima Pillosu" userId="a6295d4dc9e22643" providerId="LiveId" clId="{9EBBFA1C-5226-4AE6-954C-C02393E29BD8}" dt="2025-07-08T11:26:53.185" v="1776" actId="21"/>
-          <ac:spMkLst>
-            <pc:docMk/>
-            <pc:sldMk cId="1077421182" sldId="256"/>
-            <ac:spMk id="78" creationId="{236C3989-F0B5-3443-8EE7-10908DCA1FE0}"/>
-          </ac:spMkLst>
-        </pc:spChg>
-        <pc:spChg chg="add del mod">
-          <ac:chgData name="Fatima Pillosu" userId="a6295d4dc9e22643" providerId="LiveId" clId="{9EBBFA1C-5226-4AE6-954C-C02393E29BD8}" dt="2025-07-08T11:26:53.185" v="1776" actId="21"/>
-          <ac:spMkLst>
-            <pc:docMk/>
-            <pc:sldMk cId="1077421182" sldId="256"/>
-            <ac:spMk id="79" creationId="{7EFF052B-0C1B-362D-FF6E-0B6C6B46315E}"/>
-          </ac:spMkLst>
-        </pc:spChg>
-        <pc:spChg chg="add del mod">
-          <ac:chgData name="Fatima Pillosu" userId="a6295d4dc9e22643" providerId="LiveId" clId="{9EBBFA1C-5226-4AE6-954C-C02393E29BD8}" dt="2025-07-05T00:27:22.331" v="490" actId="21"/>
-          <ac:spMkLst>
-            <pc:docMk/>
-            <pc:sldMk cId="1077421182" sldId="256"/>
-            <ac:spMk id="79" creationId="{AEF58A4C-D7E5-1DB7-8CBA-638A2D2BAD88}"/>
-          </ac:spMkLst>
-        </pc:spChg>
-        <pc:spChg chg="add mod">
-          <ac:chgData name="Fatima Pillosu" userId="a6295d4dc9e22643" providerId="LiveId" clId="{9EBBFA1C-5226-4AE6-954C-C02393E29BD8}" dt="2025-07-08T10:33:57.350" v="1382" actId="1076"/>
-          <ac:spMkLst>
-            <pc:docMk/>
-            <pc:sldMk cId="1077421182" sldId="256"/>
-            <ac:spMk id="80" creationId="{F60F5DB6-C8AE-216E-0FDD-1CA431E62A67}"/>
-          </ac:spMkLst>
-        </pc:spChg>
-        <pc:spChg chg="add del mod">
-          <ac:chgData name="Fatima Pillosu" userId="a6295d4dc9e22643" providerId="LiveId" clId="{9EBBFA1C-5226-4AE6-954C-C02393E29BD8}" dt="2025-07-05T00:27:22.331" v="490" actId="21"/>
-          <ac:spMkLst>
-            <pc:docMk/>
-            <pc:sldMk cId="1077421182" sldId="256"/>
-            <ac:spMk id="80" creationId="{F905F2F6-5287-BF9A-2843-E3939A3C8FE8}"/>
-          </ac:spMkLst>
-        </pc:spChg>
-        <pc:spChg chg="add mod">
-          <ac:chgData name="Fatima Pillosu" userId="a6295d4dc9e22643" providerId="LiveId" clId="{9EBBFA1C-5226-4AE6-954C-C02393E29BD8}" dt="2025-07-08T10:33:57.350" v="1382" actId="1076"/>
-          <ac:spMkLst>
-            <pc:docMk/>
-            <pc:sldMk cId="1077421182" sldId="256"/>
-            <ac:spMk id="81" creationId="{AE2392E1-0275-4F67-E34F-027F9024F4E6}"/>
-          </ac:spMkLst>
-        </pc:spChg>
-        <pc:spChg chg="add del mod">
-          <ac:chgData name="Fatima Pillosu" userId="a6295d4dc9e22643" providerId="LiveId" clId="{9EBBFA1C-5226-4AE6-954C-C02393E29BD8}" dt="2025-07-05T00:27:22.331" v="490" actId="21"/>
-          <ac:spMkLst>
-            <pc:docMk/>
-            <pc:sldMk cId="1077421182" sldId="256"/>
-            <ac:spMk id="81" creationId="{E023D3EF-D016-072E-69C4-85EFF20CE2E9}"/>
-          </ac:spMkLst>
-        </pc:spChg>
-        <pc:spChg chg="add del mod">
-          <ac:chgData name="Fatima Pillosu" userId="a6295d4dc9e22643" providerId="LiveId" clId="{9EBBFA1C-5226-4AE6-954C-C02393E29BD8}" dt="2025-07-05T00:27:22.331" v="490" actId="21"/>
-          <ac:spMkLst>
-            <pc:docMk/>
-            <pc:sldMk cId="1077421182" sldId="256"/>
-            <ac:spMk id="82" creationId="{2F346E7C-1DC4-3E2A-C37F-569187852DE4}"/>
-          </ac:spMkLst>
-        </pc:spChg>
-        <pc:spChg chg="add mod">
-          <ac:chgData name="Fatima Pillosu" userId="a6295d4dc9e22643" providerId="LiveId" clId="{9EBBFA1C-5226-4AE6-954C-C02393E29BD8}" dt="2025-07-08T10:33:57.350" v="1382" actId="1076"/>
-          <ac:spMkLst>
-            <pc:docMk/>
-            <pc:sldMk cId="1077421182" sldId="256"/>
-            <ac:spMk id="82" creationId="{9BEDED54-DD3F-0C30-489A-796304918F52}"/>
-          </ac:spMkLst>
-        </pc:spChg>
-        <pc:spChg chg="add mod">
-          <ac:chgData name="Fatima Pillosu" userId="a6295d4dc9e22643" providerId="LiveId" clId="{9EBBFA1C-5226-4AE6-954C-C02393E29BD8}" dt="2025-07-08T10:33:57.350" v="1382" actId="1076"/>
-          <ac:spMkLst>
-            <pc:docMk/>
-            <pc:sldMk cId="1077421182" sldId="256"/>
-            <ac:spMk id="83" creationId="{04AE4285-E59D-9B5A-B91D-C8235A29EC5C}"/>
-          </ac:spMkLst>
-        </pc:spChg>
-        <pc:spChg chg="add del mod">
-          <ac:chgData name="Fatima Pillosu" userId="a6295d4dc9e22643" providerId="LiveId" clId="{9EBBFA1C-5226-4AE6-954C-C02393E29BD8}" dt="2025-07-05T00:27:22.331" v="490" actId="21"/>
-          <ac:spMkLst>
-            <pc:docMk/>
-            <pc:sldMk cId="1077421182" sldId="256"/>
-            <ac:spMk id="83" creationId="{D1B7680E-5783-A793-F676-162B99024C21}"/>
-          </ac:spMkLst>
-        </pc:spChg>
-        <pc:spChg chg="add mod">
-          <ac:chgData name="Fatima Pillosu" userId="a6295d4dc9e22643" providerId="LiveId" clId="{9EBBFA1C-5226-4AE6-954C-C02393E29BD8}" dt="2025-07-08T10:33:57.350" v="1382" actId="1076"/>
-          <ac:spMkLst>
-            <pc:docMk/>
-            <pc:sldMk cId="1077421182" sldId="256"/>
-            <ac:spMk id="84" creationId="{31BD4B90-D28B-00CC-57AB-3BB6232E844A}"/>
-          </ac:spMkLst>
-        </pc:spChg>
-        <pc:spChg chg="add del mod">
-          <ac:chgData name="Fatima Pillosu" userId="a6295d4dc9e22643" providerId="LiveId" clId="{9EBBFA1C-5226-4AE6-954C-C02393E29BD8}" dt="2025-07-05T00:27:22.331" v="490" actId="21"/>
-          <ac:spMkLst>
-            <pc:docMk/>
-            <pc:sldMk cId="1077421182" sldId="256"/>
-            <ac:spMk id="84" creationId="{7F93C654-DF21-285F-29DF-14068DF0E924}"/>
-          </ac:spMkLst>
-        </pc:spChg>
-        <pc:spChg chg="add del mod">
-          <ac:chgData name="Fatima Pillosu" userId="a6295d4dc9e22643" providerId="LiveId" clId="{9EBBFA1C-5226-4AE6-954C-C02393E29BD8}" dt="2025-07-05T00:27:22.331" v="490" actId="21"/>
-          <ac:spMkLst>
-            <pc:docMk/>
-            <pc:sldMk cId="1077421182" sldId="256"/>
-            <ac:spMk id="85" creationId="{5BC06B07-E0C4-1D8C-26E3-B0DB5E39B1F8}"/>
-          </ac:spMkLst>
-        </pc:spChg>
-        <pc:spChg chg="add del mod">
-          <ac:chgData name="Fatima Pillosu" userId="a6295d4dc9e22643" providerId="LiveId" clId="{9EBBFA1C-5226-4AE6-954C-C02393E29BD8}" dt="2025-07-08T11:26:53.185" v="1776" actId="21"/>
-          <ac:spMkLst>
-            <pc:docMk/>
-            <pc:sldMk cId="1077421182" sldId="256"/>
-            <ac:spMk id="85" creationId="{D289F6C9-1074-AA42-1E52-617C2BC67E34}"/>
-          </ac:spMkLst>
-        </pc:spChg>
-        <pc:spChg chg="add del mod">
-          <ac:chgData name="Fatima Pillosu" userId="a6295d4dc9e22643" providerId="LiveId" clId="{9EBBFA1C-5226-4AE6-954C-C02393E29BD8}" dt="2025-07-05T00:27:22.331" v="490" actId="21"/>
-          <ac:spMkLst>
-            <pc:docMk/>
-            <pc:sldMk cId="1077421182" sldId="256"/>
-            <ac:spMk id="86" creationId="{8EC336CC-6D57-3EEF-2A6C-A56380CB8873}"/>
-          </ac:spMkLst>
-        </pc:spChg>
-        <pc:spChg chg="add del mod">
-          <ac:chgData name="Fatima Pillosu" userId="a6295d4dc9e22643" providerId="LiveId" clId="{9EBBFA1C-5226-4AE6-954C-C02393E29BD8}" dt="2025-07-08T11:26:53.185" v="1776" actId="21"/>
-          <ac:spMkLst>
-            <pc:docMk/>
-            <pc:sldMk cId="1077421182" sldId="256"/>
-            <ac:spMk id="86" creationId="{F863E9C7-8FB7-CE1F-3434-1CD0B672F969}"/>
-          </ac:spMkLst>
-        </pc:spChg>
-        <pc:spChg chg="add del mod">
-          <ac:chgData name="Fatima Pillosu" userId="a6295d4dc9e22643" providerId="LiveId" clId="{9EBBFA1C-5226-4AE6-954C-C02393E29BD8}" dt="2025-07-08T11:26:53.185" v="1776" actId="21"/>
-          <ac:spMkLst>
-            <pc:docMk/>
-            <pc:sldMk cId="1077421182" sldId="256"/>
-            <ac:spMk id="87" creationId="{12ACEBA3-D642-F46B-B2CD-68FB1C88018B}"/>
-          </ac:spMkLst>
-        </pc:spChg>
-        <pc:spChg chg="add del mod">
-          <ac:chgData name="Fatima Pillosu" userId="a6295d4dc9e22643" providerId="LiveId" clId="{9EBBFA1C-5226-4AE6-954C-C02393E29BD8}" dt="2025-07-05T00:27:22.331" v="490" actId="21"/>
-          <ac:spMkLst>
-            <pc:docMk/>
-            <pc:sldMk cId="1077421182" sldId="256"/>
-            <ac:spMk id="87" creationId="{1D7A2307-99C5-6B69-79DD-B0693D965F9C}"/>
-          </ac:spMkLst>
-        </pc:spChg>
-        <pc:spChg chg="add del mod">
-          <ac:chgData name="Fatima Pillosu" userId="a6295d4dc9e22643" providerId="LiveId" clId="{9EBBFA1C-5226-4AE6-954C-C02393E29BD8}" dt="2025-07-08T11:26:53.185" v="1776" actId="21"/>
-          <ac:spMkLst>
-            <pc:docMk/>
-            <pc:sldMk cId="1077421182" sldId="256"/>
-            <ac:spMk id="88" creationId="{1F76D0A3-4834-E813-D950-7D98972D5806}"/>
-          </ac:spMkLst>
-        </pc:spChg>
-        <pc:spChg chg="add del mod">
-          <ac:chgData name="Fatima Pillosu" userId="a6295d4dc9e22643" providerId="LiveId" clId="{9EBBFA1C-5226-4AE6-954C-C02393E29BD8}" dt="2025-07-05T00:27:22.331" v="490" actId="21"/>
-          <ac:spMkLst>
-            <pc:docMk/>
-            <pc:sldMk cId="1077421182" sldId="256"/>
-            <ac:spMk id="88" creationId="{BBA8908B-35D8-5B89-D526-CE4ED5F9EE59}"/>
-          </ac:spMkLst>
-        </pc:spChg>
-        <pc:spChg chg="add del mod">
-          <ac:chgData name="Fatima Pillosu" userId="a6295d4dc9e22643" providerId="LiveId" clId="{9EBBFA1C-5226-4AE6-954C-C02393E29BD8}" dt="2025-07-08T11:26:53.185" v="1776" actId="21"/>
-          <ac:spMkLst>
-            <pc:docMk/>
-            <pc:sldMk cId="1077421182" sldId="256"/>
-            <ac:spMk id="89" creationId="{33C9AD4D-76E1-EA0E-31CD-96084ABB66DA}"/>
-          </ac:spMkLst>
-        </pc:spChg>
-        <pc:spChg chg="add del mod">
-          <ac:chgData name="Fatima Pillosu" userId="a6295d4dc9e22643" providerId="LiveId" clId="{9EBBFA1C-5226-4AE6-954C-C02393E29BD8}" dt="2025-07-05T00:27:22.331" v="490" actId="21"/>
-          <ac:spMkLst>
-            <pc:docMk/>
-            <pc:sldMk cId="1077421182" sldId="256"/>
-            <ac:spMk id="89" creationId="{F9D74EAF-3CFE-347D-2DD8-53F82E0D4697}"/>
-          </ac:spMkLst>
-        </pc:spChg>
-        <pc:spChg chg="add del mod">
-          <ac:chgData name="Fatima Pillosu" userId="a6295d4dc9e22643" providerId="LiveId" clId="{9EBBFA1C-5226-4AE6-954C-C02393E29BD8}" dt="2025-07-08T11:26:53.185" v="1776" actId="21"/>
-          <ac:spMkLst>
-            <pc:docMk/>
-            <pc:sldMk cId="1077421182" sldId="256"/>
-            <ac:spMk id="90" creationId="{28A1B6B6-19BE-648F-D13D-42B169466151}"/>
-          </ac:spMkLst>
-        </pc:spChg>
-        <pc:spChg chg="add del mod">
-          <ac:chgData name="Fatima Pillosu" userId="a6295d4dc9e22643" providerId="LiveId" clId="{9EBBFA1C-5226-4AE6-954C-C02393E29BD8}" dt="2025-07-05T00:27:22.331" v="490" actId="21"/>
-          <ac:spMkLst>
-            <pc:docMk/>
-            <pc:sldMk cId="1077421182" sldId="256"/>
-            <ac:spMk id="90" creationId="{9337ED95-58F5-BE8E-A6E2-C2CF9D05D6F5}"/>
-          </ac:spMkLst>
-        </pc:spChg>
-        <pc:spChg chg="add del mod">
-          <ac:chgData name="Fatima Pillosu" userId="a6295d4dc9e22643" providerId="LiveId" clId="{9EBBFA1C-5226-4AE6-954C-C02393E29BD8}" dt="2025-07-08T11:26:53.185" v="1776" actId="21"/>
-          <ac:spMkLst>
-            <pc:docMk/>
-            <pc:sldMk cId="1077421182" sldId="256"/>
-            <ac:spMk id="91" creationId="{30DF65D3-3574-6230-2E5F-D4AC1D17F2D9}"/>
-          </ac:spMkLst>
-        </pc:spChg>
-        <pc:spChg chg="add del mod">
-          <ac:chgData name="Fatima Pillosu" userId="a6295d4dc9e22643" providerId="LiveId" clId="{9EBBFA1C-5226-4AE6-954C-C02393E29BD8}" dt="2025-07-05T00:27:22.331" v="490" actId="21"/>
-          <ac:spMkLst>
-            <pc:docMk/>
-            <pc:sldMk cId="1077421182" sldId="256"/>
-            <ac:spMk id="91" creationId="{8B6D3A82-BB09-F970-C0FF-F887344F34AE}"/>
-          </ac:spMkLst>
-        </pc:spChg>
-        <pc:spChg chg="add del mod">
-          <ac:chgData name="Fatima Pillosu" userId="a6295d4dc9e22643" providerId="LiveId" clId="{9EBBFA1C-5226-4AE6-954C-C02393E29BD8}" dt="2025-07-08T11:26:53.185" v="1776" actId="21"/>
-          <ac:spMkLst>
-            <pc:docMk/>
-            <pc:sldMk cId="1077421182" sldId="256"/>
-            <ac:spMk id="92" creationId="{30C4FE0C-3DEA-008F-36C3-48FB0E0884CA}"/>
-          </ac:spMkLst>
-        </pc:spChg>
-        <pc:spChg chg="add del mod">
-          <ac:chgData name="Fatima Pillosu" userId="a6295d4dc9e22643" providerId="LiveId" clId="{9EBBFA1C-5226-4AE6-954C-C02393E29BD8}" dt="2025-07-05T00:27:22.331" v="490" actId="21"/>
-          <ac:spMkLst>
-            <pc:docMk/>
-            <pc:sldMk cId="1077421182" sldId="256"/>
-            <ac:spMk id="92" creationId="{35321454-EEB6-C5A4-C101-0A07B2A1DDF6}"/>
-          </ac:spMkLst>
-        </pc:spChg>
-        <pc:spChg chg="add del mod">
-          <ac:chgData name="Fatima Pillosu" userId="a6295d4dc9e22643" providerId="LiveId" clId="{9EBBFA1C-5226-4AE6-954C-C02393E29BD8}" dt="2025-07-05T00:27:22.331" v="490" actId="21"/>
-          <ac:spMkLst>
-            <pc:docMk/>
-            <pc:sldMk cId="1077421182" sldId="256"/>
-            <ac:spMk id="93" creationId="{398851B6-E9D8-BA20-6C6F-C079D3922A75}"/>
-          </ac:spMkLst>
-        </pc:spChg>
-        <pc:spChg chg="add del mod">
-          <ac:chgData name="Fatima Pillosu" userId="a6295d4dc9e22643" providerId="LiveId" clId="{9EBBFA1C-5226-4AE6-954C-C02393E29BD8}" dt="2025-07-08T11:26:53.185" v="1776" actId="21"/>
-          <ac:spMkLst>
-            <pc:docMk/>
-            <pc:sldMk cId="1077421182" sldId="256"/>
-            <ac:spMk id="93" creationId="{8422E5D3-312F-BE99-6F11-0F80EE67A49B}"/>
-          </ac:spMkLst>
-        </pc:spChg>
-        <pc:spChg chg="add del mod">
-          <ac:chgData name="Fatima Pillosu" userId="a6295d4dc9e22643" providerId="LiveId" clId="{9EBBFA1C-5226-4AE6-954C-C02393E29BD8}" dt="2025-07-08T11:26:53.185" v="1776" actId="21"/>
-          <ac:spMkLst>
-            <pc:docMk/>
-            <pc:sldMk cId="1077421182" sldId="256"/>
-            <ac:spMk id="94" creationId="{66D87F7B-332B-2ADA-49AA-C875E9341562}"/>
-          </ac:spMkLst>
-        </pc:spChg>
-        <pc:spChg chg="add del mod">
-          <ac:chgData name="Fatima Pillosu" userId="a6295d4dc9e22643" providerId="LiveId" clId="{9EBBFA1C-5226-4AE6-954C-C02393E29BD8}" dt="2025-07-05T00:27:22.331" v="490" actId="21"/>
-          <ac:spMkLst>
-            <pc:docMk/>
-            <pc:sldMk cId="1077421182" sldId="256"/>
-            <ac:spMk id="94" creationId="{81736EF8-9A99-7D54-6EAC-8D974AB20B69}"/>
-          </ac:spMkLst>
-        </pc:spChg>
-        <pc:spChg chg="add del mod">
-          <ac:chgData name="Fatima Pillosu" userId="a6295d4dc9e22643" providerId="LiveId" clId="{9EBBFA1C-5226-4AE6-954C-C02393E29BD8}" dt="2025-07-08T11:26:53.185" v="1776" actId="21"/>
-          <ac:spMkLst>
-            <pc:docMk/>
-            <pc:sldMk cId="1077421182" sldId="256"/>
-            <ac:spMk id="95" creationId="{4AD9315E-1557-7622-A160-510DD2D773DB}"/>
-          </ac:spMkLst>
-        </pc:spChg>
-        <pc:spChg chg="add del mod">
-          <ac:chgData name="Fatima Pillosu" userId="a6295d4dc9e22643" providerId="LiveId" clId="{9EBBFA1C-5226-4AE6-954C-C02393E29BD8}" dt="2025-07-05T00:27:22.331" v="490" actId="21"/>
-          <ac:spMkLst>
-            <pc:docMk/>
-            <pc:sldMk cId="1077421182" sldId="256"/>
-            <ac:spMk id="95" creationId="{FF95CB35-03C1-489D-5889-094A1B388D70}"/>
-          </ac:spMkLst>
-        </pc:spChg>
-        <pc:spChg chg="add del mod">
-          <ac:chgData name="Fatima Pillosu" userId="a6295d4dc9e22643" providerId="LiveId" clId="{9EBBFA1C-5226-4AE6-954C-C02393E29BD8}" dt="2025-07-08T11:26:53.185" v="1776" actId="21"/>
-          <ac:spMkLst>
-            <pc:docMk/>
-            <pc:sldMk cId="1077421182" sldId="256"/>
-            <ac:spMk id="96" creationId="{D16D9ADA-9650-1708-658A-2299221146B9}"/>
-          </ac:spMkLst>
-        </pc:spChg>
-        <pc:spChg chg="add del mod">
-          <ac:chgData name="Fatima Pillosu" userId="a6295d4dc9e22643" providerId="LiveId" clId="{9EBBFA1C-5226-4AE6-954C-C02393E29BD8}" dt="2025-07-08T11:26:53.185" v="1776" actId="21"/>
-          <ac:spMkLst>
-            <pc:docMk/>
-            <pc:sldMk cId="1077421182" sldId="256"/>
-            <ac:spMk id="97" creationId="{AECBF742-738D-16F3-42E3-2B5E08479ACE}"/>
-          </ac:spMkLst>
-        </pc:spChg>
-        <pc:spChg chg="add del mod">
-          <ac:chgData name="Fatima Pillosu" userId="a6295d4dc9e22643" providerId="LiveId" clId="{9EBBFA1C-5226-4AE6-954C-C02393E29BD8}" dt="2025-07-05T00:28:19.050" v="497" actId="21"/>
-          <ac:spMkLst>
-            <pc:docMk/>
-            <pc:sldMk cId="1077421182" sldId="256"/>
-            <ac:spMk id="98" creationId="{73B4CEF0-7344-1176-C2AA-7C4FA2171FE1}"/>
-          </ac:spMkLst>
-        </pc:spChg>
-        <pc:spChg chg="add del mod">
-          <ac:chgData name="Fatima Pillosu" userId="a6295d4dc9e22643" providerId="LiveId" clId="{9EBBFA1C-5226-4AE6-954C-C02393E29BD8}" dt="2025-07-08T11:26:53.185" v="1776" actId="21"/>
-          <ac:spMkLst>
-            <pc:docMk/>
-            <pc:sldMk cId="1077421182" sldId="256"/>
-            <ac:spMk id="98" creationId="{E6F12A7D-B2C0-E1D2-EE95-7CF7ECD783A7}"/>
-          </ac:spMkLst>
-        </pc:spChg>
-        <pc:spChg chg="add del mod">
-          <ac:chgData name="Fatima Pillosu" userId="a6295d4dc9e22643" providerId="LiveId" clId="{9EBBFA1C-5226-4AE6-954C-C02393E29BD8}" dt="2025-07-08T11:26:53.185" v="1776" actId="21"/>
-          <ac:spMkLst>
-            <pc:docMk/>
-            <pc:sldMk cId="1077421182" sldId="256"/>
-            <ac:spMk id="99" creationId="{91DDAEA7-6CB1-3B05-80F0-0ADC36002D98}"/>
-          </ac:spMkLst>
-        </pc:spChg>
-        <pc:spChg chg="add del mod">
-          <ac:chgData name="Fatima Pillosu" userId="a6295d4dc9e22643" providerId="LiveId" clId="{9EBBFA1C-5226-4AE6-954C-C02393E29BD8}" dt="2025-07-08T11:26:53.185" v="1776" actId="21"/>
-          <ac:spMkLst>
-            <pc:docMk/>
-            <pc:sldMk cId="1077421182" sldId="256"/>
-            <ac:spMk id="100" creationId="{F54B1E8F-F919-0C53-1D8F-3207F22F601F}"/>
-          </ac:spMkLst>
-        </pc:spChg>
-        <pc:spChg chg="add del mod">
-          <ac:chgData name="Fatima Pillosu" userId="a6295d4dc9e22643" providerId="LiveId" clId="{9EBBFA1C-5226-4AE6-954C-C02393E29BD8}" dt="2025-07-08T11:26:53.185" v="1776" actId="21"/>
-          <ac:spMkLst>
-            <pc:docMk/>
-            <pc:sldMk cId="1077421182" sldId="256"/>
-            <ac:spMk id="101" creationId="{080D85DB-4D0E-DF49-B733-23A5D10CC6A7}"/>
-          </ac:spMkLst>
-        </pc:spChg>
-        <pc:spChg chg="add del mod">
-          <ac:chgData name="Fatima Pillosu" userId="a6295d4dc9e22643" providerId="LiveId" clId="{9EBBFA1C-5226-4AE6-954C-C02393E29BD8}" dt="2025-07-05T00:28:19.050" v="497" actId="21"/>
-          <ac:spMkLst>
-            <pc:docMk/>
-            <pc:sldMk cId="1077421182" sldId="256"/>
-            <ac:spMk id="101" creationId="{11D0BEA8-4C97-735F-B454-B20FE6FD6664}"/>
-          </ac:spMkLst>
-        </pc:spChg>
-        <pc:spChg chg="add del mod">
-          <ac:chgData name="Fatima Pillosu" userId="a6295d4dc9e22643" providerId="LiveId" clId="{9EBBFA1C-5226-4AE6-954C-C02393E29BD8}" dt="2025-07-08T11:26:53.185" v="1776" actId="21"/>
-          <ac:spMkLst>
-            <pc:docMk/>
-            <pc:sldMk cId="1077421182" sldId="256"/>
-            <ac:spMk id="102" creationId="{59900547-1904-A5CD-2E13-FFC546E60D5E}"/>
-          </ac:spMkLst>
-        </pc:spChg>
-        <pc:spChg chg="add del mod">
-          <ac:chgData name="Fatima Pillosu" userId="a6295d4dc9e22643" providerId="LiveId" clId="{9EBBFA1C-5226-4AE6-954C-C02393E29BD8}" dt="2025-07-05T00:28:19.050" v="497" actId="21"/>
-          <ac:spMkLst>
-            <pc:docMk/>
-            <pc:sldMk cId="1077421182" sldId="256"/>
-            <ac:spMk id="102" creationId="{C958D7B8-BC29-7508-F405-77D6128B8AFF}"/>
-          </ac:spMkLst>
-        </pc:spChg>
-        <pc:spChg chg="add del mod">
-          <ac:chgData name="Fatima Pillosu" userId="a6295d4dc9e22643" providerId="LiveId" clId="{9EBBFA1C-5226-4AE6-954C-C02393E29BD8}" dt="2025-07-05T00:28:19.050" v="497" actId="21"/>
-          <ac:spMkLst>
-            <pc:docMk/>
-            <pc:sldMk cId="1077421182" sldId="256"/>
-            <ac:spMk id="103" creationId="{204795FA-B9E8-F8C0-D0CC-0DA8FCD26B47}"/>
-          </ac:spMkLst>
-        </pc:spChg>
-        <pc:spChg chg="add del mod">
-          <ac:chgData name="Fatima Pillosu" userId="a6295d4dc9e22643" providerId="LiveId" clId="{9EBBFA1C-5226-4AE6-954C-C02393E29BD8}" dt="2025-07-08T11:26:53.185" v="1776" actId="21"/>
-          <ac:spMkLst>
-            <pc:docMk/>
-            <pc:sldMk cId="1077421182" sldId="256"/>
-            <ac:spMk id="103" creationId="{247BD177-2798-A78C-8463-66D8A2547C59}"/>
-          </ac:spMkLst>
-        </pc:spChg>
-        <pc:spChg chg="add del mod">
-          <ac:chgData name="Fatima Pillosu" userId="a6295d4dc9e22643" providerId="LiveId" clId="{9EBBFA1C-5226-4AE6-954C-C02393E29BD8}" dt="2025-07-08T11:26:53.185" v="1776" actId="21"/>
-          <ac:spMkLst>
-            <pc:docMk/>
-            <pc:sldMk cId="1077421182" sldId="256"/>
-            <ac:spMk id="104" creationId="{86F38C3D-1D6E-AEA0-FEBC-C872837CF97C}"/>
-          </ac:spMkLst>
-        </pc:spChg>
-        <pc:spChg chg="add del mod">
-          <ac:chgData name="Fatima Pillosu" userId="a6295d4dc9e22643" providerId="LiveId" clId="{9EBBFA1C-5226-4AE6-954C-C02393E29BD8}" dt="2025-07-05T00:28:19.050" v="497" actId="21"/>
-          <ac:spMkLst>
-            <pc:docMk/>
-            <pc:sldMk cId="1077421182" sldId="256"/>
-            <ac:spMk id="104" creationId="{AEF58A4C-D7E5-1DB7-8CBA-638A2D2BAD88}"/>
-          </ac:spMkLst>
-        </pc:spChg>
-        <pc:spChg chg="add del mod">
-          <ac:chgData name="Fatima Pillosu" userId="a6295d4dc9e22643" providerId="LiveId" clId="{9EBBFA1C-5226-4AE6-954C-C02393E29BD8}" dt="2025-07-05T00:28:19.050" v="497" actId="21"/>
-          <ac:spMkLst>
-            <pc:docMk/>
-            <pc:sldMk cId="1077421182" sldId="256"/>
-            <ac:spMk id="105" creationId="{F905F2F6-5287-BF9A-2843-E3939A3C8FE8}"/>
-          </ac:spMkLst>
-        </pc:spChg>
-        <pc:spChg chg="add del mod">
-          <ac:chgData name="Fatima Pillosu" userId="a6295d4dc9e22643" providerId="LiveId" clId="{9EBBFA1C-5226-4AE6-954C-C02393E29BD8}" dt="2025-07-08T11:26:53.185" v="1776" actId="21"/>
-          <ac:spMkLst>
-            <pc:docMk/>
-            <pc:sldMk cId="1077421182" sldId="256"/>
-            <ac:spMk id="106" creationId="{3A3EDEE7-BFFC-C414-3108-A376446FAF1B}"/>
-          </ac:spMkLst>
-        </pc:spChg>
-        <pc:spChg chg="add del mod">
-          <ac:chgData name="Fatima Pillosu" userId="a6295d4dc9e22643" providerId="LiveId" clId="{9EBBFA1C-5226-4AE6-954C-C02393E29BD8}" dt="2025-07-05T00:28:19.050" v="497" actId="21"/>
-          <ac:spMkLst>
-            <pc:docMk/>
-            <pc:sldMk cId="1077421182" sldId="256"/>
-            <ac:spMk id="106" creationId="{E023D3EF-D016-072E-69C4-85EFF20CE2E9}"/>
-          </ac:spMkLst>
-        </pc:spChg>
-        <pc:spChg chg="add del mod">
-          <ac:chgData name="Fatima Pillosu" userId="a6295d4dc9e22643" providerId="LiveId" clId="{9EBBFA1C-5226-4AE6-954C-C02393E29BD8}" dt="2025-07-05T00:28:19.050" v="497" actId="21"/>
-          <ac:spMkLst>
-            <pc:docMk/>
-            <pc:sldMk cId="1077421182" sldId="256"/>
-            <ac:spMk id="107" creationId="{2F346E7C-1DC4-3E2A-C37F-569187852DE4}"/>
-          </ac:spMkLst>
-        </pc:spChg>
-        <pc:spChg chg="add del mod">
-          <ac:chgData name="Fatima Pillosu" userId="a6295d4dc9e22643" providerId="LiveId" clId="{9EBBFA1C-5226-4AE6-954C-C02393E29BD8}" dt="2025-07-08T11:26:53.185" v="1776" actId="21"/>
-          <ac:spMkLst>
-            <pc:docMk/>
-            <pc:sldMk cId="1077421182" sldId="256"/>
-            <ac:spMk id="107" creationId="{AD697449-16DE-2D22-7FD3-BFE962BE2BF3}"/>
-          </ac:spMkLst>
-        </pc:spChg>
-        <pc:spChg chg="add del mod">
-          <ac:chgData name="Fatima Pillosu" userId="a6295d4dc9e22643" providerId="LiveId" clId="{9EBBFA1C-5226-4AE6-954C-C02393E29BD8}" dt="2025-07-08T11:26:53.185" v="1776" actId="21"/>
-          <ac:spMkLst>
-            <pc:docMk/>
-            <pc:sldMk cId="1077421182" sldId="256"/>
-            <ac:spMk id="108" creationId="{0D2AF962-0127-918B-A663-55683B31ABE7}"/>
-          </ac:spMkLst>
-        </pc:spChg>
-        <pc:spChg chg="add del mod">
-          <ac:chgData name="Fatima Pillosu" userId="a6295d4dc9e22643" providerId="LiveId" clId="{9EBBFA1C-5226-4AE6-954C-C02393E29BD8}" dt="2025-07-05T00:28:19.050" v="497" actId="21"/>
-          <ac:spMkLst>
-            <pc:docMk/>
-            <pc:sldMk cId="1077421182" sldId="256"/>
-            <ac:spMk id="108" creationId="{D1B7680E-5783-A793-F676-162B99024C21}"/>
-          </ac:spMkLst>
-        </pc:spChg>
-        <pc:spChg chg="add del mod">
-          <ac:chgData name="Fatima Pillosu" userId="a6295d4dc9e22643" providerId="LiveId" clId="{9EBBFA1C-5226-4AE6-954C-C02393E29BD8}" dt="2025-07-05T00:28:19.050" v="497" actId="21"/>
-          <ac:spMkLst>
-            <pc:docMk/>
-            <pc:sldMk cId="1077421182" sldId="256"/>
-            <ac:spMk id="109" creationId="{7F93C654-DF21-285F-29DF-14068DF0E924}"/>
-          </ac:spMkLst>
-        </pc:spChg>
-        <pc:spChg chg="add del mod">
-          <ac:chgData name="Fatima Pillosu" userId="a6295d4dc9e22643" providerId="LiveId" clId="{9EBBFA1C-5226-4AE6-954C-C02393E29BD8}" dt="2025-07-08T11:26:53.185" v="1776" actId="21"/>
-          <ac:spMkLst>
-            <pc:docMk/>
-            <pc:sldMk cId="1077421182" sldId="256"/>
-            <ac:spMk id="109" creationId="{A0C1D3B6-AAB5-FC22-5CBB-4A0B964F87DD}"/>
-          </ac:spMkLst>
-        </pc:spChg>
-        <pc:spChg chg="add del mod">
-          <ac:chgData name="Fatima Pillosu" userId="a6295d4dc9e22643" providerId="LiveId" clId="{9EBBFA1C-5226-4AE6-954C-C02393E29BD8}" dt="2025-07-08T11:26:53.185" v="1776" actId="21"/>
-          <ac:spMkLst>
-            <pc:docMk/>
-            <pc:sldMk cId="1077421182" sldId="256"/>
-            <ac:spMk id="110" creationId="{0C58D9D0-C718-5A79-C56C-F980B01CE5EA}"/>
-          </ac:spMkLst>
-        </pc:spChg>
-        <pc:spChg chg="add del mod">
-          <ac:chgData name="Fatima Pillosu" userId="a6295d4dc9e22643" providerId="LiveId" clId="{9EBBFA1C-5226-4AE6-954C-C02393E29BD8}" dt="2025-07-05T00:28:19.050" v="497" actId="21"/>
-          <ac:spMkLst>
-            <pc:docMk/>
-            <pc:sldMk cId="1077421182" sldId="256"/>
-            <ac:spMk id="110" creationId="{5BC06B07-E0C4-1D8C-26E3-B0DB5E39B1F8}"/>
-          </ac:spMkLst>
-        </pc:spChg>
-        <pc:spChg chg="add del mod">
-          <ac:chgData name="Fatima Pillosu" userId="a6295d4dc9e22643" providerId="LiveId" clId="{9EBBFA1C-5226-4AE6-954C-C02393E29BD8}" dt="2025-07-08T11:26:53.185" v="1776" actId="21"/>
-          <ac:spMkLst>
-            <pc:docMk/>
-            <pc:sldMk cId="1077421182" sldId="256"/>
-            <ac:spMk id="111" creationId="{10988766-2B52-5FC5-AF03-BCB1CD0EF9B6}"/>
-          </ac:spMkLst>
-        </pc:spChg>
-        <pc:spChg chg="add del mod">
-          <ac:chgData name="Fatima Pillosu" userId="a6295d4dc9e22643" providerId="LiveId" clId="{9EBBFA1C-5226-4AE6-954C-C02393E29BD8}" dt="2025-07-05T00:28:19.050" v="497" actId="21"/>
-          <ac:spMkLst>
-            <pc:docMk/>
-            <pc:sldMk cId="1077421182" sldId="256"/>
-            <ac:spMk id="111" creationId="{8EC336CC-6D57-3EEF-2A6C-A56380CB8873}"/>
-          </ac:spMkLst>
-        </pc:spChg>
-        <pc:spChg chg="add del mod">
-          <ac:chgData name="Fatima Pillosu" userId="a6295d4dc9e22643" providerId="LiveId" clId="{9EBBFA1C-5226-4AE6-954C-C02393E29BD8}" dt="2025-07-05T00:28:19.050" v="497" actId="21"/>
-          <ac:spMkLst>
-            <pc:docMk/>
-            <pc:sldMk cId="1077421182" sldId="256"/>
-            <ac:spMk id="112" creationId="{1D7A2307-99C5-6B69-79DD-B0693D965F9C}"/>
-          </ac:spMkLst>
-        </pc:spChg>
-        <pc:spChg chg="add del mod">
-          <ac:chgData name="Fatima Pillosu" userId="a6295d4dc9e22643" providerId="LiveId" clId="{9EBBFA1C-5226-4AE6-954C-C02393E29BD8}" dt="2025-07-08T11:26:53.185" v="1776" actId="21"/>
-          <ac:spMkLst>
-            <pc:docMk/>
-            <pc:sldMk cId="1077421182" sldId="256"/>
-            <ac:spMk id="112" creationId="{C12ED5F3-1DE3-90AA-AE25-1BECC66D96D6}"/>
-          </ac:spMkLst>
-        </pc:spChg>
-        <pc:spChg chg="add del mod">
-          <ac:chgData name="Fatima Pillosu" userId="a6295d4dc9e22643" providerId="LiveId" clId="{9EBBFA1C-5226-4AE6-954C-C02393E29BD8}" dt="2025-07-08T11:26:53.185" v="1776" actId="21"/>
-          <ac:spMkLst>
-            <pc:docMk/>
-            <pc:sldMk cId="1077421182" sldId="256"/>
-            <ac:spMk id="113" creationId="{284DCE09-CFC5-4CB5-EF68-87C73FF2C96F}"/>
-          </ac:spMkLst>
-        </pc:spChg>
-        <pc:spChg chg="add del mod">
-          <ac:chgData name="Fatima Pillosu" userId="a6295d4dc9e22643" providerId="LiveId" clId="{9EBBFA1C-5226-4AE6-954C-C02393E29BD8}" dt="2025-07-05T00:28:19.050" v="497" actId="21"/>
-          <ac:spMkLst>
-            <pc:docMk/>
-            <pc:sldMk cId="1077421182" sldId="256"/>
-            <ac:spMk id="113" creationId="{BBA8908B-35D8-5B89-D526-CE4ED5F9EE59}"/>
-          </ac:spMkLst>
-        </pc:spChg>
-        <pc:spChg chg="add del mod">
-          <ac:chgData name="Fatima Pillosu" userId="a6295d4dc9e22643" providerId="LiveId" clId="{9EBBFA1C-5226-4AE6-954C-C02393E29BD8}" dt="2025-07-05T00:28:19.050" v="497" actId="21"/>
-          <ac:spMkLst>
-            <pc:docMk/>
-            <pc:sldMk cId="1077421182" sldId="256"/>
-            <ac:spMk id="114" creationId="{F9D74EAF-3CFE-347D-2DD8-53F82E0D4697}"/>
-          </ac:spMkLst>
-        </pc:spChg>
-        <pc:spChg chg="add del mod">
-          <ac:chgData name="Fatima Pillosu" userId="a6295d4dc9e22643" providerId="LiveId" clId="{9EBBFA1C-5226-4AE6-954C-C02393E29BD8}" dt="2025-07-05T00:28:19.050" v="497" actId="21"/>
-          <ac:spMkLst>
-            <pc:docMk/>
-            <pc:sldMk cId="1077421182" sldId="256"/>
-            <ac:spMk id="115" creationId="{9337ED95-58F5-BE8E-A6E2-C2CF9D05D6F5}"/>
-          </ac:spMkLst>
-        </pc:spChg>
-        <pc:spChg chg="add del mod">
-          <ac:chgData name="Fatima Pillosu" userId="a6295d4dc9e22643" providerId="LiveId" clId="{9EBBFA1C-5226-4AE6-954C-C02393E29BD8}" dt="2025-07-08T11:26:53.185" v="1776" actId="21"/>
-          <ac:spMkLst>
-            <pc:docMk/>
-            <pc:sldMk cId="1077421182" sldId="256"/>
-            <ac:spMk id="115" creationId="{9F49069D-A5EA-AEFE-622C-ACFFAFC213A7}"/>
-          </ac:spMkLst>
-        </pc:spChg>
-        <pc:spChg chg="add del mod">
-          <ac:chgData name="Fatima Pillosu" userId="a6295d4dc9e22643" providerId="LiveId" clId="{9EBBFA1C-5226-4AE6-954C-C02393E29BD8}" dt="2025-07-05T00:28:19.050" v="497" actId="21"/>
-          <ac:spMkLst>
-            <pc:docMk/>
-            <pc:sldMk cId="1077421182" sldId="256"/>
-            <ac:spMk id="116" creationId="{8B6D3A82-BB09-F970-C0FF-F887344F34AE}"/>
-          </ac:spMkLst>
-        </pc:spChg>
-        <pc:spChg chg="add del mod">
-          <ac:chgData name="Fatima Pillosu" userId="a6295d4dc9e22643" providerId="LiveId" clId="{9EBBFA1C-5226-4AE6-954C-C02393E29BD8}" dt="2025-07-08T11:26:53.185" v="1776" actId="21"/>
-          <ac:spMkLst>
-            <pc:docMk/>
-            <pc:sldMk cId="1077421182" sldId="256"/>
-            <ac:spMk id="116" creationId="{D4777A91-37F4-BE7F-F721-064F2DFBBD2B}"/>
-          </ac:spMkLst>
-        </pc:spChg>
-        <pc:spChg chg="add del mod">
-          <ac:chgData name="Fatima Pillosu" userId="a6295d4dc9e22643" providerId="LiveId" clId="{9EBBFA1C-5226-4AE6-954C-C02393E29BD8}" dt="2025-07-05T00:28:19.050" v="497" actId="21"/>
-          <ac:spMkLst>
-            <pc:docMk/>
-            <pc:sldMk cId="1077421182" sldId="256"/>
-            <ac:spMk id="117" creationId="{35321454-EEB6-C5A4-C101-0A07B2A1DDF6}"/>
-          </ac:spMkLst>
-        </pc:spChg>
-        <pc:spChg chg="add del mod">
-          <ac:chgData name="Fatima Pillosu" userId="a6295d4dc9e22643" providerId="LiveId" clId="{9EBBFA1C-5226-4AE6-954C-C02393E29BD8}" dt="2025-07-08T11:26:53.185" v="1776" actId="21"/>
-          <ac:spMkLst>
-            <pc:docMk/>
-            <pc:sldMk cId="1077421182" sldId="256"/>
-            <ac:spMk id="117" creationId="{BF87EC11-3C1F-88FC-5B11-85476540E8C8}"/>
-          </ac:spMkLst>
-        </pc:spChg>
-        <pc:spChg chg="add del mod">
-          <ac:chgData name="Fatima Pillosu" userId="a6295d4dc9e22643" providerId="LiveId" clId="{9EBBFA1C-5226-4AE6-954C-C02393E29BD8}" dt="2025-07-05T00:28:19.050" v="497" actId="21"/>
-          <ac:spMkLst>
-            <pc:docMk/>
-            <pc:sldMk cId="1077421182" sldId="256"/>
-            <ac:spMk id="118" creationId="{398851B6-E9D8-BA20-6C6F-C079D3922A75}"/>
-          </ac:spMkLst>
-        </pc:spChg>
-        <pc:spChg chg="add del mod">
-          <ac:chgData name="Fatima Pillosu" userId="a6295d4dc9e22643" providerId="LiveId" clId="{9EBBFA1C-5226-4AE6-954C-C02393E29BD8}" dt="2025-07-08T11:26:53.185" v="1776" actId="21"/>
-          <ac:spMkLst>
-            <pc:docMk/>
-            <pc:sldMk cId="1077421182" sldId="256"/>
-            <ac:spMk id="118" creationId="{4D487DBF-93E9-8A93-89C7-07F93FC20286}"/>
-          </ac:spMkLst>
-        </pc:spChg>
-        <pc:spChg chg="add del mod">
-          <ac:chgData name="Fatima Pillosu" userId="a6295d4dc9e22643" providerId="LiveId" clId="{9EBBFA1C-5226-4AE6-954C-C02393E29BD8}" dt="2025-07-08T11:26:53.185" v="1776" actId="21"/>
-          <ac:spMkLst>
-            <pc:docMk/>
-            <pc:sldMk cId="1077421182" sldId="256"/>
-            <ac:spMk id="119" creationId="{6C923F18-3DA2-6BB3-056A-D95B8BAE89AB}"/>
-          </ac:spMkLst>
-        </pc:spChg>
-        <pc:spChg chg="add del mod">
-          <ac:chgData name="Fatima Pillosu" userId="a6295d4dc9e22643" providerId="LiveId" clId="{9EBBFA1C-5226-4AE6-954C-C02393E29BD8}" dt="2025-07-05T00:28:19.050" v="497" actId="21"/>
-          <ac:spMkLst>
-            <pc:docMk/>
-            <pc:sldMk cId="1077421182" sldId="256"/>
-            <ac:spMk id="119" creationId="{81736EF8-9A99-7D54-6EAC-8D974AB20B69}"/>
-          </ac:spMkLst>
-        </pc:spChg>
-        <pc:spChg chg="add del mod">
-          <ac:chgData name="Fatima Pillosu" userId="a6295d4dc9e22643" providerId="LiveId" clId="{9EBBFA1C-5226-4AE6-954C-C02393E29BD8}" dt="2025-07-08T11:26:53.185" v="1776" actId="21"/>
-          <ac:spMkLst>
-            <pc:docMk/>
-            <pc:sldMk cId="1077421182" sldId="256"/>
-            <ac:spMk id="120" creationId="{030850AB-2E9E-E5D2-CBA7-E87750F702D2}"/>
-          </ac:spMkLst>
-        </pc:spChg>
-        <pc:spChg chg="add del mod">
-          <ac:chgData name="Fatima Pillosu" userId="a6295d4dc9e22643" providerId="LiveId" clId="{9EBBFA1C-5226-4AE6-954C-C02393E29BD8}" dt="2025-07-05T00:28:19.050" v="497" actId="21"/>
-          <ac:spMkLst>
-            <pc:docMk/>
-            <pc:sldMk cId="1077421182" sldId="256"/>
-            <ac:spMk id="120" creationId="{FF95CB35-03C1-489D-5889-094A1B388D70}"/>
-          </ac:spMkLst>
-        </pc:spChg>
-        <pc:spChg chg="add del mod">
-          <ac:chgData name="Fatima Pillosu" userId="a6295d4dc9e22643" providerId="LiveId" clId="{9EBBFA1C-5226-4AE6-954C-C02393E29BD8}" dt="2025-07-08T10:07:21.174" v="612" actId="21"/>
-          <ac:spMkLst>
-            <pc:docMk/>
-            <pc:sldMk cId="1077421182" sldId="256"/>
-            <ac:spMk id="123" creationId="{73B4CEF0-7344-1176-C2AA-7C4FA2171FE1}"/>
-          </ac:spMkLst>
-        </pc:spChg>
-        <pc:spChg chg="add del mod">
-          <ac:chgData name="Fatima Pillosu" userId="a6295d4dc9e22643" providerId="LiveId" clId="{9EBBFA1C-5226-4AE6-954C-C02393E29BD8}" dt="2025-07-08T10:07:21.174" v="612" actId="21"/>
-          <ac:spMkLst>
-            <pc:docMk/>
-            <pc:sldMk cId="1077421182" sldId="256"/>
-            <ac:spMk id="126" creationId="{11D0BEA8-4C97-735F-B454-B20FE6FD6664}"/>
-          </ac:spMkLst>
-        </pc:spChg>
-        <pc:spChg chg="add del mod">
-          <ac:chgData name="Fatima Pillosu" userId="a6295d4dc9e22643" providerId="LiveId" clId="{9EBBFA1C-5226-4AE6-954C-C02393E29BD8}" dt="2025-07-08T10:07:21.174" v="612" actId="21"/>
-          <ac:spMkLst>
-            <pc:docMk/>
-            <pc:sldMk cId="1077421182" sldId="256"/>
-            <ac:spMk id="127" creationId="{C958D7B8-BC29-7508-F405-77D6128B8AFF}"/>
-          </ac:spMkLst>
-        </pc:spChg>
-        <pc:spChg chg="add del mod">
-          <ac:chgData name="Fatima Pillosu" userId="a6295d4dc9e22643" providerId="LiveId" clId="{9EBBFA1C-5226-4AE6-954C-C02393E29BD8}" dt="2025-07-08T10:07:21.174" v="612" actId="21"/>
-          <ac:spMkLst>
-            <pc:docMk/>
-            <pc:sldMk cId="1077421182" sldId="256"/>
-            <ac:spMk id="128" creationId="{204795FA-B9E8-F8C0-D0CC-0DA8FCD26B47}"/>
-          </ac:spMkLst>
-        </pc:spChg>
-        <pc:spChg chg="add del mod">
-          <ac:chgData name="Fatima Pillosu" userId="a6295d4dc9e22643" providerId="LiveId" clId="{9EBBFA1C-5226-4AE6-954C-C02393E29BD8}" dt="2025-07-08T10:07:21.174" v="612" actId="21"/>
-          <ac:spMkLst>
-            <pc:docMk/>
-            <pc:sldMk cId="1077421182" sldId="256"/>
-            <ac:spMk id="129" creationId="{AEF58A4C-D7E5-1DB7-8CBA-638A2D2BAD88}"/>
-          </ac:spMkLst>
-        </pc:spChg>
-        <pc:spChg chg="add del mod">
-          <ac:chgData name="Fatima Pillosu" userId="a6295d4dc9e22643" providerId="LiveId" clId="{9EBBFA1C-5226-4AE6-954C-C02393E29BD8}" dt="2025-07-08T10:07:21.174" v="612" actId="21"/>
-          <ac:spMkLst>
-            <pc:docMk/>
-            <pc:sldMk cId="1077421182" sldId="256"/>
-            <ac:spMk id="130" creationId="{F905F2F6-5287-BF9A-2843-E3939A3C8FE8}"/>
-          </ac:spMkLst>
-        </pc:spChg>
-        <pc:spChg chg="add del mod">
-          <ac:chgData name="Fatima Pillosu" userId="a6295d4dc9e22643" providerId="LiveId" clId="{9EBBFA1C-5226-4AE6-954C-C02393E29BD8}" dt="2025-07-08T10:07:21.174" v="612" actId="21"/>
-          <ac:spMkLst>
-            <pc:docMk/>
-            <pc:sldMk cId="1077421182" sldId="256"/>
-            <ac:spMk id="131" creationId="{E023D3EF-D016-072E-69C4-85EFF20CE2E9}"/>
-          </ac:spMkLst>
-        </pc:spChg>
-        <pc:spChg chg="add del mod">
-          <ac:chgData name="Fatima Pillosu" userId="a6295d4dc9e22643" providerId="LiveId" clId="{9EBBFA1C-5226-4AE6-954C-C02393E29BD8}" dt="2025-07-08T10:07:21.174" v="612" actId="21"/>
-          <ac:spMkLst>
-            <pc:docMk/>
-            <pc:sldMk cId="1077421182" sldId="256"/>
-            <ac:spMk id="132" creationId="{2F346E7C-1DC4-3E2A-C37F-569187852DE4}"/>
-          </ac:spMkLst>
-        </pc:spChg>
-        <pc:spChg chg="add del mod">
-          <ac:chgData name="Fatima Pillosu" userId="a6295d4dc9e22643" providerId="LiveId" clId="{9EBBFA1C-5226-4AE6-954C-C02393E29BD8}" dt="2025-07-08T10:07:21.174" v="612" actId="21"/>
-          <ac:spMkLst>
-            <pc:docMk/>
-            <pc:sldMk cId="1077421182" sldId="256"/>
-            <ac:spMk id="133" creationId="{D1B7680E-5783-A793-F676-162B99024C21}"/>
-          </ac:spMkLst>
-        </pc:spChg>
-        <pc:spChg chg="add del mod">
-          <ac:chgData name="Fatima Pillosu" userId="a6295d4dc9e22643" providerId="LiveId" clId="{9EBBFA1C-5226-4AE6-954C-C02393E29BD8}" dt="2025-07-08T10:07:21.174" v="612" actId="21"/>
-          <ac:spMkLst>
-            <pc:docMk/>
-            <pc:sldMk cId="1077421182" sldId="256"/>
-            <ac:spMk id="134" creationId="{7F93C654-DF21-285F-29DF-14068DF0E924}"/>
-          </ac:spMkLst>
-        </pc:spChg>
-        <pc:spChg chg="add del mod">
-          <ac:chgData name="Fatima Pillosu" userId="a6295d4dc9e22643" providerId="LiveId" clId="{9EBBFA1C-5226-4AE6-954C-C02393E29BD8}" dt="2025-07-08T10:07:21.174" v="612" actId="21"/>
-          <ac:spMkLst>
-            <pc:docMk/>
-            <pc:sldMk cId="1077421182" sldId="256"/>
-            <ac:spMk id="135" creationId="{5BC06B07-E0C4-1D8C-26E3-B0DB5E39B1F8}"/>
-          </ac:spMkLst>
-        </pc:spChg>
-        <pc:spChg chg="add del mod">
-          <ac:chgData name="Fatima Pillosu" userId="a6295d4dc9e22643" providerId="LiveId" clId="{9EBBFA1C-5226-4AE6-954C-C02393E29BD8}" dt="2025-07-08T10:07:21.174" v="612" actId="21"/>
-          <ac:spMkLst>
-            <pc:docMk/>
-            <pc:sldMk cId="1077421182" sldId="256"/>
-            <ac:spMk id="136" creationId="{8EC336CC-6D57-3EEF-2A6C-A56380CB8873}"/>
-          </ac:spMkLst>
-        </pc:spChg>
-        <pc:spChg chg="add del mod">
-          <ac:chgData name="Fatima Pillosu" userId="a6295d4dc9e22643" providerId="LiveId" clId="{9EBBFA1C-5226-4AE6-954C-C02393E29BD8}" dt="2025-07-08T10:07:21.174" v="612" actId="21"/>
-          <ac:spMkLst>
-            <pc:docMk/>
-            <pc:sldMk cId="1077421182" sldId="256"/>
-            <ac:spMk id="137" creationId="{1D7A2307-99C5-6B69-79DD-B0693D965F9C}"/>
-          </ac:spMkLst>
-        </pc:spChg>
-        <pc:spChg chg="add del mod">
-          <ac:chgData name="Fatima Pillosu" userId="a6295d4dc9e22643" providerId="LiveId" clId="{9EBBFA1C-5226-4AE6-954C-C02393E29BD8}" dt="2025-07-08T10:07:21.174" v="612" actId="21"/>
-          <ac:spMkLst>
-            <pc:docMk/>
-            <pc:sldMk cId="1077421182" sldId="256"/>
-            <ac:spMk id="138" creationId="{BBA8908B-35D8-5B89-D526-CE4ED5F9EE59}"/>
-          </ac:spMkLst>
-        </pc:spChg>
-        <pc:spChg chg="add del mod">
-          <ac:chgData name="Fatima Pillosu" userId="a6295d4dc9e22643" providerId="LiveId" clId="{9EBBFA1C-5226-4AE6-954C-C02393E29BD8}" dt="2025-07-08T10:07:21.174" v="612" actId="21"/>
-          <ac:spMkLst>
-            <pc:docMk/>
-            <pc:sldMk cId="1077421182" sldId="256"/>
-            <ac:spMk id="139" creationId="{F9D74EAF-3CFE-347D-2DD8-53F82E0D4697}"/>
-          </ac:spMkLst>
-        </pc:spChg>
-        <pc:spChg chg="add del mod">
-          <ac:chgData name="Fatima Pillosu" userId="a6295d4dc9e22643" providerId="LiveId" clId="{9EBBFA1C-5226-4AE6-954C-C02393E29BD8}" dt="2025-07-08T10:07:21.174" v="612" actId="21"/>
-          <ac:spMkLst>
-            <pc:docMk/>
-            <pc:sldMk cId="1077421182" sldId="256"/>
-            <ac:spMk id="140" creationId="{9337ED95-58F5-BE8E-A6E2-C2CF9D05D6F5}"/>
-          </ac:spMkLst>
-        </pc:spChg>
-        <pc:spChg chg="add del mod">
-          <ac:chgData name="Fatima Pillosu" userId="a6295d4dc9e22643" providerId="LiveId" clId="{9EBBFA1C-5226-4AE6-954C-C02393E29BD8}" dt="2025-07-08T10:07:21.174" v="612" actId="21"/>
-          <ac:spMkLst>
-            <pc:docMk/>
-            <pc:sldMk cId="1077421182" sldId="256"/>
-            <ac:spMk id="141" creationId="{8B6D3A82-BB09-F970-C0FF-F887344F34AE}"/>
-          </ac:spMkLst>
-        </pc:spChg>
-        <pc:spChg chg="add del mod">
-          <ac:chgData name="Fatima Pillosu" userId="a6295d4dc9e22643" providerId="LiveId" clId="{9EBBFA1C-5226-4AE6-954C-C02393E29BD8}" dt="2025-07-08T10:07:21.174" v="612" actId="21"/>
-          <ac:spMkLst>
-            <pc:docMk/>
-            <pc:sldMk cId="1077421182" sldId="256"/>
-            <ac:spMk id="142" creationId="{35321454-EEB6-C5A4-C101-0A07B2A1DDF6}"/>
-          </ac:spMkLst>
-        </pc:spChg>
-        <pc:spChg chg="add del mod">
-          <ac:chgData name="Fatima Pillosu" userId="a6295d4dc9e22643" providerId="LiveId" clId="{9EBBFA1C-5226-4AE6-954C-C02393E29BD8}" dt="2025-07-08T10:07:21.174" v="612" actId="21"/>
-          <ac:spMkLst>
-            <pc:docMk/>
-            <pc:sldMk cId="1077421182" sldId="256"/>
-            <ac:spMk id="143" creationId="{398851B6-E9D8-BA20-6C6F-C079D3922A75}"/>
-          </ac:spMkLst>
-        </pc:spChg>
-        <pc:spChg chg="add del mod">
-          <ac:chgData name="Fatima Pillosu" userId="a6295d4dc9e22643" providerId="LiveId" clId="{9EBBFA1C-5226-4AE6-954C-C02393E29BD8}" dt="2025-07-08T10:07:21.174" v="612" actId="21"/>
-          <ac:spMkLst>
-            <pc:docMk/>
-            <pc:sldMk cId="1077421182" sldId="256"/>
-            <ac:spMk id="144" creationId="{81736EF8-9A99-7D54-6EAC-8D974AB20B69}"/>
-          </ac:spMkLst>
-        </pc:spChg>
-        <pc:spChg chg="add del mod">
-          <ac:chgData name="Fatima Pillosu" userId="a6295d4dc9e22643" providerId="LiveId" clId="{9EBBFA1C-5226-4AE6-954C-C02393E29BD8}" dt="2025-07-08T10:07:21.174" v="612" actId="21"/>
-          <ac:spMkLst>
-            <pc:docMk/>
-            <pc:sldMk cId="1077421182" sldId="256"/>
-            <ac:spMk id="145" creationId="{FF95CB35-03C1-489D-5889-094A1B388D70}"/>
-          </ac:spMkLst>
-        </pc:spChg>
-        <pc:spChg chg="add del mod">
-          <ac:chgData name="Fatima Pillosu" userId="a6295d4dc9e22643" providerId="LiveId" clId="{9EBBFA1C-5226-4AE6-954C-C02393E29BD8}" dt="2025-07-08T11:26:53.185" v="1776" actId="21"/>
-          <ac:spMkLst>
-            <pc:docMk/>
-            <pc:sldMk cId="1077421182" sldId="256"/>
-            <ac:spMk id="146" creationId="{FF892D68-907E-98DB-5C39-8B2B5F8EFCB2}"/>
-          </ac:spMkLst>
-        </pc:spChg>
-        <pc:spChg chg="add del mod">
-          <ac:chgData name="Fatima Pillosu" userId="a6295d4dc9e22643" providerId="LiveId" clId="{9EBBFA1C-5226-4AE6-954C-C02393E29BD8}" dt="2025-07-08T11:26:53.185" v="1776" actId="21"/>
-          <ac:spMkLst>
-            <pc:docMk/>
-            <pc:sldMk cId="1077421182" sldId="256"/>
-            <ac:spMk id="147" creationId="{0BB1EAA9-E0D8-B3F1-C7EF-8B2A736FC345}"/>
-          </ac:spMkLst>
-        </pc:spChg>
-        <pc:spChg chg="add del mod">
-          <ac:chgData name="Fatima Pillosu" userId="a6295d4dc9e22643" providerId="LiveId" clId="{9EBBFA1C-5226-4AE6-954C-C02393E29BD8}" dt="2025-07-08T11:26:53.185" v="1776" actId="21"/>
-          <ac:spMkLst>
-            <pc:docMk/>
-            <pc:sldMk cId="1077421182" sldId="256"/>
-            <ac:spMk id="149" creationId="{E99FAD1C-BDCD-24AA-5BFF-680DBC719FB3}"/>
-          </ac:spMkLst>
-        </pc:spChg>
-        <pc:spChg chg="add del mod">
-          <ac:chgData name="Fatima Pillosu" userId="a6295d4dc9e22643" providerId="LiveId" clId="{9EBBFA1C-5226-4AE6-954C-C02393E29BD8}" dt="2025-07-08T11:26:53.185" v="1776" actId="21"/>
-          <ac:spMkLst>
-            <pc:docMk/>
-            <pc:sldMk cId="1077421182" sldId="256"/>
-            <ac:spMk id="150" creationId="{4D317A73-9F83-EF68-9A61-160D6145E870}"/>
-          </ac:spMkLst>
-        </pc:spChg>
-        <pc:spChg chg="add del mod">
-          <ac:chgData name="Fatima Pillosu" userId="a6295d4dc9e22643" providerId="LiveId" clId="{9EBBFA1C-5226-4AE6-954C-C02393E29BD8}" dt="2025-07-08T11:26:53.185" v="1776" actId="21"/>
-          <ac:spMkLst>
-            <pc:docMk/>
-            <pc:sldMk cId="1077421182" sldId="256"/>
-            <ac:spMk id="151" creationId="{6559EF61-E6A9-3181-8392-52C5C2060ACE}"/>
-          </ac:spMkLst>
-        </pc:spChg>
-        <pc:spChg chg="add del mod">
-          <ac:chgData name="Fatima Pillosu" userId="a6295d4dc9e22643" providerId="LiveId" clId="{9EBBFA1C-5226-4AE6-954C-C02393E29BD8}" dt="2025-07-08T11:26:53.185" v="1776" actId="21"/>
-          <ac:spMkLst>
-            <pc:docMk/>
-            <pc:sldMk cId="1077421182" sldId="256"/>
-            <ac:spMk id="152" creationId="{59A8CC4B-CF00-1CF0-F9E1-5DF2E244D4E7}"/>
-          </ac:spMkLst>
-        </pc:spChg>
-        <pc:spChg chg="add del mod">
-          <ac:chgData name="Fatima Pillosu" userId="a6295d4dc9e22643" providerId="LiveId" clId="{9EBBFA1C-5226-4AE6-954C-C02393E29BD8}" dt="2025-07-08T11:26:53.185" v="1776" actId="21"/>
-          <ac:spMkLst>
-            <pc:docMk/>
-            <pc:sldMk cId="1077421182" sldId="256"/>
-            <ac:spMk id="153" creationId="{A74BD051-00BB-9A55-9D06-E7CEC2E9612C}"/>
-          </ac:spMkLst>
-        </pc:spChg>
-        <pc:spChg chg="add del mod">
-          <ac:chgData name="Fatima Pillosu" userId="a6295d4dc9e22643" providerId="LiveId" clId="{9EBBFA1C-5226-4AE6-954C-C02393E29BD8}" dt="2025-07-08T11:26:53.185" v="1776" actId="21"/>
-          <ac:spMkLst>
-            <pc:docMk/>
-            <pc:sldMk cId="1077421182" sldId="256"/>
-            <ac:spMk id="154" creationId="{60303516-DB2D-2BC1-D927-2C61C32D1BE5}"/>
-          </ac:spMkLst>
-        </pc:spChg>
-        <pc:spChg chg="add del mod">
-          <ac:chgData name="Fatima Pillosu" userId="a6295d4dc9e22643" providerId="LiveId" clId="{9EBBFA1C-5226-4AE6-954C-C02393E29BD8}" dt="2025-07-08T11:26:53.185" v="1776" actId="21"/>
-          <ac:spMkLst>
-            <pc:docMk/>
-            <pc:sldMk cId="1077421182" sldId="256"/>
-            <ac:spMk id="155" creationId="{15FD3697-C9EB-3F58-C3D2-BE88B64A8216}"/>
-          </ac:spMkLst>
-        </pc:spChg>
-        <pc:spChg chg="add del mod">
-          <ac:chgData name="Fatima Pillosu" userId="a6295d4dc9e22643" providerId="LiveId" clId="{9EBBFA1C-5226-4AE6-954C-C02393E29BD8}" dt="2025-07-08T11:26:53.185" v="1776" actId="21"/>
-          <ac:spMkLst>
-            <pc:docMk/>
-            <pc:sldMk cId="1077421182" sldId="256"/>
-            <ac:spMk id="156" creationId="{F6F79706-9911-7779-94AB-03F4D52E68B1}"/>
-          </ac:spMkLst>
-        </pc:spChg>
-        <pc:spChg chg="add del mod">
-          <ac:chgData name="Fatima Pillosu" userId="a6295d4dc9e22643" providerId="LiveId" clId="{9EBBFA1C-5226-4AE6-954C-C02393E29BD8}" dt="2025-07-08T11:26:53.185" v="1776" actId="21"/>
-          <ac:spMkLst>
-            <pc:docMk/>
-            <pc:sldMk cId="1077421182" sldId="256"/>
-            <ac:spMk id="161" creationId="{FCCC057A-8189-5476-FE49-5468F08AA0BF}"/>
-          </ac:spMkLst>
-        </pc:spChg>
-        <pc:spChg chg="add del mod">
-          <ac:chgData name="Fatima Pillosu" userId="a6295d4dc9e22643" providerId="LiveId" clId="{9EBBFA1C-5226-4AE6-954C-C02393E29BD8}" dt="2025-07-08T11:26:53.185" v="1776" actId="21"/>
-          <ac:spMkLst>
-            <pc:docMk/>
-            <pc:sldMk cId="1077421182" sldId="256"/>
-            <ac:spMk id="162" creationId="{116AB80D-F1A4-CED0-5A84-C00D73AD1E9E}"/>
-          </ac:spMkLst>
-        </pc:spChg>
-        <pc:spChg chg="add del mod">
-          <ac:chgData name="Fatima Pillosu" userId="a6295d4dc9e22643" providerId="LiveId" clId="{9EBBFA1C-5226-4AE6-954C-C02393E29BD8}" dt="2025-07-08T11:26:53.185" v="1776" actId="21"/>
-          <ac:spMkLst>
-            <pc:docMk/>
-            <pc:sldMk cId="1077421182" sldId="256"/>
-            <ac:spMk id="163" creationId="{C478F387-3783-AF73-4618-28BD76E36A1A}"/>
-          </ac:spMkLst>
-        </pc:spChg>
-        <pc:spChg chg="add del mod">
-          <ac:chgData name="Fatima Pillosu" userId="a6295d4dc9e22643" providerId="LiveId" clId="{9EBBFA1C-5226-4AE6-954C-C02393E29BD8}" dt="2025-07-08T11:26:53.185" v="1776" actId="21"/>
-          <ac:spMkLst>
-            <pc:docMk/>
-            <pc:sldMk cId="1077421182" sldId="256"/>
-            <ac:spMk id="164" creationId="{F584008E-75BA-886B-D034-EE4B01396BD6}"/>
-          </ac:spMkLst>
-        </pc:spChg>
-        <pc:spChg chg="add del mod">
-          <ac:chgData name="Fatima Pillosu" userId="a6295d4dc9e22643" providerId="LiveId" clId="{9EBBFA1C-5226-4AE6-954C-C02393E29BD8}" dt="2025-07-08T11:26:53.185" v="1776" actId="21"/>
-          <ac:spMkLst>
-            <pc:docMk/>
-            <pc:sldMk cId="1077421182" sldId="256"/>
-            <ac:spMk id="165" creationId="{4A60554B-A82E-8A13-8885-CE0485457670}"/>
-          </ac:spMkLst>
-        </pc:spChg>
-        <pc:spChg chg="add del mod">
-          <ac:chgData name="Fatima Pillosu" userId="a6295d4dc9e22643" providerId="LiveId" clId="{9EBBFA1C-5226-4AE6-954C-C02393E29BD8}" dt="2025-07-08T11:26:53.185" v="1776" actId="21"/>
-          <ac:spMkLst>
-            <pc:docMk/>
-            <pc:sldMk cId="1077421182" sldId="256"/>
-            <ac:spMk id="166" creationId="{5E47FEC6-0D01-177B-616F-F2FC445048F1}"/>
-          </ac:spMkLst>
-        </pc:spChg>
-        <pc:spChg chg="add del mod">
-          <ac:chgData name="Fatima Pillosu" userId="a6295d4dc9e22643" providerId="LiveId" clId="{9EBBFA1C-5226-4AE6-954C-C02393E29BD8}" dt="2025-07-08T11:26:53.185" v="1776" actId="21"/>
-          <ac:spMkLst>
-            <pc:docMk/>
-            <pc:sldMk cId="1077421182" sldId="256"/>
-            <ac:spMk id="167" creationId="{D00944E4-1E04-AB22-1A46-AD08A0C3CA24}"/>
-          </ac:spMkLst>
-        </pc:spChg>
-        <pc:spChg chg="add del mod">
-          <ac:chgData name="Fatima Pillosu" userId="a6295d4dc9e22643" providerId="LiveId" clId="{9EBBFA1C-5226-4AE6-954C-C02393E29BD8}" dt="2025-07-08T11:26:53.185" v="1776" actId="21"/>
-          <ac:spMkLst>
-            <pc:docMk/>
-            <pc:sldMk cId="1077421182" sldId="256"/>
-            <ac:spMk id="168" creationId="{B4855E27-F8B6-6E98-EBFC-0B9EA6CDFB27}"/>
-          </ac:spMkLst>
-        </pc:spChg>
-        <pc:spChg chg="add del mod">
-          <ac:chgData name="Fatima Pillosu" userId="a6295d4dc9e22643" providerId="LiveId" clId="{9EBBFA1C-5226-4AE6-954C-C02393E29BD8}" dt="2025-07-08T11:26:53.185" v="1776" actId="21"/>
-          <ac:spMkLst>
-            <pc:docMk/>
-            <pc:sldMk cId="1077421182" sldId="256"/>
-            <ac:spMk id="169" creationId="{0CCA95F8-FAB5-D8A7-84A3-0CAAEA01371A}"/>
-          </ac:spMkLst>
-        </pc:spChg>
-        <pc:spChg chg="add del mod">
-          <ac:chgData name="Fatima Pillosu" userId="a6295d4dc9e22643" providerId="LiveId" clId="{9EBBFA1C-5226-4AE6-954C-C02393E29BD8}" dt="2025-07-08T11:26:53.185" v="1776" actId="21"/>
-          <ac:spMkLst>
-            <pc:docMk/>
-            <pc:sldMk cId="1077421182" sldId="256"/>
-            <ac:spMk id="171" creationId="{360557DE-A811-EA43-6229-F31D6528D462}"/>
-          </ac:spMkLst>
-        </pc:spChg>
-        <pc:spChg chg="add del mod">
-          <ac:chgData name="Fatima Pillosu" userId="a6295d4dc9e22643" providerId="LiveId" clId="{9EBBFA1C-5226-4AE6-954C-C02393E29BD8}" dt="2025-07-08T11:26:53.185" v="1776" actId="21"/>
-          <ac:spMkLst>
-            <pc:docMk/>
-            <pc:sldMk cId="1077421182" sldId="256"/>
-            <ac:spMk id="172" creationId="{C2EA3A5D-C275-310A-6082-2AEB6CD21588}"/>
-          </ac:spMkLst>
-        </pc:spChg>
-        <pc:spChg chg="add del mod">
-          <ac:chgData name="Fatima Pillosu" userId="a6295d4dc9e22643" providerId="LiveId" clId="{9EBBFA1C-5226-4AE6-954C-C02393E29BD8}" dt="2025-07-08T11:26:53.185" v="1776" actId="21"/>
-          <ac:spMkLst>
-            <pc:docMk/>
-            <pc:sldMk cId="1077421182" sldId="256"/>
-            <ac:spMk id="173" creationId="{316E5925-747E-450D-E996-F07914CF5C54}"/>
-          </ac:spMkLst>
-        </pc:spChg>
-        <pc:spChg chg="add del mod">
-          <ac:chgData name="Fatima Pillosu" userId="a6295d4dc9e22643" providerId="LiveId" clId="{9EBBFA1C-5226-4AE6-954C-C02393E29BD8}" dt="2025-07-08T11:26:53.185" v="1776" actId="21"/>
-          <ac:spMkLst>
-            <pc:docMk/>
-            <pc:sldMk cId="1077421182" sldId="256"/>
-            <ac:spMk id="174" creationId="{31C171AF-7405-9FF0-4B69-9C4CF0573742}"/>
-          </ac:spMkLst>
-        </pc:spChg>
-        <pc:spChg chg="add del mod">
-          <ac:chgData name="Fatima Pillosu" userId="a6295d4dc9e22643" providerId="LiveId" clId="{9EBBFA1C-5226-4AE6-954C-C02393E29BD8}" dt="2025-07-08T11:26:53.185" v="1776" actId="21"/>
-          <ac:spMkLst>
-            <pc:docMk/>
-            <pc:sldMk cId="1077421182" sldId="256"/>
-            <ac:spMk id="175" creationId="{C00D082E-388E-4107-2E06-C0E5F8A8FCDA}"/>
-          </ac:spMkLst>
-        </pc:spChg>
-        <pc:spChg chg="add del mod">
-          <ac:chgData name="Fatima Pillosu" userId="a6295d4dc9e22643" providerId="LiveId" clId="{9EBBFA1C-5226-4AE6-954C-C02393E29BD8}" dt="2025-07-08T11:26:53.185" v="1776" actId="21"/>
-          <ac:spMkLst>
-            <pc:docMk/>
-            <pc:sldMk cId="1077421182" sldId="256"/>
-            <ac:spMk id="176" creationId="{7760D3D3-7F00-D138-B9B1-4EA6132AE348}"/>
-          </ac:spMkLst>
-        </pc:spChg>
-        <pc:spChg chg="add del mod">
-          <ac:chgData name="Fatima Pillosu" userId="a6295d4dc9e22643" providerId="LiveId" clId="{9EBBFA1C-5226-4AE6-954C-C02393E29BD8}" dt="2025-07-08T11:26:53.185" v="1776" actId="21"/>
-          <ac:spMkLst>
-            <pc:docMk/>
-            <pc:sldMk cId="1077421182" sldId="256"/>
-            <ac:spMk id="177" creationId="{CC7C05E1-148C-3A66-883D-97D7DE169831}"/>
-          </ac:spMkLst>
-        </pc:spChg>
-        <pc:spChg chg="add del mod">
-          <ac:chgData name="Fatima Pillosu" userId="a6295d4dc9e22643" providerId="LiveId" clId="{9EBBFA1C-5226-4AE6-954C-C02393E29BD8}" dt="2025-07-08T11:26:53.185" v="1776" actId="21"/>
-          <ac:spMkLst>
-            <pc:docMk/>
-            <pc:sldMk cId="1077421182" sldId="256"/>
-            <ac:spMk id="178" creationId="{4158EEC8-A3E4-4BD8-8490-19655B5A4D12}"/>
-          </ac:spMkLst>
-        </pc:spChg>
-        <pc:spChg chg="add del mod">
-          <ac:chgData name="Fatima Pillosu" userId="a6295d4dc9e22643" providerId="LiveId" clId="{9EBBFA1C-5226-4AE6-954C-C02393E29BD8}" dt="2025-07-08T11:26:53.185" v="1776" actId="21"/>
-          <ac:spMkLst>
-            <pc:docMk/>
-            <pc:sldMk cId="1077421182" sldId="256"/>
-            <ac:spMk id="179" creationId="{E877F1F9-F456-BA95-96DF-443C1E5A9106}"/>
-          </ac:spMkLst>
-        </pc:spChg>
-        <pc:spChg chg="add del mod">
-          <ac:chgData name="Fatima Pillosu" userId="a6295d4dc9e22643" providerId="LiveId" clId="{9EBBFA1C-5226-4AE6-954C-C02393E29BD8}" dt="2025-07-08T11:26:53.185" v="1776" actId="21"/>
-          <ac:spMkLst>
-            <pc:docMk/>
-            <pc:sldMk cId="1077421182" sldId="256"/>
-            <ac:spMk id="181" creationId="{879DB1E5-3097-1450-39AB-8745E89C02A6}"/>
-          </ac:spMkLst>
-        </pc:spChg>
-        <pc:spChg chg="add del mod">
-          <ac:chgData name="Fatima Pillosu" userId="a6295d4dc9e22643" providerId="LiveId" clId="{9EBBFA1C-5226-4AE6-954C-C02393E29BD8}" dt="2025-07-08T11:26:53.185" v="1776" actId="21"/>
-          <ac:spMkLst>
-            <pc:docMk/>
-            <pc:sldMk cId="1077421182" sldId="256"/>
-            <ac:spMk id="182" creationId="{109E4421-C281-0897-399A-D5D86FC1F8BD}"/>
-          </ac:spMkLst>
-        </pc:spChg>
-        <pc:spChg chg="add del mod">
-          <ac:chgData name="Fatima Pillosu" userId="a6295d4dc9e22643" providerId="LiveId" clId="{9EBBFA1C-5226-4AE6-954C-C02393E29BD8}" dt="2025-07-08T11:26:53.185" v="1776" actId="21"/>
-          <ac:spMkLst>
-            <pc:docMk/>
-            <pc:sldMk cId="1077421182" sldId="256"/>
-            <ac:spMk id="183" creationId="{DD3FBA5F-1AE6-8591-B413-8356311E6698}"/>
-          </ac:spMkLst>
-        </pc:spChg>
-        <pc:spChg chg="add del mod">
-          <ac:chgData name="Fatima Pillosu" userId="a6295d4dc9e22643" providerId="LiveId" clId="{9EBBFA1C-5226-4AE6-954C-C02393E29BD8}" dt="2025-07-08T11:26:53.185" v="1776" actId="21"/>
-          <ac:spMkLst>
-            <pc:docMk/>
-            <pc:sldMk cId="1077421182" sldId="256"/>
-            <ac:spMk id="184" creationId="{7D693464-FF67-E598-F805-61E3528782A8}"/>
-          </ac:spMkLst>
-        </pc:spChg>
-        <pc:spChg chg="add del mod">
-          <ac:chgData name="Fatima Pillosu" userId="a6295d4dc9e22643" providerId="LiveId" clId="{9EBBFA1C-5226-4AE6-954C-C02393E29BD8}" dt="2025-07-08T11:26:53.185" v="1776" actId="21"/>
-          <ac:spMkLst>
-            <pc:docMk/>
-            <pc:sldMk cId="1077421182" sldId="256"/>
-            <ac:spMk id="185" creationId="{F3F6ACAB-134F-6DA9-6243-46F16F70DC61}"/>
-          </ac:spMkLst>
-        </pc:spChg>
-        <pc:spChg chg="add del mod">
-          <ac:chgData name="Fatima Pillosu" userId="a6295d4dc9e22643" providerId="LiveId" clId="{9EBBFA1C-5226-4AE6-954C-C02393E29BD8}" dt="2025-07-08T11:26:53.185" v="1776" actId="21"/>
-          <ac:spMkLst>
-            <pc:docMk/>
-            <pc:sldMk cId="1077421182" sldId="256"/>
-            <ac:spMk id="186" creationId="{5DC6CA7A-8721-CA9B-CAC2-9D9E4C3C9CD9}"/>
-          </ac:spMkLst>
-        </pc:spChg>
-        <pc:spChg chg="add del mod">
-          <ac:chgData name="Fatima Pillosu" userId="a6295d4dc9e22643" providerId="LiveId" clId="{9EBBFA1C-5226-4AE6-954C-C02393E29BD8}" dt="2025-07-08T11:26:53.185" v="1776" actId="21"/>
-          <ac:spMkLst>
-            <pc:docMk/>
-            <pc:sldMk cId="1077421182" sldId="256"/>
-            <ac:spMk id="187" creationId="{94A145D8-E173-49F5-7B4B-722ED023D3F2}"/>
-          </ac:spMkLst>
-        </pc:spChg>
-        <pc:spChg chg="add del mod">
-          <ac:chgData name="Fatima Pillosu" userId="a6295d4dc9e22643" providerId="LiveId" clId="{9EBBFA1C-5226-4AE6-954C-C02393E29BD8}" dt="2025-07-08T11:26:53.185" v="1776" actId="21"/>
-          <ac:spMkLst>
-            <pc:docMk/>
-            <pc:sldMk cId="1077421182" sldId="256"/>
-            <ac:spMk id="188" creationId="{541B290E-18AC-89DB-E79D-953EAD8B7694}"/>
-          </ac:spMkLst>
-        </pc:spChg>
-        <pc:spChg chg="add del mod">
-          <ac:chgData name="Fatima Pillosu" userId="a6295d4dc9e22643" providerId="LiveId" clId="{9EBBFA1C-5226-4AE6-954C-C02393E29BD8}" dt="2025-07-08T11:26:53.185" v="1776" actId="21"/>
-          <ac:spMkLst>
-            <pc:docMk/>
-            <pc:sldMk cId="1077421182" sldId="256"/>
-            <ac:spMk id="189" creationId="{B2F65CD0-E60C-AE84-1873-A21710B74B29}"/>
-          </ac:spMkLst>
-        </pc:spChg>
-        <pc:spChg chg="add del mod">
-          <ac:chgData name="Fatima Pillosu" userId="a6295d4dc9e22643" providerId="LiveId" clId="{9EBBFA1C-5226-4AE6-954C-C02393E29BD8}" dt="2025-07-08T11:26:53.185" v="1776" actId="21"/>
-          <ac:spMkLst>
-            <pc:docMk/>
-            <pc:sldMk cId="1077421182" sldId="256"/>
-            <ac:spMk id="191" creationId="{15EA5EE0-3095-B1C5-897E-C4A7E64B9D38}"/>
-          </ac:spMkLst>
-        </pc:spChg>
-        <pc:spChg chg="add del mod">
-          <ac:chgData name="Fatima Pillosu" userId="a6295d4dc9e22643" providerId="LiveId" clId="{9EBBFA1C-5226-4AE6-954C-C02393E29BD8}" dt="2025-07-08T11:26:53.185" v="1776" actId="21"/>
-          <ac:spMkLst>
-            <pc:docMk/>
-            <pc:sldMk cId="1077421182" sldId="256"/>
-            <ac:spMk id="192" creationId="{9A59A307-6792-6531-A45A-75B10523DB91}"/>
-          </ac:spMkLst>
-        </pc:spChg>
-        <pc:spChg chg="add del mod">
-          <ac:chgData name="Fatima Pillosu" userId="a6295d4dc9e22643" providerId="LiveId" clId="{9EBBFA1C-5226-4AE6-954C-C02393E29BD8}" dt="2025-07-08T11:26:53.185" v="1776" actId="21"/>
-          <ac:spMkLst>
-            <pc:docMk/>
-            <pc:sldMk cId="1077421182" sldId="256"/>
-            <ac:spMk id="193" creationId="{7936A872-480F-55BE-9333-722A284DAE9F}"/>
-          </ac:spMkLst>
-        </pc:spChg>
-        <pc:spChg chg="add del mod">
-          <ac:chgData name="Fatima Pillosu" userId="a6295d4dc9e22643" providerId="LiveId" clId="{9EBBFA1C-5226-4AE6-954C-C02393E29BD8}" dt="2025-07-08T11:26:53.185" v="1776" actId="21"/>
-          <ac:spMkLst>
-            <pc:docMk/>
-            <pc:sldMk cId="1077421182" sldId="256"/>
-            <ac:spMk id="194" creationId="{5A194348-966B-E224-FC85-74ED33D9B170}"/>
-          </ac:spMkLst>
-        </pc:spChg>
-        <pc:spChg chg="add del mod">
-          <ac:chgData name="Fatima Pillosu" userId="a6295d4dc9e22643" providerId="LiveId" clId="{9EBBFA1C-5226-4AE6-954C-C02393E29BD8}" dt="2025-07-08T11:26:53.185" v="1776" actId="21"/>
-          <ac:spMkLst>
-            <pc:docMk/>
-            <pc:sldMk cId="1077421182" sldId="256"/>
-            <ac:spMk id="195" creationId="{982A8DA2-CB08-20A4-11D0-EFA739D9216E}"/>
-          </ac:spMkLst>
-        </pc:spChg>
-        <pc:spChg chg="add del mod">
-          <ac:chgData name="Fatima Pillosu" userId="a6295d4dc9e22643" providerId="LiveId" clId="{9EBBFA1C-5226-4AE6-954C-C02393E29BD8}" dt="2025-07-08T11:26:53.185" v="1776" actId="21"/>
-          <ac:spMkLst>
-            <pc:docMk/>
-            <pc:sldMk cId="1077421182" sldId="256"/>
-            <ac:spMk id="196" creationId="{2CB700D3-E84A-237A-AD6A-29DD34F7F6A8}"/>
-          </ac:spMkLst>
-        </pc:spChg>
-        <pc:spChg chg="add del mod">
-          <ac:chgData name="Fatima Pillosu" userId="a6295d4dc9e22643" providerId="LiveId" clId="{9EBBFA1C-5226-4AE6-954C-C02393E29BD8}" dt="2025-07-08T11:26:53.185" v="1776" actId="21"/>
-          <ac:spMkLst>
-            <pc:docMk/>
-            <pc:sldMk cId="1077421182" sldId="256"/>
-            <ac:spMk id="197" creationId="{57287129-A8D4-CF92-F5FA-CD609781431D}"/>
-          </ac:spMkLst>
-        </pc:spChg>
-        <pc:spChg chg="add del mod">
-          <ac:chgData name="Fatima Pillosu" userId="a6295d4dc9e22643" providerId="LiveId" clId="{9EBBFA1C-5226-4AE6-954C-C02393E29BD8}" dt="2025-07-08T11:26:53.185" v="1776" actId="21"/>
-          <ac:spMkLst>
-            <pc:docMk/>
-            <pc:sldMk cId="1077421182" sldId="256"/>
-            <ac:spMk id="198" creationId="{CCA13B24-6A03-1389-3910-4327014F91DD}"/>
-          </ac:spMkLst>
-        </pc:spChg>
-        <pc:spChg chg="add del mod">
-          <ac:chgData name="Fatima Pillosu" userId="a6295d4dc9e22643" providerId="LiveId" clId="{9EBBFA1C-5226-4AE6-954C-C02393E29BD8}" dt="2025-07-08T11:26:53.185" v="1776" actId="21"/>
-          <ac:spMkLst>
-            <pc:docMk/>
-            <pc:sldMk cId="1077421182" sldId="256"/>
-            <ac:spMk id="199" creationId="{E298F493-7DB3-1F09-ACE5-7D36C1FFBF0A}"/>
-          </ac:spMkLst>
-        </pc:spChg>
-        <pc:spChg chg="add del">
-          <ac:chgData name="Fatima Pillosu" userId="a6295d4dc9e22643" providerId="LiveId" clId="{9EBBFA1C-5226-4AE6-954C-C02393E29BD8}" dt="2025-07-08T11:26:46.535" v="1774" actId="478"/>
-          <ac:spMkLst>
-            <pc:docMk/>
-            <pc:sldMk cId="1077421182" sldId="256"/>
-            <ac:spMk id="204" creationId="{8C81B47E-BB94-50E8-0F82-749440CCB1ED}"/>
-          </ac:spMkLst>
-        </pc:spChg>
-        <pc:spChg chg="add mod">
-          <ac:chgData name="Fatima Pillosu" userId="a6295d4dc9e22643" providerId="LiveId" clId="{9EBBFA1C-5226-4AE6-954C-C02393E29BD8}" dt="2025-07-08T11:27:01.417" v="1777"/>
-          <ac:spMkLst>
-            <pc:docMk/>
-            <pc:sldMk cId="1077421182" sldId="256"/>
-            <ac:spMk id="209" creationId="{73B4CEF0-7344-1176-C2AA-7C4FA2171FE1}"/>
-          </ac:spMkLst>
-        </pc:spChg>
-        <pc:spChg chg="add mod">
-          <ac:chgData name="Fatima Pillosu" userId="a6295d4dc9e22643" providerId="LiveId" clId="{9EBBFA1C-5226-4AE6-954C-C02393E29BD8}" dt="2025-07-08T11:27:01.417" v="1777"/>
-          <ac:spMkLst>
-            <pc:docMk/>
-            <pc:sldMk cId="1077421182" sldId="256"/>
-            <ac:spMk id="210" creationId="{11D0BEA8-4C97-735F-B454-B20FE6FD6664}"/>
-          </ac:spMkLst>
-        </pc:spChg>
-        <pc:spChg chg="add mod">
-          <ac:chgData name="Fatima Pillosu" userId="a6295d4dc9e22643" providerId="LiveId" clId="{9EBBFA1C-5226-4AE6-954C-C02393E29BD8}" dt="2025-07-08T11:27:01.417" v="1777"/>
-          <ac:spMkLst>
-            <pc:docMk/>
-            <pc:sldMk cId="1077421182" sldId="256"/>
-            <ac:spMk id="211" creationId="{C958D7B8-BC29-7508-F405-77D6128B8AFF}"/>
-          </ac:spMkLst>
-        </pc:spChg>
-        <pc:spChg chg="add mod">
-          <ac:chgData name="Fatima Pillosu" userId="a6295d4dc9e22643" providerId="LiveId" clId="{9EBBFA1C-5226-4AE6-954C-C02393E29BD8}" dt="2025-07-08T11:27:01.417" v="1777"/>
-          <ac:spMkLst>
-            <pc:docMk/>
-            <pc:sldMk cId="1077421182" sldId="256"/>
-            <ac:spMk id="212" creationId="{204795FA-B9E8-F8C0-D0CC-0DA8FCD26B47}"/>
-          </ac:spMkLst>
-        </pc:spChg>
-        <pc:spChg chg="add mod">
-          <ac:chgData name="Fatima Pillosu" userId="a6295d4dc9e22643" providerId="LiveId" clId="{9EBBFA1C-5226-4AE6-954C-C02393E29BD8}" dt="2025-07-08T11:27:01.417" v="1777"/>
-          <ac:spMkLst>
-            <pc:docMk/>
-            <pc:sldMk cId="1077421182" sldId="256"/>
-            <ac:spMk id="213" creationId="{F905F2F6-5287-BF9A-2843-E3939A3C8FE8}"/>
-          </ac:spMkLst>
-        </pc:spChg>
-        <pc:spChg chg="add mod">
-          <ac:chgData name="Fatima Pillosu" userId="a6295d4dc9e22643" providerId="LiveId" clId="{9EBBFA1C-5226-4AE6-954C-C02393E29BD8}" dt="2025-07-08T11:27:01.417" v="1777"/>
-          <ac:spMkLst>
-            <pc:docMk/>
-            <pc:sldMk cId="1077421182" sldId="256"/>
-            <ac:spMk id="214" creationId="{7F93C654-DF21-285F-29DF-14068DF0E924}"/>
-          </ac:spMkLst>
-        </pc:spChg>
-        <pc:spChg chg="add mod">
-          <ac:chgData name="Fatima Pillosu" userId="a6295d4dc9e22643" providerId="LiveId" clId="{9EBBFA1C-5226-4AE6-954C-C02393E29BD8}" dt="2025-07-08T11:27:01.417" v="1777"/>
-          <ac:spMkLst>
-            <pc:docMk/>
-            <pc:sldMk cId="1077421182" sldId="256"/>
-            <ac:spMk id="215" creationId="{8EC336CC-6D57-3EEF-2A6C-A56380CB8873}"/>
-          </ac:spMkLst>
-        </pc:spChg>
-        <pc:spChg chg="add mod">
-          <ac:chgData name="Fatima Pillosu" userId="a6295d4dc9e22643" providerId="LiveId" clId="{9EBBFA1C-5226-4AE6-954C-C02393E29BD8}" dt="2025-07-08T11:27:01.417" v="1777"/>
-          <ac:spMkLst>
-            <pc:docMk/>
-            <pc:sldMk cId="1077421182" sldId="256"/>
-            <ac:spMk id="216" creationId="{1D7A2307-99C5-6B69-79DD-B0693D965F9C}"/>
-          </ac:spMkLst>
-        </pc:spChg>
-        <pc:spChg chg="add mod">
-          <ac:chgData name="Fatima Pillosu" userId="a6295d4dc9e22643" providerId="LiveId" clId="{9EBBFA1C-5226-4AE6-954C-C02393E29BD8}" dt="2025-07-08T11:27:01.417" v="1777"/>
-          <ac:spMkLst>
-            <pc:docMk/>
-            <pc:sldMk cId="1077421182" sldId="256"/>
-            <ac:spMk id="217" creationId="{BBA8908B-35D8-5B89-D526-CE4ED5F9EE59}"/>
-          </ac:spMkLst>
-        </pc:spChg>
-        <pc:spChg chg="add mod">
-          <ac:chgData name="Fatima Pillosu" userId="a6295d4dc9e22643" providerId="LiveId" clId="{9EBBFA1C-5226-4AE6-954C-C02393E29BD8}" dt="2025-07-08T11:27:01.417" v="1777"/>
-          <ac:spMkLst>
-            <pc:docMk/>
-            <pc:sldMk cId="1077421182" sldId="256"/>
-            <ac:spMk id="218" creationId="{F9D74EAF-3CFE-347D-2DD8-53F82E0D4697}"/>
-          </ac:spMkLst>
-        </pc:spChg>
-        <pc:spChg chg="add mod">
-          <ac:chgData name="Fatima Pillosu" userId="a6295d4dc9e22643" providerId="LiveId" clId="{9EBBFA1C-5226-4AE6-954C-C02393E29BD8}" dt="2025-07-08T11:27:01.417" v="1777"/>
-          <ac:spMkLst>
-            <pc:docMk/>
-            <pc:sldMk cId="1077421182" sldId="256"/>
-            <ac:spMk id="219" creationId="{8E6D92FE-9CCF-E535-4712-749BC5D49097}"/>
-          </ac:spMkLst>
-        </pc:spChg>
-        <pc:spChg chg="add mod">
-          <ac:chgData name="Fatima Pillosu" userId="a6295d4dc9e22643" providerId="LiveId" clId="{9EBBFA1C-5226-4AE6-954C-C02393E29BD8}" dt="2025-07-08T11:27:01.417" v="1777"/>
-          <ac:spMkLst>
-            <pc:docMk/>
-            <pc:sldMk cId="1077421182" sldId="256"/>
-            <ac:spMk id="220" creationId="{9C1A1E7F-FA5E-4B5B-25C5-907F55A6CF15}"/>
-          </ac:spMkLst>
-        </pc:spChg>
-        <pc:spChg chg="add mod">
-          <ac:chgData name="Fatima Pillosu" userId="a6295d4dc9e22643" providerId="LiveId" clId="{9EBBFA1C-5226-4AE6-954C-C02393E29BD8}" dt="2025-07-08T11:27:01.417" v="1777"/>
-          <ac:spMkLst>
-            <pc:docMk/>
-            <pc:sldMk cId="1077421182" sldId="256"/>
-            <ac:spMk id="221" creationId="{7B0D5160-46AD-D54D-2173-441E44C8D34B}"/>
-          </ac:spMkLst>
-        </pc:spChg>
-        <pc:spChg chg="add mod">
-          <ac:chgData name="Fatima Pillosu" userId="a6295d4dc9e22643" providerId="LiveId" clId="{9EBBFA1C-5226-4AE6-954C-C02393E29BD8}" dt="2025-07-08T11:27:01.417" v="1777"/>
-          <ac:spMkLst>
-            <pc:docMk/>
-            <pc:sldMk cId="1077421182" sldId="256"/>
-            <ac:spMk id="222" creationId="{1362F491-3E57-1D9B-DB03-271E44F061A5}"/>
-          </ac:spMkLst>
-        </pc:spChg>
-        <pc:spChg chg="add mod">
-          <ac:chgData name="Fatima Pillosu" userId="a6295d4dc9e22643" providerId="LiveId" clId="{9EBBFA1C-5226-4AE6-954C-C02393E29BD8}" dt="2025-07-08T11:27:01.417" v="1777"/>
-          <ac:spMkLst>
-            <pc:docMk/>
-            <pc:sldMk cId="1077421182" sldId="256"/>
-            <ac:spMk id="223" creationId="{C922A374-9135-45AE-F348-21470D4EBDF2}"/>
-          </ac:spMkLst>
-        </pc:spChg>
-        <pc:spChg chg="add mod">
-          <ac:chgData name="Fatima Pillosu" userId="a6295d4dc9e22643" providerId="LiveId" clId="{9EBBFA1C-5226-4AE6-954C-C02393E29BD8}" dt="2025-07-08T11:27:01.417" v="1777"/>
-          <ac:spMkLst>
-            <pc:docMk/>
-            <pc:sldMk cId="1077421182" sldId="256"/>
-            <ac:spMk id="224" creationId="{5D0B19A4-B2A2-D20E-9F72-96A863DE9165}"/>
-          </ac:spMkLst>
-        </pc:spChg>
-        <pc:spChg chg="add mod">
-          <ac:chgData name="Fatima Pillosu" userId="a6295d4dc9e22643" providerId="LiveId" clId="{9EBBFA1C-5226-4AE6-954C-C02393E29BD8}" dt="2025-07-08T11:27:01.417" v="1777"/>
-          <ac:spMkLst>
-            <pc:docMk/>
-            <pc:sldMk cId="1077421182" sldId="256"/>
-            <ac:spMk id="225" creationId="{CB3164D9-248A-ED3E-F9E7-F2107AE72F3E}"/>
-          </ac:spMkLst>
-        </pc:spChg>
-        <pc:spChg chg="add mod">
-          <ac:chgData name="Fatima Pillosu" userId="a6295d4dc9e22643" providerId="LiveId" clId="{9EBBFA1C-5226-4AE6-954C-C02393E29BD8}" dt="2025-07-08T11:27:01.417" v="1777"/>
-          <ac:spMkLst>
-            <pc:docMk/>
-            <pc:sldMk cId="1077421182" sldId="256"/>
-            <ac:spMk id="226" creationId="{AEF58A4C-D7E5-1DB7-8CBA-638A2D2BAD88}"/>
-          </ac:spMkLst>
-        </pc:spChg>
-        <pc:spChg chg="add mod">
-          <ac:chgData name="Fatima Pillosu" userId="a6295d4dc9e22643" providerId="LiveId" clId="{9EBBFA1C-5226-4AE6-954C-C02393E29BD8}" dt="2025-07-08T11:27:01.417" v="1777"/>
-          <ac:spMkLst>
-            <pc:docMk/>
-            <pc:sldMk cId="1077421182" sldId="256"/>
-            <ac:spMk id="227" creationId="{1B705EDE-2279-1B9A-3348-484B4D25E06B}"/>
-          </ac:spMkLst>
-        </pc:spChg>
-        <pc:spChg chg="add mod">
-          <ac:chgData name="Fatima Pillosu" userId="a6295d4dc9e22643" providerId="LiveId" clId="{9EBBFA1C-5226-4AE6-954C-C02393E29BD8}" dt="2025-07-08T11:27:01.417" v="1777"/>
-          <ac:spMkLst>
-            <pc:docMk/>
-            <pc:sldMk cId="1077421182" sldId="256"/>
-            <ac:spMk id="228" creationId="{817946E3-6C8F-4D67-07DB-B8C82876D2A4}"/>
-          </ac:spMkLst>
-        </pc:spChg>
-        <pc:spChg chg="add mod">
-          <ac:chgData name="Fatima Pillosu" userId="a6295d4dc9e22643" providerId="LiveId" clId="{9EBBFA1C-5226-4AE6-954C-C02393E29BD8}" dt="2025-07-08T11:27:01.417" v="1777"/>
-          <ac:spMkLst>
-            <pc:docMk/>
-            <pc:sldMk cId="1077421182" sldId="256"/>
-            <ac:spMk id="229" creationId="{3DA9995A-2F39-86B0-AE43-80C06021718C}"/>
-          </ac:spMkLst>
-        </pc:spChg>
-        <pc:spChg chg="add mod">
-          <ac:chgData name="Fatima Pillosu" userId="a6295d4dc9e22643" providerId="LiveId" clId="{9EBBFA1C-5226-4AE6-954C-C02393E29BD8}" dt="2025-07-08T11:27:01.417" v="1777"/>
-          <ac:spMkLst>
-            <pc:docMk/>
-            <pc:sldMk cId="1077421182" sldId="256"/>
-            <ac:spMk id="230" creationId="{F8D21F9B-5C62-508B-72A4-FDE3701CFC1F}"/>
-          </ac:spMkLst>
-        </pc:spChg>
-        <pc:spChg chg="add mod">
-          <ac:chgData name="Fatima Pillosu" userId="a6295d4dc9e22643" providerId="LiveId" clId="{9EBBFA1C-5226-4AE6-954C-C02393E29BD8}" dt="2025-07-08T11:27:01.417" v="1777"/>
-          <ac:spMkLst>
-            <pc:docMk/>
-            <pc:sldMk cId="1077421182" sldId="256"/>
-            <ac:spMk id="231" creationId="{B2214090-534F-3E76-D77A-656834F6C453}"/>
-          </ac:spMkLst>
-        </pc:spChg>
-        <pc:spChg chg="add mod">
-          <ac:chgData name="Fatima Pillosu" userId="a6295d4dc9e22643" providerId="LiveId" clId="{9EBBFA1C-5226-4AE6-954C-C02393E29BD8}" dt="2025-07-08T11:27:01.417" v="1777"/>
-          <ac:spMkLst>
-            <pc:docMk/>
-            <pc:sldMk cId="1077421182" sldId="256"/>
-            <ac:spMk id="232" creationId="{91C38AA6-715D-A739-7922-B79CDE6205C3}"/>
-          </ac:spMkLst>
-        </pc:spChg>
-        <pc:spChg chg="add mod">
-          <ac:chgData name="Fatima Pillosu" userId="a6295d4dc9e22643" providerId="LiveId" clId="{9EBBFA1C-5226-4AE6-954C-C02393E29BD8}" dt="2025-07-08T11:27:01.417" v="1777"/>
-          <ac:spMkLst>
-            <pc:docMk/>
-            <pc:sldMk cId="1077421182" sldId="256"/>
-            <ac:spMk id="233" creationId="{7BF1475F-5E3E-FB2E-6C3B-67741103E1B0}"/>
-          </ac:spMkLst>
-        </pc:spChg>
-        <pc:spChg chg="add mod">
-          <ac:chgData name="Fatima Pillosu" userId="a6295d4dc9e22643" providerId="LiveId" clId="{9EBBFA1C-5226-4AE6-954C-C02393E29BD8}" dt="2025-07-08T11:27:01.417" v="1777"/>
-          <ac:spMkLst>
-            <pc:docMk/>
-            <pc:sldMk cId="1077421182" sldId="256"/>
-            <ac:spMk id="234" creationId="{17D045C9-2785-8D0B-48BC-9623A20A95BE}"/>
-          </ac:spMkLst>
-        </pc:spChg>
-        <pc:spChg chg="add mod">
-          <ac:chgData name="Fatima Pillosu" userId="a6295d4dc9e22643" providerId="LiveId" clId="{9EBBFA1C-5226-4AE6-954C-C02393E29BD8}" dt="2025-07-08T11:27:01.417" v="1777"/>
-          <ac:spMkLst>
-            <pc:docMk/>
-            <pc:sldMk cId="1077421182" sldId="256"/>
-            <ac:spMk id="235" creationId="{FA1ADE2D-7850-5D25-BBF5-BDBEC7AC4EB2}"/>
-          </ac:spMkLst>
-        </pc:spChg>
-        <pc:spChg chg="add mod">
-          <ac:chgData name="Fatima Pillosu" userId="a6295d4dc9e22643" providerId="LiveId" clId="{9EBBFA1C-5226-4AE6-954C-C02393E29BD8}" dt="2025-07-08T11:27:01.417" v="1777"/>
-          <ac:spMkLst>
-            <pc:docMk/>
-            <pc:sldMk cId="1077421182" sldId="256"/>
-            <ac:spMk id="236" creationId="{E91390B2-8AB6-5B18-1187-7AAF22EB9C01}"/>
-          </ac:spMkLst>
-        </pc:spChg>
-        <pc:spChg chg="add mod">
-          <ac:chgData name="Fatima Pillosu" userId="a6295d4dc9e22643" providerId="LiveId" clId="{9EBBFA1C-5226-4AE6-954C-C02393E29BD8}" dt="2025-07-08T11:27:01.417" v="1777"/>
-          <ac:spMkLst>
-            <pc:docMk/>
-            <pc:sldMk cId="1077421182" sldId="256"/>
-            <ac:spMk id="237" creationId="{51D56ED1-D88E-B438-88A3-31C2A3C03D2F}"/>
-          </ac:spMkLst>
-        </pc:spChg>
-        <pc:spChg chg="add mod">
-          <ac:chgData name="Fatima Pillosu" userId="a6295d4dc9e22643" providerId="LiveId" clId="{9EBBFA1C-5226-4AE6-954C-C02393E29BD8}" dt="2025-07-08T11:27:01.417" v="1777"/>
-          <ac:spMkLst>
-            <pc:docMk/>
-            <pc:sldMk cId="1077421182" sldId="256"/>
-            <ac:spMk id="238" creationId="{56AC75A2-3246-5725-FAD8-FE1062B2E193}"/>
-          </ac:spMkLst>
-        </pc:spChg>
-        <pc:spChg chg="add mod">
-          <ac:chgData name="Fatima Pillosu" userId="a6295d4dc9e22643" providerId="LiveId" clId="{9EBBFA1C-5226-4AE6-954C-C02393E29BD8}" dt="2025-07-08T11:27:01.417" v="1777"/>
-          <ac:spMkLst>
-            <pc:docMk/>
-            <pc:sldMk cId="1077421182" sldId="256"/>
-            <ac:spMk id="239" creationId="{9066BB45-58DA-1A23-5E05-3896F36EA204}"/>
-          </ac:spMkLst>
-        </pc:spChg>
-        <pc:spChg chg="add mod">
-          <ac:chgData name="Fatima Pillosu" userId="a6295d4dc9e22643" providerId="LiveId" clId="{9EBBFA1C-5226-4AE6-954C-C02393E29BD8}" dt="2025-07-08T11:27:01.417" v="1777"/>
-          <ac:spMkLst>
-            <pc:docMk/>
-            <pc:sldMk cId="1077421182" sldId="256"/>
-            <ac:spMk id="240" creationId="{877F3CAD-29B8-385F-F497-1C8B89B60F90}"/>
-          </ac:spMkLst>
-        </pc:spChg>
-        <pc:spChg chg="add mod">
-          <ac:chgData name="Fatima Pillosu" userId="a6295d4dc9e22643" providerId="LiveId" clId="{9EBBFA1C-5226-4AE6-954C-C02393E29BD8}" dt="2025-07-08T11:27:01.417" v="1777"/>
-          <ac:spMkLst>
-            <pc:docMk/>
-            <pc:sldMk cId="1077421182" sldId="256"/>
-            <ac:spMk id="241" creationId="{2246992F-9F95-300A-7A7A-FBC532D42E51}"/>
-          </ac:spMkLst>
-        </pc:spChg>
-        <pc:spChg chg="add mod">
-          <ac:chgData name="Fatima Pillosu" userId="a6295d4dc9e22643" providerId="LiveId" clId="{9EBBFA1C-5226-4AE6-954C-C02393E29BD8}" dt="2025-07-08T11:27:01.417" v="1777"/>
-          <ac:spMkLst>
-            <pc:docMk/>
-            <pc:sldMk cId="1077421182" sldId="256"/>
-            <ac:spMk id="242" creationId="{74B76ABE-B26C-DDC1-0625-C3C6CF6C464D}"/>
-          </ac:spMkLst>
-        </pc:spChg>
-        <pc:spChg chg="add mod">
-          <ac:chgData name="Fatima Pillosu" userId="a6295d4dc9e22643" providerId="LiveId" clId="{9EBBFA1C-5226-4AE6-954C-C02393E29BD8}" dt="2025-07-08T11:27:01.417" v="1777"/>
-          <ac:spMkLst>
-            <pc:docMk/>
-            <pc:sldMk cId="1077421182" sldId="256"/>
-            <ac:spMk id="243" creationId="{FE4AD5B6-9606-CB67-B1BB-1A180E96829A}"/>
-          </ac:spMkLst>
-        </pc:spChg>
-        <pc:spChg chg="add mod">
-          <ac:chgData name="Fatima Pillosu" userId="a6295d4dc9e22643" providerId="LiveId" clId="{9EBBFA1C-5226-4AE6-954C-C02393E29BD8}" dt="2025-07-08T11:27:01.417" v="1777"/>
-          <ac:spMkLst>
-            <pc:docMk/>
-            <pc:sldMk cId="1077421182" sldId="256"/>
-            <ac:spMk id="244" creationId="{33179324-EE31-86DC-725D-644F6C4CE99A}"/>
-          </ac:spMkLst>
-        </pc:spChg>
-        <pc:spChg chg="add mod">
-          <ac:chgData name="Fatima Pillosu" userId="a6295d4dc9e22643" providerId="LiveId" clId="{9EBBFA1C-5226-4AE6-954C-C02393E29BD8}" dt="2025-07-08T11:27:01.417" v="1777"/>
-          <ac:spMkLst>
-            <pc:docMk/>
-            <pc:sldMk cId="1077421182" sldId="256"/>
-            <ac:spMk id="245" creationId="{E09B7D08-5A90-12A8-26DF-79EFC0B64551}"/>
-          </ac:spMkLst>
-        </pc:spChg>
-        <pc:spChg chg="add mod">
-          <ac:chgData name="Fatima Pillosu" userId="a6295d4dc9e22643" providerId="LiveId" clId="{9EBBFA1C-5226-4AE6-954C-C02393E29BD8}" dt="2025-07-08T11:27:01.417" v="1777"/>
-          <ac:spMkLst>
-            <pc:docMk/>
-            <pc:sldMk cId="1077421182" sldId="256"/>
-            <ac:spMk id="246" creationId="{AB0A9411-88CA-B07E-0168-7427E4178170}"/>
-          </ac:spMkLst>
-        </pc:spChg>
-        <pc:spChg chg="add mod">
-          <ac:chgData name="Fatima Pillosu" userId="a6295d4dc9e22643" providerId="LiveId" clId="{9EBBFA1C-5226-4AE6-954C-C02393E29BD8}" dt="2025-07-08T11:27:01.417" v="1777"/>
-          <ac:spMkLst>
-            <pc:docMk/>
-            <pc:sldMk cId="1077421182" sldId="256"/>
-            <ac:spMk id="247" creationId="{5BC06B07-E0C4-1D8C-26E3-B0DB5E39B1F8}"/>
-          </ac:spMkLst>
-        </pc:spChg>
-        <pc:spChg chg="add mod">
-          <ac:chgData name="Fatima Pillosu" userId="a6295d4dc9e22643" providerId="LiveId" clId="{9EBBFA1C-5226-4AE6-954C-C02393E29BD8}" dt="2025-07-08T11:27:01.417" v="1777"/>
-          <ac:spMkLst>
-            <pc:docMk/>
-            <pc:sldMk cId="1077421182" sldId="256"/>
-            <ac:spMk id="248" creationId="{236C3989-F0B5-3443-8EE7-10908DCA1FE0}"/>
-          </ac:spMkLst>
-        </pc:spChg>
-        <pc:spChg chg="add mod">
-          <ac:chgData name="Fatima Pillosu" userId="a6295d4dc9e22643" providerId="LiveId" clId="{9EBBFA1C-5226-4AE6-954C-C02393E29BD8}" dt="2025-07-08T11:27:01.417" v="1777"/>
-          <ac:spMkLst>
-            <pc:docMk/>
-            <pc:sldMk cId="1077421182" sldId="256"/>
-            <ac:spMk id="249" creationId="{7EFF052B-0C1B-362D-FF6E-0B6C6B46315E}"/>
-          </ac:spMkLst>
-        </pc:spChg>
-        <pc:spChg chg="add mod">
-          <ac:chgData name="Fatima Pillosu" userId="a6295d4dc9e22643" providerId="LiveId" clId="{9EBBFA1C-5226-4AE6-954C-C02393E29BD8}" dt="2025-07-08T11:27:01.417" v="1777"/>
-          <ac:spMkLst>
-            <pc:docMk/>
-            <pc:sldMk cId="1077421182" sldId="256"/>
-            <ac:spMk id="250" creationId="{D289F6C9-1074-AA42-1E52-617C2BC67E34}"/>
-          </ac:spMkLst>
-        </pc:spChg>
-        <pc:spChg chg="add mod">
-          <ac:chgData name="Fatima Pillosu" userId="a6295d4dc9e22643" providerId="LiveId" clId="{9EBBFA1C-5226-4AE6-954C-C02393E29BD8}" dt="2025-07-08T11:27:01.417" v="1777"/>
-          <ac:spMkLst>
-            <pc:docMk/>
-            <pc:sldMk cId="1077421182" sldId="256"/>
-            <ac:spMk id="251" creationId="{F863E9C7-8FB7-CE1F-3434-1CD0B672F969}"/>
-          </ac:spMkLst>
-        </pc:spChg>
-        <pc:spChg chg="add mod">
-          <ac:chgData name="Fatima Pillosu" userId="a6295d4dc9e22643" providerId="LiveId" clId="{9EBBFA1C-5226-4AE6-954C-C02393E29BD8}" dt="2025-07-08T11:27:01.417" v="1777"/>
-          <ac:spMkLst>
-            <pc:docMk/>
-            <pc:sldMk cId="1077421182" sldId="256"/>
-            <ac:spMk id="252" creationId="{12ACEBA3-D642-F46B-B2CD-68FB1C88018B}"/>
-          </ac:spMkLst>
-        </pc:spChg>
-        <pc:spChg chg="add mod">
-          <ac:chgData name="Fatima Pillosu" userId="a6295d4dc9e22643" providerId="LiveId" clId="{9EBBFA1C-5226-4AE6-954C-C02393E29BD8}" dt="2025-07-08T11:27:01.417" v="1777"/>
-          <ac:spMkLst>
-            <pc:docMk/>
-            <pc:sldMk cId="1077421182" sldId="256"/>
-            <ac:spMk id="253" creationId="{1F76D0A3-4834-E813-D950-7D98972D5806}"/>
-          </ac:spMkLst>
-        </pc:spChg>
-        <pc:spChg chg="add mod">
-          <ac:chgData name="Fatima Pillosu" userId="a6295d4dc9e22643" providerId="LiveId" clId="{9EBBFA1C-5226-4AE6-954C-C02393E29BD8}" dt="2025-07-08T11:27:01.417" v="1777"/>
-          <ac:spMkLst>
-            <pc:docMk/>
-            <pc:sldMk cId="1077421182" sldId="256"/>
-            <ac:spMk id="254" creationId="{33C9AD4D-76E1-EA0E-31CD-96084ABB66DA}"/>
-          </ac:spMkLst>
-        </pc:spChg>
-        <pc:spChg chg="add mod">
-          <ac:chgData name="Fatima Pillosu" userId="a6295d4dc9e22643" providerId="LiveId" clId="{9EBBFA1C-5226-4AE6-954C-C02393E29BD8}" dt="2025-07-08T11:27:01.417" v="1777"/>
-          <ac:spMkLst>
-            <pc:docMk/>
-            <pc:sldMk cId="1077421182" sldId="256"/>
-            <ac:spMk id="255" creationId="{28A1B6B6-19BE-648F-D13D-42B169466151}"/>
-          </ac:spMkLst>
-        </pc:spChg>
-        <pc:spChg chg="add mod">
-          <ac:chgData name="Fatima Pillosu" userId="a6295d4dc9e22643" providerId="LiveId" clId="{9EBBFA1C-5226-4AE6-954C-C02393E29BD8}" dt="2025-07-08T11:27:01.417" v="1777"/>
-          <ac:spMkLst>
-            <pc:docMk/>
-            <pc:sldMk cId="1077421182" sldId="256"/>
-            <ac:spMk id="256" creationId="{30DF65D3-3574-6230-2E5F-D4AC1D17F2D9}"/>
-          </ac:spMkLst>
-        </pc:spChg>
-        <pc:spChg chg="add mod">
-          <ac:chgData name="Fatima Pillosu" userId="a6295d4dc9e22643" providerId="LiveId" clId="{9EBBFA1C-5226-4AE6-954C-C02393E29BD8}" dt="2025-07-08T11:27:01.417" v="1777"/>
-          <ac:spMkLst>
-            <pc:docMk/>
-            <pc:sldMk cId="1077421182" sldId="256"/>
-            <ac:spMk id="257" creationId="{30C4FE0C-3DEA-008F-36C3-48FB0E0884CA}"/>
-          </ac:spMkLst>
-        </pc:spChg>
-        <pc:spChg chg="add mod">
-          <ac:chgData name="Fatima Pillosu" userId="a6295d4dc9e22643" providerId="LiveId" clId="{9EBBFA1C-5226-4AE6-954C-C02393E29BD8}" dt="2025-07-08T11:27:01.417" v="1777"/>
-          <ac:spMkLst>
-            <pc:docMk/>
-            <pc:sldMk cId="1077421182" sldId="256"/>
-            <ac:spMk id="258" creationId="{8422E5D3-312F-BE99-6F11-0F80EE67A49B}"/>
-          </ac:spMkLst>
-        </pc:spChg>
-        <pc:spChg chg="add mod">
-          <ac:chgData name="Fatima Pillosu" userId="a6295d4dc9e22643" providerId="LiveId" clId="{9EBBFA1C-5226-4AE6-954C-C02393E29BD8}" dt="2025-07-08T11:27:01.417" v="1777"/>
-          <ac:spMkLst>
-            <pc:docMk/>
-            <pc:sldMk cId="1077421182" sldId="256"/>
-            <ac:spMk id="259" creationId="{66D87F7B-332B-2ADA-49AA-C875E9341562}"/>
-          </ac:spMkLst>
-        </pc:spChg>
-        <pc:spChg chg="add mod">
-          <ac:chgData name="Fatima Pillosu" userId="a6295d4dc9e22643" providerId="LiveId" clId="{9EBBFA1C-5226-4AE6-954C-C02393E29BD8}" dt="2025-07-08T11:27:01.417" v="1777"/>
-          <ac:spMkLst>
-            <pc:docMk/>
-            <pc:sldMk cId="1077421182" sldId="256"/>
-            <ac:spMk id="260" creationId="{4AD9315E-1557-7622-A160-510DD2D773DB}"/>
-          </ac:spMkLst>
-        </pc:spChg>
-        <pc:spChg chg="add mod">
-          <ac:chgData name="Fatima Pillosu" userId="a6295d4dc9e22643" providerId="LiveId" clId="{9EBBFA1C-5226-4AE6-954C-C02393E29BD8}" dt="2025-07-08T11:27:01.417" v="1777"/>
-          <ac:spMkLst>
-            <pc:docMk/>
-            <pc:sldMk cId="1077421182" sldId="256"/>
-            <ac:spMk id="261" creationId="{D16D9ADA-9650-1708-658A-2299221146B9}"/>
-          </ac:spMkLst>
-        </pc:spChg>
-        <pc:spChg chg="add mod">
-          <ac:chgData name="Fatima Pillosu" userId="a6295d4dc9e22643" providerId="LiveId" clId="{9EBBFA1C-5226-4AE6-954C-C02393E29BD8}" dt="2025-07-08T11:27:01.417" v="1777"/>
-          <ac:spMkLst>
-            <pc:docMk/>
-            <pc:sldMk cId="1077421182" sldId="256"/>
-            <ac:spMk id="262" creationId="{AECBF742-738D-16F3-42E3-2B5E08479ACE}"/>
-          </ac:spMkLst>
-        </pc:spChg>
-        <pc:spChg chg="add mod">
-          <ac:chgData name="Fatima Pillosu" userId="a6295d4dc9e22643" providerId="LiveId" clId="{9EBBFA1C-5226-4AE6-954C-C02393E29BD8}" dt="2025-07-08T11:27:01.417" v="1777"/>
-          <ac:spMkLst>
-            <pc:docMk/>
-            <pc:sldMk cId="1077421182" sldId="256"/>
-            <ac:spMk id="263" creationId="{E6F12A7D-B2C0-E1D2-EE95-7CF7ECD783A7}"/>
-          </ac:spMkLst>
-        </pc:spChg>
-        <pc:spChg chg="add mod">
-          <ac:chgData name="Fatima Pillosu" userId="a6295d4dc9e22643" providerId="LiveId" clId="{9EBBFA1C-5226-4AE6-954C-C02393E29BD8}" dt="2025-07-08T11:27:01.417" v="1777"/>
-          <ac:spMkLst>
-            <pc:docMk/>
-            <pc:sldMk cId="1077421182" sldId="256"/>
-            <ac:spMk id="264" creationId="{91DDAEA7-6CB1-3B05-80F0-0ADC36002D98}"/>
-          </ac:spMkLst>
-        </pc:spChg>
-        <pc:spChg chg="add mod">
-          <ac:chgData name="Fatima Pillosu" userId="a6295d4dc9e22643" providerId="LiveId" clId="{9EBBFA1C-5226-4AE6-954C-C02393E29BD8}" dt="2025-07-08T11:27:01.417" v="1777"/>
-          <ac:spMkLst>
-            <pc:docMk/>
-            <pc:sldMk cId="1077421182" sldId="256"/>
-            <ac:spMk id="265" creationId="{F54B1E8F-F919-0C53-1D8F-3207F22F601F}"/>
-          </ac:spMkLst>
-        </pc:spChg>
-        <pc:spChg chg="add mod">
-          <ac:chgData name="Fatima Pillosu" userId="a6295d4dc9e22643" providerId="LiveId" clId="{9EBBFA1C-5226-4AE6-954C-C02393E29BD8}" dt="2025-07-08T11:27:01.417" v="1777"/>
-          <ac:spMkLst>
-            <pc:docMk/>
-            <pc:sldMk cId="1077421182" sldId="256"/>
-            <ac:spMk id="266" creationId="{080D85DB-4D0E-DF49-B733-23A5D10CC6A7}"/>
-          </ac:spMkLst>
-        </pc:spChg>
-        <pc:spChg chg="add mod">
-          <ac:chgData name="Fatima Pillosu" userId="a6295d4dc9e22643" providerId="LiveId" clId="{9EBBFA1C-5226-4AE6-954C-C02393E29BD8}" dt="2025-07-08T11:27:01.417" v="1777"/>
-          <ac:spMkLst>
-            <pc:docMk/>
-            <pc:sldMk cId="1077421182" sldId="256"/>
-            <ac:spMk id="267" creationId="{59900547-1904-A5CD-2E13-FFC546E60D5E}"/>
-          </ac:spMkLst>
-        </pc:spChg>
-        <pc:spChg chg="add mod">
-          <ac:chgData name="Fatima Pillosu" userId="a6295d4dc9e22643" providerId="LiveId" clId="{9EBBFA1C-5226-4AE6-954C-C02393E29BD8}" dt="2025-07-10T11:06:06.458" v="1809" actId="554"/>
-          <ac:spMkLst>
-            <pc:docMk/>
-            <pc:sldMk cId="1077421182" sldId="256"/>
-            <ac:spMk id="268" creationId="{247BD177-2798-A78C-8463-66D8A2547C59}"/>
-          </ac:spMkLst>
-        </pc:spChg>
-        <pc:spChg chg="add mod">
-          <ac:chgData name="Fatima Pillosu" userId="a6295d4dc9e22643" providerId="LiveId" clId="{9EBBFA1C-5226-4AE6-954C-C02393E29BD8}" dt="2025-07-10T11:06:06.458" v="1809" actId="554"/>
-          <ac:spMkLst>
-            <pc:docMk/>
-            <pc:sldMk cId="1077421182" sldId="256"/>
-            <ac:spMk id="269" creationId="{86F38C3D-1D6E-AEA0-FEBC-C872837CF97C}"/>
-          </ac:spMkLst>
-        </pc:spChg>
-        <pc:spChg chg="add mod">
-          <ac:chgData name="Fatima Pillosu" userId="a6295d4dc9e22643" providerId="LiveId" clId="{9EBBFA1C-5226-4AE6-954C-C02393E29BD8}" dt="2025-07-08T11:27:01.417" v="1777"/>
-          <ac:spMkLst>
-            <pc:docMk/>
-            <pc:sldMk cId="1077421182" sldId="256"/>
-            <ac:spMk id="270" creationId="{3A3EDEE7-BFFC-C414-3108-A376446FAF1B}"/>
-          </ac:spMkLst>
-        </pc:spChg>
-        <pc:spChg chg="add mod">
-          <ac:chgData name="Fatima Pillosu" userId="a6295d4dc9e22643" providerId="LiveId" clId="{9EBBFA1C-5226-4AE6-954C-C02393E29BD8}" dt="2025-07-08T11:27:01.417" v="1777"/>
-          <ac:spMkLst>
-            <pc:docMk/>
-            <pc:sldMk cId="1077421182" sldId="256"/>
-            <ac:spMk id="271" creationId="{AD697449-16DE-2D22-7FD3-BFE962BE2BF3}"/>
-          </ac:spMkLst>
-        </pc:spChg>
-        <pc:spChg chg="add mod">
-          <ac:chgData name="Fatima Pillosu" userId="a6295d4dc9e22643" providerId="LiveId" clId="{9EBBFA1C-5226-4AE6-954C-C02393E29BD8}" dt="2025-07-08T11:27:01.417" v="1777"/>
-          <ac:spMkLst>
-            <pc:docMk/>
-            <pc:sldMk cId="1077421182" sldId="256"/>
-            <ac:spMk id="272" creationId="{0D2AF962-0127-918B-A663-55683B31ABE7}"/>
-          </ac:spMkLst>
-        </pc:spChg>
-        <pc:spChg chg="add mod">
-          <ac:chgData name="Fatima Pillosu" userId="a6295d4dc9e22643" providerId="LiveId" clId="{9EBBFA1C-5226-4AE6-954C-C02393E29BD8}" dt="2025-07-08T11:27:01.417" v="1777"/>
-          <ac:spMkLst>
-            <pc:docMk/>
-            <pc:sldMk cId="1077421182" sldId="256"/>
-            <ac:spMk id="273" creationId="{A0C1D3B6-AAB5-FC22-5CBB-4A0B964F87DD}"/>
-          </ac:spMkLst>
-        </pc:spChg>
-        <pc:spChg chg="add mod">
-          <ac:chgData name="Fatima Pillosu" userId="a6295d4dc9e22643" providerId="LiveId" clId="{9EBBFA1C-5226-4AE6-954C-C02393E29BD8}" dt="2025-07-08T11:27:01.417" v="1777"/>
-          <ac:spMkLst>
-            <pc:docMk/>
-            <pc:sldMk cId="1077421182" sldId="256"/>
-            <ac:spMk id="274" creationId="{0C58D9D0-C718-5A79-C56C-F980B01CE5EA}"/>
-          </ac:spMkLst>
-        </pc:spChg>
-        <pc:spChg chg="add mod">
-          <ac:chgData name="Fatima Pillosu" userId="a6295d4dc9e22643" providerId="LiveId" clId="{9EBBFA1C-5226-4AE6-954C-C02393E29BD8}" dt="2025-07-08T11:27:01.417" v="1777"/>
-          <ac:spMkLst>
-            <pc:docMk/>
-            <pc:sldMk cId="1077421182" sldId="256"/>
-            <ac:spMk id="275" creationId="{10988766-2B52-5FC5-AF03-BCB1CD0EF9B6}"/>
-          </ac:spMkLst>
-        </pc:spChg>
-        <pc:spChg chg="add mod">
-          <ac:chgData name="Fatima Pillosu" userId="a6295d4dc9e22643" providerId="LiveId" clId="{9EBBFA1C-5226-4AE6-954C-C02393E29BD8}" dt="2025-07-08T11:27:01.417" v="1777"/>
-          <ac:spMkLst>
-            <pc:docMk/>
-            <pc:sldMk cId="1077421182" sldId="256"/>
-            <ac:spMk id="276" creationId="{C12ED5F3-1DE3-90AA-AE25-1BECC66D96D6}"/>
-          </ac:spMkLst>
-        </pc:spChg>
-        <pc:spChg chg="add mod">
-          <ac:chgData name="Fatima Pillosu" userId="a6295d4dc9e22643" providerId="LiveId" clId="{9EBBFA1C-5226-4AE6-954C-C02393E29BD8}" dt="2025-07-08T11:27:01.417" v="1777"/>
-          <ac:spMkLst>
-            <pc:docMk/>
-            <pc:sldMk cId="1077421182" sldId="256"/>
-            <ac:spMk id="277" creationId="{284DCE09-CFC5-4CB5-EF68-87C73FF2C96F}"/>
-          </ac:spMkLst>
-        </pc:spChg>
-        <pc:spChg chg="add mod">
-          <ac:chgData name="Fatima Pillosu" userId="a6295d4dc9e22643" providerId="LiveId" clId="{9EBBFA1C-5226-4AE6-954C-C02393E29BD8}" dt="2025-07-08T11:27:01.417" v="1777"/>
-          <ac:spMkLst>
-            <pc:docMk/>
-            <pc:sldMk cId="1077421182" sldId="256"/>
-            <ac:spMk id="278" creationId="{9F49069D-A5EA-AEFE-622C-ACFFAFC213A7}"/>
-          </ac:spMkLst>
-        </pc:spChg>
-        <pc:spChg chg="add mod">
-          <ac:chgData name="Fatima Pillosu" userId="a6295d4dc9e22643" providerId="LiveId" clId="{9EBBFA1C-5226-4AE6-954C-C02393E29BD8}" dt="2025-07-08T11:27:01.417" v="1777"/>
-          <ac:spMkLst>
-            <pc:docMk/>
-            <pc:sldMk cId="1077421182" sldId="256"/>
-            <ac:spMk id="279" creationId="{D4777A91-37F4-BE7F-F721-064F2DFBBD2B}"/>
-          </ac:spMkLst>
-        </pc:spChg>
-        <pc:spChg chg="add mod">
-          <ac:chgData name="Fatima Pillosu" userId="a6295d4dc9e22643" providerId="LiveId" clId="{9EBBFA1C-5226-4AE6-954C-C02393E29BD8}" dt="2025-07-08T11:27:01.417" v="1777"/>
-          <ac:spMkLst>
-            <pc:docMk/>
-            <pc:sldMk cId="1077421182" sldId="256"/>
-            <ac:spMk id="280" creationId="{BF87EC11-3C1F-88FC-5B11-85476540E8C8}"/>
-          </ac:spMkLst>
-        </pc:spChg>
-        <pc:spChg chg="add mod">
-          <ac:chgData name="Fatima Pillosu" userId="a6295d4dc9e22643" providerId="LiveId" clId="{9EBBFA1C-5226-4AE6-954C-C02393E29BD8}" dt="2025-07-08T11:27:01.417" v="1777"/>
-          <ac:spMkLst>
-            <pc:docMk/>
-            <pc:sldMk cId="1077421182" sldId="256"/>
-            <ac:spMk id="281" creationId="{4D487DBF-93E9-8A93-89C7-07F93FC20286}"/>
-          </ac:spMkLst>
-        </pc:spChg>
-        <pc:spChg chg="add mod">
-          <ac:chgData name="Fatima Pillosu" userId="a6295d4dc9e22643" providerId="LiveId" clId="{9EBBFA1C-5226-4AE6-954C-C02393E29BD8}" dt="2025-07-08T11:27:01.417" v="1777"/>
-          <ac:spMkLst>
-            <pc:docMk/>
-            <pc:sldMk cId="1077421182" sldId="256"/>
-            <ac:spMk id="282" creationId="{6C923F18-3DA2-6BB3-056A-D95B8BAE89AB}"/>
-          </ac:spMkLst>
-        </pc:spChg>
-        <pc:spChg chg="add mod">
-          <ac:chgData name="Fatima Pillosu" userId="a6295d4dc9e22643" providerId="LiveId" clId="{9EBBFA1C-5226-4AE6-954C-C02393E29BD8}" dt="2025-07-08T11:27:01.417" v="1777"/>
-          <ac:spMkLst>
-            <pc:docMk/>
-            <pc:sldMk cId="1077421182" sldId="256"/>
-            <ac:spMk id="283" creationId="{030850AB-2E9E-E5D2-CBA7-E87750F702D2}"/>
-          </ac:spMkLst>
-        </pc:spChg>
-        <pc:spChg chg="add mod">
-          <ac:chgData name="Fatima Pillosu" userId="a6295d4dc9e22643" providerId="LiveId" clId="{9EBBFA1C-5226-4AE6-954C-C02393E29BD8}" dt="2025-07-08T11:27:01.417" v="1777"/>
-          <ac:spMkLst>
-            <pc:docMk/>
-            <pc:sldMk cId="1077421182" sldId="256"/>
-            <ac:spMk id="284" creationId="{FF892D68-907E-98DB-5C39-8B2B5F8EFCB2}"/>
-          </ac:spMkLst>
-        </pc:spChg>
-        <pc:spChg chg="add mod">
-          <ac:chgData name="Fatima Pillosu" userId="a6295d4dc9e22643" providerId="LiveId" clId="{9EBBFA1C-5226-4AE6-954C-C02393E29BD8}" dt="2025-07-08T11:27:01.417" v="1777"/>
-          <ac:spMkLst>
-            <pc:docMk/>
-            <pc:sldMk cId="1077421182" sldId="256"/>
-            <ac:spMk id="285" creationId="{0BB1EAA9-E0D8-B3F1-C7EF-8B2A736FC345}"/>
-          </ac:spMkLst>
-        </pc:spChg>
-        <pc:spChg chg="add mod">
-          <ac:chgData name="Fatima Pillosu" userId="a6295d4dc9e22643" providerId="LiveId" clId="{9EBBFA1C-5226-4AE6-954C-C02393E29BD8}" dt="2025-07-08T11:27:01.417" v="1777"/>
-          <ac:spMkLst>
-            <pc:docMk/>
-            <pc:sldMk cId="1077421182" sldId="256"/>
-            <ac:spMk id="286" creationId="{E99FAD1C-BDCD-24AA-5BFF-680DBC719FB3}"/>
-          </ac:spMkLst>
-        </pc:spChg>
-        <pc:spChg chg="add mod">
-          <ac:chgData name="Fatima Pillosu" userId="a6295d4dc9e22643" providerId="LiveId" clId="{9EBBFA1C-5226-4AE6-954C-C02393E29BD8}" dt="2025-07-08T11:27:01.417" v="1777"/>
-          <ac:spMkLst>
-            <pc:docMk/>
-            <pc:sldMk cId="1077421182" sldId="256"/>
-            <ac:spMk id="287" creationId="{4D317A73-9F83-EF68-9A61-160D6145E870}"/>
-          </ac:spMkLst>
-        </pc:spChg>
-        <pc:spChg chg="add mod">
-          <ac:chgData name="Fatima Pillosu" userId="a6295d4dc9e22643" providerId="LiveId" clId="{9EBBFA1C-5226-4AE6-954C-C02393E29BD8}" dt="2025-07-08T11:27:01.417" v="1777"/>
-          <ac:spMkLst>
-            <pc:docMk/>
-            <pc:sldMk cId="1077421182" sldId="256"/>
-            <ac:spMk id="288" creationId="{6559EF61-E6A9-3181-8392-52C5C2060ACE}"/>
-          </ac:spMkLst>
-        </pc:spChg>
-        <pc:spChg chg="add mod">
-          <ac:chgData name="Fatima Pillosu" userId="a6295d4dc9e22643" providerId="LiveId" clId="{9EBBFA1C-5226-4AE6-954C-C02393E29BD8}" dt="2025-07-08T11:27:01.417" v="1777"/>
-          <ac:spMkLst>
-            <pc:docMk/>
-            <pc:sldMk cId="1077421182" sldId="256"/>
-            <ac:spMk id="289" creationId="{59A8CC4B-CF00-1CF0-F9E1-5DF2E244D4E7}"/>
-          </ac:spMkLst>
-        </pc:spChg>
-        <pc:spChg chg="add mod">
-          <ac:chgData name="Fatima Pillosu" userId="a6295d4dc9e22643" providerId="LiveId" clId="{9EBBFA1C-5226-4AE6-954C-C02393E29BD8}" dt="2025-07-08T11:27:01.417" v="1777"/>
-          <ac:spMkLst>
-            <pc:docMk/>
-            <pc:sldMk cId="1077421182" sldId="256"/>
-            <ac:spMk id="290" creationId="{A74BD051-00BB-9A55-9D06-E7CEC2E9612C}"/>
-          </ac:spMkLst>
-        </pc:spChg>
-        <pc:spChg chg="add mod">
-          <ac:chgData name="Fatima Pillosu" userId="a6295d4dc9e22643" providerId="LiveId" clId="{9EBBFA1C-5226-4AE6-954C-C02393E29BD8}" dt="2025-07-08T11:27:01.417" v="1777"/>
-          <ac:spMkLst>
-            <pc:docMk/>
-            <pc:sldMk cId="1077421182" sldId="256"/>
-            <ac:spMk id="291" creationId="{60303516-DB2D-2BC1-D927-2C61C32D1BE5}"/>
-          </ac:spMkLst>
-        </pc:spChg>
-        <pc:spChg chg="add mod">
-          <ac:chgData name="Fatima Pillosu" userId="a6295d4dc9e22643" providerId="LiveId" clId="{9EBBFA1C-5226-4AE6-954C-C02393E29BD8}" dt="2025-07-08T11:27:01.417" v="1777"/>
-          <ac:spMkLst>
-            <pc:docMk/>
-            <pc:sldMk cId="1077421182" sldId="256"/>
-            <ac:spMk id="292" creationId="{15FD3697-C9EB-3F58-C3D2-BE88B64A8216}"/>
-          </ac:spMkLst>
-        </pc:spChg>
-        <pc:spChg chg="add mod">
-          <ac:chgData name="Fatima Pillosu" userId="a6295d4dc9e22643" providerId="LiveId" clId="{9EBBFA1C-5226-4AE6-954C-C02393E29BD8}" dt="2025-07-08T11:27:01.417" v="1777"/>
-          <ac:spMkLst>
-            <pc:docMk/>
-            <pc:sldMk cId="1077421182" sldId="256"/>
-            <ac:spMk id="293" creationId="{F6F79706-9911-7779-94AB-03F4D52E68B1}"/>
-          </ac:spMkLst>
-        </pc:spChg>
-        <pc:spChg chg="add mod">
-          <ac:chgData name="Fatima Pillosu" userId="a6295d4dc9e22643" providerId="LiveId" clId="{9EBBFA1C-5226-4AE6-954C-C02393E29BD8}" dt="2025-07-08T11:27:01.417" v="1777"/>
-          <ac:spMkLst>
-            <pc:docMk/>
-            <pc:sldMk cId="1077421182" sldId="256"/>
-            <ac:spMk id="298" creationId="{FCCC057A-8189-5476-FE49-5468F08AA0BF}"/>
-          </ac:spMkLst>
-        </pc:spChg>
-        <pc:spChg chg="add mod">
-          <ac:chgData name="Fatima Pillosu" userId="a6295d4dc9e22643" providerId="LiveId" clId="{9EBBFA1C-5226-4AE6-954C-C02393E29BD8}" dt="2025-07-08T11:27:01.417" v="1777"/>
-          <ac:spMkLst>
-            <pc:docMk/>
-            <pc:sldMk cId="1077421182" sldId="256"/>
-            <ac:spMk id="299" creationId="{116AB80D-F1A4-CED0-5A84-C00D73AD1E9E}"/>
-          </ac:spMkLst>
-        </pc:spChg>
-        <pc:spChg chg="add mod">
-          <ac:chgData name="Fatima Pillosu" userId="a6295d4dc9e22643" providerId="LiveId" clId="{9EBBFA1C-5226-4AE6-954C-C02393E29BD8}" dt="2025-07-08T11:27:01.417" v="1777"/>
-          <ac:spMkLst>
-            <pc:docMk/>
-            <pc:sldMk cId="1077421182" sldId="256"/>
-            <ac:spMk id="300" creationId="{C478F387-3783-AF73-4618-28BD76E36A1A}"/>
-          </ac:spMkLst>
-        </pc:spChg>
-        <pc:spChg chg="add mod">
-          <ac:chgData name="Fatima Pillosu" userId="a6295d4dc9e22643" providerId="LiveId" clId="{9EBBFA1C-5226-4AE6-954C-C02393E29BD8}" dt="2025-07-08T11:27:01.417" v="1777"/>
-          <ac:spMkLst>
-            <pc:docMk/>
-            <pc:sldMk cId="1077421182" sldId="256"/>
-            <ac:spMk id="301" creationId="{F584008E-75BA-886B-D034-EE4B01396BD6}"/>
-          </ac:spMkLst>
-        </pc:spChg>
-        <pc:spChg chg="add mod">
-          <ac:chgData name="Fatima Pillosu" userId="a6295d4dc9e22643" providerId="LiveId" clId="{9EBBFA1C-5226-4AE6-954C-C02393E29BD8}" dt="2025-07-08T11:27:01.417" v="1777"/>
-          <ac:spMkLst>
-            <pc:docMk/>
-            <pc:sldMk cId="1077421182" sldId="256"/>
-            <ac:spMk id="302" creationId="{4A60554B-A82E-8A13-8885-CE0485457670}"/>
-          </ac:spMkLst>
-        </pc:spChg>
-        <pc:spChg chg="add mod">
-          <ac:chgData name="Fatima Pillosu" userId="a6295d4dc9e22643" providerId="LiveId" clId="{9EBBFA1C-5226-4AE6-954C-C02393E29BD8}" dt="2025-07-10T11:06:06.458" v="1809" actId="554"/>
-          <ac:spMkLst>
-            <pc:docMk/>
-            <pc:sldMk cId="1077421182" sldId="256"/>
-            <ac:spMk id="303" creationId="{5E47FEC6-0D01-177B-616F-F2FC445048F1}"/>
-          </ac:spMkLst>
-        </pc:spChg>
-        <pc:spChg chg="add mod">
-          <ac:chgData name="Fatima Pillosu" userId="a6295d4dc9e22643" providerId="LiveId" clId="{9EBBFA1C-5226-4AE6-954C-C02393E29BD8}" dt="2025-07-08T11:27:01.417" v="1777"/>
-          <ac:spMkLst>
-            <pc:docMk/>
-            <pc:sldMk cId="1077421182" sldId="256"/>
-            <ac:spMk id="304" creationId="{D00944E4-1E04-AB22-1A46-AD08A0C3CA24}"/>
-          </ac:spMkLst>
-        </pc:spChg>
-        <pc:spChg chg="add mod">
-          <ac:chgData name="Fatima Pillosu" userId="a6295d4dc9e22643" providerId="LiveId" clId="{9EBBFA1C-5226-4AE6-954C-C02393E29BD8}" dt="2025-07-08T11:27:01.417" v="1777"/>
-          <ac:spMkLst>
-            <pc:docMk/>
-            <pc:sldMk cId="1077421182" sldId="256"/>
-            <ac:spMk id="305" creationId="{B4855E27-F8B6-6E98-EBFC-0B9EA6CDFB27}"/>
-          </ac:spMkLst>
-        </pc:spChg>
-        <pc:spChg chg="add mod">
-          <ac:chgData name="Fatima Pillosu" userId="a6295d4dc9e22643" providerId="LiveId" clId="{9EBBFA1C-5226-4AE6-954C-C02393E29BD8}" dt="2025-07-10T11:06:06.458" v="1809" actId="554"/>
-          <ac:spMkLst>
-            <pc:docMk/>
-            <pc:sldMk cId="1077421182" sldId="256"/>
-            <ac:spMk id="306" creationId="{0CCA95F8-FAB5-D8A7-84A3-0CAAEA01371A}"/>
-          </ac:spMkLst>
-        </pc:spChg>
-        <pc:spChg chg="add mod">
-          <ac:chgData name="Fatima Pillosu" userId="a6295d4dc9e22643" providerId="LiveId" clId="{9EBBFA1C-5226-4AE6-954C-C02393E29BD8}" dt="2025-07-08T11:27:01.417" v="1777"/>
-          <ac:spMkLst>
-            <pc:docMk/>
-            <pc:sldMk cId="1077421182" sldId="256"/>
-            <ac:spMk id="307" creationId="{360557DE-A811-EA43-6229-F31D6528D462}"/>
-          </ac:spMkLst>
-        </pc:spChg>
-        <pc:spChg chg="add mod">
-          <ac:chgData name="Fatima Pillosu" userId="a6295d4dc9e22643" providerId="LiveId" clId="{9EBBFA1C-5226-4AE6-954C-C02393E29BD8}" dt="2025-07-08T11:27:01.417" v="1777"/>
-          <ac:spMkLst>
-            <pc:docMk/>
-            <pc:sldMk cId="1077421182" sldId="256"/>
-            <ac:spMk id="308" creationId="{C2EA3A5D-C275-310A-6082-2AEB6CD21588}"/>
-          </ac:spMkLst>
-        </pc:spChg>
-        <pc:spChg chg="add mod">
-          <ac:chgData name="Fatima Pillosu" userId="a6295d4dc9e22643" providerId="LiveId" clId="{9EBBFA1C-5226-4AE6-954C-C02393E29BD8}" dt="2025-07-08T11:27:01.417" v="1777"/>
-          <ac:spMkLst>
-            <pc:docMk/>
-            <pc:sldMk cId="1077421182" sldId="256"/>
-            <ac:spMk id="309" creationId="{316E5925-747E-450D-E996-F07914CF5C54}"/>
-          </ac:spMkLst>
-        </pc:spChg>
-        <pc:spChg chg="add mod">
-          <ac:chgData name="Fatima Pillosu" userId="a6295d4dc9e22643" providerId="LiveId" clId="{9EBBFA1C-5226-4AE6-954C-C02393E29BD8}" dt="2025-07-08T11:27:01.417" v="1777"/>
-          <ac:spMkLst>
-            <pc:docMk/>
-            <pc:sldMk cId="1077421182" sldId="256"/>
-            <ac:spMk id="310" creationId="{31C171AF-7405-9FF0-4B69-9C4CF0573742}"/>
-          </ac:spMkLst>
-        </pc:spChg>
-        <pc:spChg chg="add mod">
-          <ac:chgData name="Fatima Pillosu" userId="a6295d4dc9e22643" providerId="LiveId" clId="{9EBBFA1C-5226-4AE6-954C-C02393E29BD8}" dt="2025-07-08T11:27:01.417" v="1777"/>
-          <ac:spMkLst>
-            <pc:docMk/>
-            <pc:sldMk cId="1077421182" sldId="256"/>
-            <ac:spMk id="311" creationId="{C00D082E-388E-4107-2E06-C0E5F8A8FCDA}"/>
-          </ac:spMkLst>
-        </pc:spChg>
-        <pc:spChg chg="add mod">
-          <ac:chgData name="Fatima Pillosu" userId="a6295d4dc9e22643" providerId="LiveId" clId="{9EBBFA1C-5226-4AE6-954C-C02393E29BD8}" dt="2025-07-08T11:27:01.417" v="1777"/>
-          <ac:spMkLst>
-            <pc:docMk/>
-            <pc:sldMk cId="1077421182" sldId="256"/>
-            <ac:spMk id="312" creationId="{7760D3D3-7F00-D138-B9B1-4EA6132AE348}"/>
-          </ac:spMkLst>
-        </pc:spChg>
-        <pc:spChg chg="add mod">
-          <ac:chgData name="Fatima Pillosu" userId="a6295d4dc9e22643" providerId="LiveId" clId="{9EBBFA1C-5226-4AE6-954C-C02393E29BD8}" dt="2025-07-08T11:27:01.417" v="1777"/>
-          <ac:spMkLst>
-            <pc:docMk/>
-            <pc:sldMk cId="1077421182" sldId="256"/>
-            <ac:spMk id="313" creationId="{CC7C05E1-148C-3A66-883D-97D7DE169831}"/>
-          </ac:spMkLst>
-        </pc:spChg>
-        <pc:spChg chg="add mod">
-          <ac:chgData name="Fatima Pillosu" userId="a6295d4dc9e22643" providerId="LiveId" clId="{9EBBFA1C-5226-4AE6-954C-C02393E29BD8}" dt="2025-07-08T11:27:01.417" v="1777"/>
-          <ac:spMkLst>
-            <pc:docMk/>
-            <pc:sldMk cId="1077421182" sldId="256"/>
-            <ac:spMk id="314" creationId="{4158EEC8-A3E4-4BD8-8490-19655B5A4D12}"/>
-          </ac:spMkLst>
-        </pc:spChg>
-        <pc:spChg chg="add mod">
-          <ac:chgData name="Fatima Pillosu" userId="a6295d4dc9e22643" providerId="LiveId" clId="{9EBBFA1C-5226-4AE6-954C-C02393E29BD8}" dt="2025-07-08T11:27:01.417" v="1777"/>
-          <ac:spMkLst>
-            <pc:docMk/>
-            <pc:sldMk cId="1077421182" sldId="256"/>
-            <ac:spMk id="315" creationId="{E877F1F9-F456-BA95-96DF-443C1E5A9106}"/>
-          </ac:spMkLst>
-        </pc:spChg>
-        <pc:spChg chg="add mod">
-          <ac:chgData name="Fatima Pillosu" userId="a6295d4dc9e22643" providerId="LiveId" clId="{9EBBFA1C-5226-4AE6-954C-C02393E29BD8}" dt="2025-07-08T11:27:01.417" v="1777"/>
-          <ac:spMkLst>
-            <pc:docMk/>
-            <pc:sldMk cId="1077421182" sldId="256"/>
-            <ac:spMk id="316" creationId="{879DB1E5-3097-1450-39AB-8745E89C02A6}"/>
-          </ac:spMkLst>
-        </pc:spChg>
-        <pc:spChg chg="add mod">
-          <ac:chgData name="Fatima Pillosu" userId="a6295d4dc9e22643" providerId="LiveId" clId="{9EBBFA1C-5226-4AE6-954C-C02393E29BD8}" dt="2025-07-08T11:27:01.417" v="1777"/>
-          <ac:spMkLst>
-            <pc:docMk/>
-            <pc:sldMk cId="1077421182" sldId="256"/>
-            <ac:spMk id="317" creationId="{109E4421-C281-0897-399A-D5D86FC1F8BD}"/>
-          </ac:spMkLst>
-        </pc:spChg>
-        <pc:spChg chg="add mod">
-          <ac:chgData name="Fatima Pillosu" userId="a6295d4dc9e22643" providerId="LiveId" clId="{9EBBFA1C-5226-4AE6-954C-C02393E29BD8}" dt="2025-07-08T11:27:01.417" v="1777"/>
-          <ac:spMkLst>
-            <pc:docMk/>
-            <pc:sldMk cId="1077421182" sldId="256"/>
-            <ac:spMk id="318" creationId="{DD3FBA5F-1AE6-8591-B413-8356311E6698}"/>
-          </ac:spMkLst>
-        </pc:spChg>
-        <pc:spChg chg="add mod">
-          <ac:chgData name="Fatima Pillosu" userId="a6295d4dc9e22643" providerId="LiveId" clId="{9EBBFA1C-5226-4AE6-954C-C02393E29BD8}" dt="2025-07-08T11:27:01.417" v="1777"/>
-          <ac:spMkLst>
-            <pc:docMk/>
-            <pc:sldMk cId="1077421182" sldId="256"/>
-            <ac:spMk id="319" creationId="{7D693464-FF67-E598-F805-61E3528782A8}"/>
-          </ac:spMkLst>
-        </pc:spChg>
-        <pc:spChg chg="add mod">
-          <ac:chgData name="Fatima Pillosu" userId="a6295d4dc9e22643" providerId="LiveId" clId="{9EBBFA1C-5226-4AE6-954C-C02393E29BD8}" dt="2025-07-08T11:27:01.417" v="1777"/>
-          <ac:spMkLst>
-            <pc:docMk/>
-            <pc:sldMk cId="1077421182" sldId="256"/>
-            <ac:spMk id="320" creationId="{F3F6ACAB-134F-6DA9-6243-46F16F70DC61}"/>
-          </ac:spMkLst>
-        </pc:spChg>
-        <pc:spChg chg="add mod">
-          <ac:chgData name="Fatima Pillosu" userId="a6295d4dc9e22643" providerId="LiveId" clId="{9EBBFA1C-5226-4AE6-954C-C02393E29BD8}" dt="2025-07-08T11:27:01.417" v="1777"/>
-          <ac:spMkLst>
-            <pc:docMk/>
-            <pc:sldMk cId="1077421182" sldId="256"/>
-            <ac:spMk id="321" creationId="{5DC6CA7A-8721-CA9B-CAC2-9D9E4C3C9CD9}"/>
-          </ac:spMkLst>
-        </pc:spChg>
-        <pc:spChg chg="add mod">
-          <ac:chgData name="Fatima Pillosu" userId="a6295d4dc9e22643" providerId="LiveId" clId="{9EBBFA1C-5226-4AE6-954C-C02393E29BD8}" dt="2025-07-08T11:27:01.417" v="1777"/>
-          <ac:spMkLst>
-            <pc:docMk/>
-            <pc:sldMk cId="1077421182" sldId="256"/>
-            <ac:spMk id="322" creationId="{94A145D8-E173-49F5-7B4B-722ED023D3F2}"/>
-          </ac:spMkLst>
-        </pc:spChg>
-        <pc:spChg chg="add mod">
-          <ac:chgData name="Fatima Pillosu" userId="a6295d4dc9e22643" providerId="LiveId" clId="{9EBBFA1C-5226-4AE6-954C-C02393E29BD8}" dt="2025-07-08T11:27:01.417" v="1777"/>
-          <ac:spMkLst>
-            <pc:docMk/>
-            <pc:sldMk cId="1077421182" sldId="256"/>
-            <ac:spMk id="323" creationId="{541B290E-18AC-89DB-E79D-953EAD8B7694}"/>
-          </ac:spMkLst>
-        </pc:spChg>
-        <pc:spChg chg="add mod">
-          <ac:chgData name="Fatima Pillosu" userId="a6295d4dc9e22643" providerId="LiveId" clId="{9EBBFA1C-5226-4AE6-954C-C02393E29BD8}" dt="2025-07-08T11:27:01.417" v="1777"/>
-          <ac:spMkLst>
-            <pc:docMk/>
-            <pc:sldMk cId="1077421182" sldId="256"/>
-            <ac:spMk id="324" creationId="{B2F65CD0-E60C-AE84-1873-A21710B74B29}"/>
-          </ac:spMkLst>
-        </pc:spChg>
-        <pc:spChg chg="add mod">
-          <ac:chgData name="Fatima Pillosu" userId="a6295d4dc9e22643" providerId="LiveId" clId="{9EBBFA1C-5226-4AE6-954C-C02393E29BD8}" dt="2025-07-08T11:27:01.417" v="1777"/>
-          <ac:spMkLst>
-            <pc:docMk/>
-            <pc:sldMk cId="1077421182" sldId="256"/>
-            <ac:spMk id="325" creationId="{15EA5EE0-3095-B1C5-897E-C4A7E64B9D38}"/>
-          </ac:spMkLst>
-        </pc:spChg>
-        <pc:spChg chg="add mod">
-          <ac:chgData name="Fatima Pillosu" userId="a6295d4dc9e22643" providerId="LiveId" clId="{9EBBFA1C-5226-4AE6-954C-C02393E29BD8}" dt="2025-07-08T11:27:01.417" v="1777"/>
-          <ac:spMkLst>
-            <pc:docMk/>
-            <pc:sldMk cId="1077421182" sldId="256"/>
-            <ac:spMk id="326" creationId="{9A59A307-6792-6531-A45A-75B10523DB91}"/>
-          </ac:spMkLst>
-        </pc:spChg>
-        <pc:spChg chg="add mod">
-          <ac:chgData name="Fatima Pillosu" userId="a6295d4dc9e22643" providerId="LiveId" clId="{9EBBFA1C-5226-4AE6-954C-C02393E29BD8}" dt="2025-07-08T11:27:01.417" v="1777"/>
-          <ac:spMkLst>
-            <pc:docMk/>
-            <pc:sldMk cId="1077421182" sldId="256"/>
-            <ac:spMk id="327" creationId="{7936A872-480F-55BE-9333-722A284DAE9F}"/>
-          </ac:spMkLst>
-        </pc:spChg>
-        <pc:spChg chg="add mod">
-          <ac:chgData name="Fatima Pillosu" userId="a6295d4dc9e22643" providerId="LiveId" clId="{9EBBFA1C-5226-4AE6-954C-C02393E29BD8}" dt="2025-07-08T11:27:01.417" v="1777"/>
-          <ac:spMkLst>
-            <pc:docMk/>
-            <pc:sldMk cId="1077421182" sldId="256"/>
-            <ac:spMk id="328" creationId="{5A194348-966B-E224-FC85-74ED33D9B170}"/>
-          </ac:spMkLst>
-        </pc:spChg>
-        <pc:spChg chg="add mod">
-          <ac:chgData name="Fatima Pillosu" userId="a6295d4dc9e22643" providerId="LiveId" clId="{9EBBFA1C-5226-4AE6-954C-C02393E29BD8}" dt="2025-07-08T11:27:01.417" v="1777"/>
-          <ac:spMkLst>
-            <pc:docMk/>
-            <pc:sldMk cId="1077421182" sldId="256"/>
-            <ac:spMk id="329" creationId="{982A8DA2-CB08-20A4-11D0-EFA739D9216E}"/>
-          </ac:spMkLst>
-        </pc:spChg>
-        <pc:spChg chg="add mod">
-          <ac:chgData name="Fatima Pillosu" userId="a6295d4dc9e22643" providerId="LiveId" clId="{9EBBFA1C-5226-4AE6-954C-C02393E29BD8}" dt="2025-07-08T11:27:01.417" v="1777"/>
-          <ac:spMkLst>
-            <pc:docMk/>
-            <pc:sldMk cId="1077421182" sldId="256"/>
-            <ac:spMk id="330" creationId="{2CB700D3-E84A-237A-AD6A-29DD34F7F6A8}"/>
-          </ac:spMkLst>
-        </pc:spChg>
-        <pc:spChg chg="add mod">
-          <ac:chgData name="Fatima Pillosu" userId="a6295d4dc9e22643" providerId="LiveId" clId="{9EBBFA1C-5226-4AE6-954C-C02393E29BD8}" dt="2025-07-08T11:27:01.417" v="1777"/>
-          <ac:spMkLst>
-            <pc:docMk/>
-            <pc:sldMk cId="1077421182" sldId="256"/>
-            <ac:spMk id="331" creationId="{57287129-A8D4-CF92-F5FA-CD609781431D}"/>
-          </ac:spMkLst>
-        </pc:spChg>
-        <pc:spChg chg="add mod">
-          <ac:chgData name="Fatima Pillosu" userId="a6295d4dc9e22643" providerId="LiveId" clId="{9EBBFA1C-5226-4AE6-954C-C02393E29BD8}" dt="2025-07-08T11:27:01.417" v="1777"/>
-          <ac:spMkLst>
-            <pc:docMk/>
-            <pc:sldMk cId="1077421182" sldId="256"/>
-            <ac:spMk id="332" creationId="{CCA13B24-6A03-1389-3910-4327014F91DD}"/>
-          </ac:spMkLst>
-        </pc:spChg>
-        <pc:spChg chg="add mod">
-          <ac:chgData name="Fatima Pillosu" userId="a6295d4dc9e22643" providerId="LiveId" clId="{9EBBFA1C-5226-4AE6-954C-C02393E29BD8}" dt="2025-07-08T11:27:01.417" v="1777"/>
-          <ac:spMkLst>
-            <pc:docMk/>
-            <pc:sldMk cId="1077421182" sldId="256"/>
-            <ac:spMk id="333" creationId="{E298F493-7DB3-1F09-ACE5-7D36C1FFBF0A}"/>
-          </ac:spMkLst>
-        </pc:spChg>
-        <pc:grpChg chg="add del mod">
-          <ac:chgData name="Fatima Pillosu" userId="a6295d4dc9e22643" providerId="LiveId" clId="{9EBBFA1C-5226-4AE6-954C-C02393E29BD8}" dt="2025-07-08T10:22:59.956" v="1083" actId="165"/>
-          <ac:grpSpMkLst>
-            <pc:docMk/>
-            <pc:sldMk cId="1077421182" sldId="256"/>
-            <ac:grpSpMk id="64" creationId="{AC0767D1-8EA5-CFEC-F0C0-63DCFBDC0E06}"/>
-          </ac:grpSpMkLst>
-        </pc:grpChg>
-        <pc:grpChg chg="add del mod">
-          <ac:chgData name="Fatima Pillosu" userId="a6295d4dc9e22643" providerId="LiveId" clId="{9EBBFA1C-5226-4AE6-954C-C02393E29BD8}" dt="2025-07-08T10:22:59.956" v="1083" actId="165"/>
-          <ac:grpSpMkLst>
-            <pc:docMk/>
-            <pc:sldMk cId="1077421182" sldId="256"/>
-            <ac:grpSpMk id="65" creationId="{A50CD673-1C19-2346-CC0D-B3E085BE5FC7}"/>
-          </ac:grpSpMkLst>
-        </pc:grpChg>
-        <pc:grpChg chg="add del mod">
-          <ac:chgData name="Fatima Pillosu" userId="a6295d4dc9e22643" providerId="LiveId" clId="{9EBBFA1C-5226-4AE6-954C-C02393E29BD8}" dt="2025-07-08T10:23:18.791" v="1084" actId="165"/>
-          <ac:grpSpMkLst>
-            <pc:docMk/>
-            <pc:sldMk cId="1077421182" sldId="256"/>
-            <ac:grpSpMk id="66" creationId="{30E196A3-46F6-8EB1-0040-31C6D7CA11D9}"/>
-          </ac:grpSpMkLst>
-        </pc:grpChg>
-        <pc:grpChg chg="add del mod">
-          <ac:chgData name="Fatima Pillosu" userId="a6295d4dc9e22643" providerId="LiveId" clId="{9EBBFA1C-5226-4AE6-954C-C02393E29BD8}" dt="2025-07-08T10:22:59.956" v="1083" actId="165"/>
-          <ac:grpSpMkLst>
-            <pc:docMk/>
-            <pc:sldMk cId="1077421182" sldId="256"/>
-            <ac:grpSpMk id="67" creationId="{8A35767F-32DA-830D-28AD-DE42B316B852}"/>
-          </ac:grpSpMkLst>
-        </pc:grpChg>
-        <pc:picChg chg="add del mod">
-          <ac:chgData name="Fatima Pillosu" userId="a6295d4dc9e22643" providerId="LiveId" clId="{9EBBFA1C-5226-4AE6-954C-C02393E29BD8}" dt="2025-07-08T10:04:37.171" v="567" actId="478"/>
-          <ac:picMkLst>
-            <pc:docMk/>
-            <pc:sldMk cId="1077421182" sldId="256"/>
-            <ac:picMk id="3" creationId="{95E67D34-BE9B-D71A-C7A8-722A2D19C76C}"/>
-          </ac:picMkLst>
-        </pc:picChg>
-        <pc:picChg chg="add del mod modCrop">
-          <ac:chgData name="Fatima Pillosu" userId="a6295d4dc9e22643" providerId="LiveId" clId="{9EBBFA1C-5226-4AE6-954C-C02393E29BD8}" dt="2025-07-05T00:26:28.611" v="474" actId="21"/>
-          <ac:picMkLst>
-            <pc:docMk/>
-            <pc:sldMk cId="1077421182" sldId="256"/>
-            <ac:picMk id="4" creationId="{AA7AA62B-B976-F756-C9AC-2085514C251B}"/>
-          </ac:picMkLst>
-        </pc:picChg>
-        <pc:picChg chg="add del mod">
-          <ac:chgData name="Fatima Pillosu" userId="a6295d4dc9e22643" providerId="LiveId" clId="{9EBBFA1C-5226-4AE6-954C-C02393E29BD8}" dt="2025-07-08T10:07:21.174" v="612" actId="21"/>
-          <ac:picMkLst>
-            <pc:docMk/>
-            <pc:sldMk cId="1077421182" sldId="256"/>
-            <ac:picMk id="5" creationId="{61F458EB-8241-BB7B-F508-0038D2F3FB46}"/>
-          </ac:picMkLst>
-        </pc:picChg>
-        <pc:picChg chg="add del mod ord modCrop">
-          <ac:chgData name="Fatima Pillosu" userId="a6295d4dc9e22643" providerId="LiveId" clId="{9EBBFA1C-5226-4AE6-954C-C02393E29BD8}" dt="2025-07-05T00:26:28.611" v="474" actId="21"/>
-          <ac:picMkLst>
-            <pc:docMk/>
-            <pc:sldMk cId="1077421182" sldId="256"/>
-            <ac:picMk id="6" creationId="{1503F912-785F-B2D8-A49C-6C51F462E17B}"/>
-          </ac:picMkLst>
-        </pc:picChg>
-        <pc:picChg chg="add del mod">
-          <ac:chgData name="Fatima Pillosu" userId="a6295d4dc9e22643" providerId="LiveId" clId="{9EBBFA1C-5226-4AE6-954C-C02393E29BD8}" dt="2025-07-08T10:07:21.174" v="612" actId="21"/>
-          <ac:picMkLst>
-            <pc:docMk/>
-            <pc:sldMk cId="1077421182" sldId="256"/>
-            <ac:picMk id="7" creationId="{B1760ABD-9E87-189C-EDCB-2E309468CC25}"/>
-          </ac:picMkLst>
-        </pc:picChg>
-        <pc:picChg chg="add del mod modCrop">
-          <ac:chgData name="Fatima Pillosu" userId="a6295d4dc9e22643" providerId="LiveId" clId="{9EBBFA1C-5226-4AE6-954C-C02393E29BD8}" dt="2025-07-05T00:26:28.611" v="474" actId="21"/>
-          <ac:picMkLst>
-            <pc:docMk/>
-            <pc:sldMk cId="1077421182" sldId="256"/>
-            <ac:picMk id="8" creationId="{910D4C3B-14A9-6DCF-410B-F00EE2DCB6F0}"/>
-          </ac:picMkLst>
-        </pc:picChg>
-        <pc:picChg chg="add del mod">
-          <ac:chgData name="Fatima Pillosu" userId="a6295d4dc9e22643" providerId="LiveId" clId="{9EBBFA1C-5226-4AE6-954C-C02393E29BD8}" dt="2025-07-08T10:07:21.174" v="612" actId="21"/>
-          <ac:picMkLst>
-            <pc:docMk/>
-            <pc:sldMk cId="1077421182" sldId="256"/>
-            <ac:picMk id="9" creationId="{EE35B710-4E64-50C8-A8AA-14ABD233A5A8}"/>
-          </ac:picMkLst>
-        </pc:picChg>
-        <pc:picChg chg="add del mod ord modCrop">
-          <ac:chgData name="Fatima Pillosu" userId="a6295d4dc9e22643" providerId="LiveId" clId="{9EBBFA1C-5226-4AE6-954C-C02393E29BD8}" dt="2025-07-05T00:26:28.611" v="474" actId="21"/>
-          <ac:picMkLst>
-            <pc:docMk/>
-            <pc:sldMk cId="1077421182" sldId="256"/>
-            <ac:picMk id="10" creationId="{6EF8228A-E7B4-CF64-DFD2-5EDE376B058B}"/>
-          </ac:picMkLst>
-        </pc:picChg>
-        <pc:picChg chg="add del mod">
-          <ac:chgData name="Fatima Pillosu" userId="a6295d4dc9e22643" providerId="LiveId" clId="{9EBBFA1C-5226-4AE6-954C-C02393E29BD8}" dt="2025-07-08T10:07:21.174" v="612" actId="21"/>
-          <ac:picMkLst>
-            <pc:docMk/>
-            <pc:sldMk cId="1077421182" sldId="256"/>
-            <ac:picMk id="11" creationId="{552DE0A6-ACDE-EA18-BFDA-430051B44480}"/>
-          </ac:picMkLst>
-        </pc:picChg>
-        <pc:picChg chg="del">
-          <ac:chgData name="Fatima Pillosu" userId="a6295d4dc9e22643" providerId="LiveId" clId="{9EBBFA1C-5226-4AE6-954C-C02393E29BD8}" dt="2025-07-05T00:09:09.734" v="32" actId="478"/>
-          <ac:picMkLst>
-            <pc:docMk/>
-            <pc:sldMk cId="1077421182" sldId="256"/>
-            <ac:picMk id="22" creationId="{955EFEE4-DE3F-D960-A050-F06EF1191405}"/>
-          </ac:picMkLst>
-        </pc:picChg>
-        <pc:picChg chg="del">
-          <ac:chgData name="Fatima Pillosu" userId="a6295d4dc9e22643" providerId="LiveId" clId="{9EBBFA1C-5226-4AE6-954C-C02393E29BD8}" dt="2025-07-05T00:09:10.228" v="33" actId="478"/>
-          <ac:picMkLst>
-            <pc:docMk/>
-            <pc:sldMk cId="1077421182" sldId="256"/>
-            <ac:picMk id="23" creationId="{C6801E96-4F3E-9062-AE87-CF26450D04FE}"/>
-          </ac:picMkLst>
-        </pc:picChg>
-        <pc:picChg chg="del">
-          <ac:chgData name="Fatima Pillosu" userId="a6295d4dc9e22643" providerId="LiveId" clId="{9EBBFA1C-5226-4AE6-954C-C02393E29BD8}" dt="2025-07-05T00:09:11.159" v="35" actId="478"/>
-          <ac:picMkLst>
-            <pc:docMk/>
-            <pc:sldMk cId="1077421182" sldId="256"/>
-            <ac:picMk id="27" creationId="{8263E62F-3620-920B-E91F-F4C795DA1614}"/>
-          </ac:picMkLst>
-        </pc:picChg>
-        <pc:picChg chg="del">
-          <ac:chgData name="Fatima Pillosu" userId="a6295d4dc9e22643" providerId="LiveId" clId="{9EBBFA1C-5226-4AE6-954C-C02393E29BD8}" dt="2025-07-05T00:09:10.720" v="34" actId="478"/>
-          <ac:picMkLst>
-            <pc:docMk/>
-            <pc:sldMk cId="1077421182" sldId="256"/>
-            <ac:picMk id="28" creationId="{A5423CC3-A545-27EA-CA29-2FCA2505715D}"/>
-          </ac:picMkLst>
-        </pc:picChg>
-        <pc:picChg chg="add del mod ord topLvl modCrop">
-          <ac:chgData name="Fatima Pillosu" userId="a6295d4dc9e22643" providerId="LiveId" clId="{9EBBFA1C-5226-4AE6-954C-C02393E29BD8}" dt="2025-07-08T11:26:53.185" v="1776" actId="21"/>
-          <ac:picMkLst>
-            <pc:docMk/>
-            <pc:sldMk cId="1077421182" sldId="256"/>
-            <ac:picMk id="29" creationId="{61F458EB-8241-BB7B-F508-0038D2F3FB46}"/>
-          </ac:picMkLst>
-        </pc:picChg>
-        <pc:picChg chg="add del mod ord topLvl modCrop">
-          <ac:chgData name="Fatima Pillosu" userId="a6295d4dc9e22643" providerId="LiveId" clId="{9EBBFA1C-5226-4AE6-954C-C02393E29BD8}" dt="2025-07-08T11:26:53.185" v="1776" actId="21"/>
-          <ac:picMkLst>
-            <pc:docMk/>
-            <pc:sldMk cId="1077421182" sldId="256"/>
-            <ac:picMk id="30" creationId="{B1760ABD-9E87-189C-EDCB-2E309468CC25}"/>
-          </ac:picMkLst>
-        </pc:picChg>
-        <pc:picChg chg="add del mod ord topLvl modCrop">
-          <ac:chgData name="Fatima Pillosu" userId="a6295d4dc9e22643" providerId="LiveId" clId="{9EBBFA1C-5226-4AE6-954C-C02393E29BD8}" dt="2025-07-08T11:26:53.185" v="1776" actId="21"/>
-          <ac:picMkLst>
-            <pc:docMk/>
-            <pc:sldMk cId="1077421182" sldId="256"/>
-            <ac:picMk id="31" creationId="{EE35B710-4E64-50C8-A8AA-14ABD233A5A8}"/>
-          </ac:picMkLst>
-        </pc:picChg>
-        <pc:picChg chg="add del mod ord topLvl modCrop">
-          <ac:chgData name="Fatima Pillosu" userId="a6295d4dc9e22643" providerId="LiveId" clId="{9EBBFA1C-5226-4AE6-954C-C02393E29BD8}" dt="2025-07-08T11:26:53.185" v="1776" actId="21"/>
-          <ac:picMkLst>
-            <pc:docMk/>
-            <pc:sldMk cId="1077421182" sldId="256"/>
-            <ac:picMk id="32" creationId="{552DE0A6-ACDE-EA18-BFDA-430051B44480}"/>
-          </ac:picMkLst>
-        </pc:picChg>
-        <pc:picChg chg="add del mod">
-          <ac:chgData name="Fatima Pillosu" userId="a6295d4dc9e22643" providerId="LiveId" clId="{9EBBFA1C-5226-4AE6-954C-C02393E29BD8}" dt="2025-07-08T10:09:30.712" v="627" actId="478"/>
-          <ac:picMkLst>
-            <pc:docMk/>
-            <pc:sldMk cId="1077421182" sldId="256"/>
-            <ac:picMk id="33" creationId="{A55259CB-9C46-F45E-AF8F-B53CFF42E8C8}"/>
-          </ac:picMkLst>
-        </pc:picChg>
-        <pc:picChg chg="add del mod">
-          <ac:chgData name="Fatima Pillosu" userId="a6295d4dc9e22643" providerId="LiveId" clId="{9EBBFA1C-5226-4AE6-954C-C02393E29BD8}" dt="2025-07-08T10:09:30.225" v="626" actId="478"/>
-          <ac:picMkLst>
-            <pc:docMk/>
-            <pc:sldMk cId="1077421182" sldId="256"/>
-            <ac:picMk id="34" creationId="{F67C7C98-9D9F-9376-A6F3-07530AFD16B1}"/>
-          </ac:picMkLst>
-        </pc:picChg>
-        <pc:picChg chg="add del mod">
-          <ac:chgData name="Fatima Pillosu" userId="a6295d4dc9e22643" providerId="LiveId" clId="{9EBBFA1C-5226-4AE6-954C-C02393E29BD8}" dt="2025-07-08T10:18:47.049" v="936" actId="478"/>
-          <ac:picMkLst>
-            <pc:docMk/>
-            <pc:sldMk cId="1077421182" sldId="256"/>
-            <ac:picMk id="43" creationId="{A8893E54-B2B3-1A89-62DE-8F6B1F0BF651}"/>
-          </ac:picMkLst>
-        </pc:picChg>
-        <pc:picChg chg="add del mod">
-          <ac:chgData name="Fatima Pillosu" userId="a6295d4dc9e22643" providerId="LiveId" clId="{9EBBFA1C-5226-4AE6-954C-C02393E29BD8}" dt="2025-07-05T00:27:08.404" v="488" actId="21"/>
-          <ac:picMkLst>
-            <pc:docMk/>
-            <pc:sldMk cId="1077421182" sldId="256"/>
-            <ac:picMk id="46" creationId="{1503F912-785F-B2D8-A49C-6C51F462E17B}"/>
-          </ac:picMkLst>
-        </pc:picChg>
-        <pc:picChg chg="add del mod">
-          <ac:chgData name="Fatima Pillosu" userId="a6295d4dc9e22643" providerId="LiveId" clId="{9EBBFA1C-5226-4AE6-954C-C02393E29BD8}" dt="2025-07-05T00:27:08.404" v="488" actId="21"/>
-          <ac:picMkLst>
-            <pc:docMk/>
-            <pc:sldMk cId="1077421182" sldId="256"/>
-            <ac:picMk id="47" creationId="{6EF8228A-E7B4-CF64-DFD2-5EDE376B058B}"/>
-          </ac:picMkLst>
-        </pc:picChg>
-        <pc:picChg chg="add del mod">
-          <ac:chgData name="Fatima Pillosu" userId="a6295d4dc9e22643" providerId="LiveId" clId="{9EBBFA1C-5226-4AE6-954C-C02393E29BD8}" dt="2025-07-05T00:27:08.404" v="488" actId="21"/>
-          <ac:picMkLst>
-            <pc:docMk/>
-            <pc:sldMk cId="1077421182" sldId="256"/>
-            <ac:picMk id="49" creationId="{AA7AA62B-B976-F756-C9AC-2085514C251B}"/>
-          </ac:picMkLst>
-        </pc:picChg>
-        <pc:picChg chg="add del mod">
-          <ac:chgData name="Fatima Pillosu" userId="a6295d4dc9e22643" providerId="LiveId" clId="{9EBBFA1C-5226-4AE6-954C-C02393E29BD8}" dt="2025-07-08T10:20:37.601" v="989" actId="478"/>
-          <ac:picMkLst>
-            <pc:docMk/>
-            <pc:sldMk cId="1077421182" sldId="256"/>
-            <ac:picMk id="50" creationId="{0F20CD09-7578-E48D-2C87-86599F0C199C}"/>
-          </ac:picMkLst>
-        </pc:picChg>
-        <pc:picChg chg="add del mod">
-          <ac:chgData name="Fatima Pillosu" userId="a6295d4dc9e22643" providerId="LiveId" clId="{9EBBFA1C-5226-4AE6-954C-C02393E29BD8}" dt="2025-07-05T00:27:08.404" v="488" actId="21"/>
-          <ac:picMkLst>
-            <pc:docMk/>
-            <pc:sldMk cId="1077421182" sldId="256"/>
-            <ac:picMk id="50" creationId="{910D4C3B-14A9-6DCF-410B-F00EE2DCB6F0}"/>
-          </ac:picMkLst>
-        </pc:picChg>
-        <pc:picChg chg="add del mod">
-          <ac:chgData name="Fatima Pillosu" userId="a6295d4dc9e22643" providerId="LiveId" clId="{9EBBFA1C-5226-4AE6-954C-C02393E29BD8}" dt="2025-07-08T10:20:38.147" v="990" actId="478"/>
-          <ac:picMkLst>
-            <pc:docMk/>
-            <pc:sldMk cId="1077421182" sldId="256"/>
-            <ac:picMk id="51" creationId="{9F8E6E49-BB53-F167-A530-E19DC18829EA}"/>
-          </ac:picMkLst>
-        </pc:picChg>
-        <pc:picChg chg="add del mod">
-          <ac:chgData name="Fatima Pillosu" userId="a6295d4dc9e22643" providerId="LiveId" clId="{9EBBFA1C-5226-4AE6-954C-C02393E29BD8}" dt="2025-07-08T11:22:14.898" v="1634" actId="478"/>
-          <ac:picMkLst>
-            <pc:docMk/>
-            <pc:sldMk cId="1077421182" sldId="256"/>
-            <ac:picMk id="70" creationId="{1AE21D96-A12D-362C-19DA-B8306F8DD3B9}"/>
-          </ac:picMkLst>
-        </pc:picChg>
-        <pc:picChg chg="add del mod">
-          <ac:chgData name="Fatima Pillosu" userId="a6295d4dc9e22643" providerId="LiveId" clId="{9EBBFA1C-5226-4AE6-954C-C02393E29BD8}" dt="2025-07-05T00:27:22.331" v="490" actId="21"/>
-          <ac:picMkLst>
-            <pc:docMk/>
-            <pc:sldMk cId="1077421182" sldId="256"/>
-            <ac:picMk id="71" creationId="{1503F912-785F-B2D8-A49C-6C51F462E17B}"/>
-          </ac:picMkLst>
-        </pc:picChg>
-        <pc:picChg chg="add del mod">
-          <ac:chgData name="Fatima Pillosu" userId="a6295d4dc9e22643" providerId="LiveId" clId="{9EBBFA1C-5226-4AE6-954C-C02393E29BD8}" dt="2025-07-08T11:22:15.349" v="1635" actId="478"/>
-          <ac:picMkLst>
-            <pc:docMk/>
-            <pc:sldMk cId="1077421182" sldId="256"/>
-            <ac:picMk id="71" creationId="{36CB3AE6-75F7-F088-E118-E63E8FE4273C}"/>
-          </ac:picMkLst>
-        </pc:picChg>
-        <pc:picChg chg="add del mod">
-          <ac:chgData name="Fatima Pillosu" userId="a6295d4dc9e22643" providerId="LiveId" clId="{9EBBFA1C-5226-4AE6-954C-C02393E29BD8}" dt="2025-07-05T00:27:22.331" v="490" actId="21"/>
-          <ac:picMkLst>
-            <pc:docMk/>
-            <pc:sldMk cId="1077421182" sldId="256"/>
-            <ac:picMk id="72" creationId="{6EF8228A-E7B4-CF64-DFD2-5EDE376B058B}"/>
-          </ac:picMkLst>
-        </pc:picChg>
-        <pc:picChg chg="add del mod">
-          <ac:chgData name="Fatima Pillosu" userId="a6295d4dc9e22643" providerId="LiveId" clId="{9EBBFA1C-5226-4AE6-954C-C02393E29BD8}" dt="2025-07-08T11:22:15.841" v="1636" actId="478"/>
-          <ac:picMkLst>
-            <pc:docMk/>
-            <pc:sldMk cId="1077421182" sldId="256"/>
-            <ac:picMk id="72" creationId="{771A3A47-16B6-1F25-0AFE-E52CD234DDAD}"/>
-          </ac:picMkLst>
-        </pc:picChg>
-        <pc:picChg chg="add del mod">
-          <ac:chgData name="Fatima Pillosu" userId="a6295d4dc9e22643" providerId="LiveId" clId="{9EBBFA1C-5226-4AE6-954C-C02393E29BD8}" dt="2025-07-08T11:22:16.240" v="1637" actId="478"/>
-          <ac:picMkLst>
-            <pc:docMk/>
-            <pc:sldMk cId="1077421182" sldId="256"/>
-            <ac:picMk id="73" creationId="{7678F921-FAD1-37E6-3DB3-81A3D90A9BAA}"/>
-          </ac:picMkLst>
-        </pc:picChg>
-        <pc:picChg chg="add del mod">
-          <ac:chgData name="Fatima Pillosu" userId="a6295d4dc9e22643" providerId="LiveId" clId="{9EBBFA1C-5226-4AE6-954C-C02393E29BD8}" dt="2025-07-08T11:13:59.955" v="1437" actId="478"/>
-          <ac:picMkLst>
-            <pc:docMk/>
-            <pc:sldMk cId="1077421182" sldId="256"/>
-            <ac:picMk id="74" creationId="{2CF3E09C-0DD9-1A68-6EF3-64F130F806F7}"/>
-          </ac:picMkLst>
-        </pc:picChg>
-        <pc:picChg chg="add del mod">
-          <ac:chgData name="Fatima Pillosu" userId="a6295d4dc9e22643" providerId="LiveId" clId="{9EBBFA1C-5226-4AE6-954C-C02393E29BD8}" dt="2025-07-05T00:27:22.331" v="490" actId="21"/>
-          <ac:picMkLst>
-            <pc:docMk/>
-            <pc:sldMk cId="1077421182" sldId="256"/>
-            <ac:picMk id="74" creationId="{AA7AA62B-B976-F756-C9AC-2085514C251B}"/>
-          </ac:picMkLst>
-        </pc:picChg>
-        <pc:picChg chg="add del mod">
-          <ac:chgData name="Fatima Pillosu" userId="a6295d4dc9e22643" providerId="LiveId" clId="{9EBBFA1C-5226-4AE6-954C-C02393E29BD8}" dt="2025-07-08T11:13:59.955" v="1437" actId="478"/>
-          <ac:picMkLst>
-            <pc:docMk/>
-            <pc:sldMk cId="1077421182" sldId="256"/>
-            <ac:picMk id="75" creationId="{386D1A26-960E-EF7F-13CE-AECE401D12F3}"/>
-          </ac:picMkLst>
-        </pc:picChg>
-        <pc:picChg chg="add del mod">
-          <ac:chgData name="Fatima Pillosu" userId="a6295d4dc9e22643" providerId="LiveId" clId="{9EBBFA1C-5226-4AE6-954C-C02393E29BD8}" dt="2025-07-05T00:27:22.331" v="490" actId="21"/>
-          <ac:picMkLst>
-            <pc:docMk/>
-            <pc:sldMk cId="1077421182" sldId="256"/>
-            <ac:picMk id="75" creationId="{910D4C3B-14A9-6DCF-410B-F00EE2DCB6F0}"/>
-          </ac:picMkLst>
-        </pc:picChg>
-        <pc:picChg chg="add del mod">
-          <ac:chgData name="Fatima Pillosu" userId="a6295d4dc9e22643" providerId="LiveId" clId="{9EBBFA1C-5226-4AE6-954C-C02393E29BD8}" dt="2025-07-08T11:13:59.955" v="1437" actId="478"/>
-          <ac:picMkLst>
-            <pc:docMk/>
-            <pc:sldMk cId="1077421182" sldId="256"/>
-            <ac:picMk id="76" creationId="{5B9F8AAF-9BA5-793A-3FC6-55DEB9A9FEB4}"/>
-          </ac:picMkLst>
-        </pc:picChg>
-        <pc:picChg chg="add del mod">
-          <ac:chgData name="Fatima Pillosu" userId="a6295d4dc9e22643" providerId="LiveId" clId="{9EBBFA1C-5226-4AE6-954C-C02393E29BD8}" dt="2025-07-08T11:13:59.955" v="1437" actId="478"/>
-          <ac:picMkLst>
-            <pc:docMk/>
-            <pc:sldMk cId="1077421182" sldId="256"/>
-            <ac:picMk id="77" creationId="{5155E0FD-11AA-33F9-6F5A-3258231B328C}"/>
-          </ac:picMkLst>
-        </pc:picChg>
-        <pc:picChg chg="add del mod">
-          <ac:chgData name="Fatima Pillosu" userId="a6295d4dc9e22643" providerId="LiveId" clId="{9EBBFA1C-5226-4AE6-954C-C02393E29BD8}" dt="2025-07-05T00:28:19.050" v="497" actId="21"/>
-          <ac:picMkLst>
-            <pc:docMk/>
-            <pc:sldMk cId="1077421182" sldId="256"/>
-            <ac:picMk id="96" creationId="{1503F912-785F-B2D8-A49C-6C51F462E17B}"/>
-          </ac:picMkLst>
-        </pc:picChg>
-        <pc:picChg chg="add del mod">
-          <ac:chgData name="Fatima Pillosu" userId="a6295d4dc9e22643" providerId="LiveId" clId="{9EBBFA1C-5226-4AE6-954C-C02393E29BD8}" dt="2025-07-05T00:28:19.050" v="497" actId="21"/>
-          <ac:picMkLst>
-            <pc:docMk/>
-            <pc:sldMk cId="1077421182" sldId="256"/>
-            <ac:picMk id="97" creationId="{6EF8228A-E7B4-CF64-DFD2-5EDE376B058B}"/>
-          </ac:picMkLst>
-        </pc:picChg>
-        <pc:picChg chg="add del mod">
-          <ac:chgData name="Fatima Pillosu" userId="a6295d4dc9e22643" providerId="LiveId" clId="{9EBBFA1C-5226-4AE6-954C-C02393E29BD8}" dt="2025-07-05T00:28:19.050" v="497" actId="21"/>
-          <ac:picMkLst>
-            <pc:docMk/>
-            <pc:sldMk cId="1077421182" sldId="256"/>
-            <ac:picMk id="99" creationId="{AA7AA62B-B976-F756-C9AC-2085514C251B}"/>
-          </ac:picMkLst>
-        </pc:picChg>
-        <pc:picChg chg="add del mod">
-          <ac:chgData name="Fatima Pillosu" userId="a6295d4dc9e22643" providerId="LiveId" clId="{9EBBFA1C-5226-4AE6-954C-C02393E29BD8}" dt="2025-07-05T00:28:19.050" v="497" actId="21"/>
-          <ac:picMkLst>
-            <pc:docMk/>
-            <pc:sldMk cId="1077421182" sldId="256"/>
-            <ac:picMk id="100" creationId="{910D4C3B-14A9-6DCF-410B-F00EE2DCB6F0}"/>
-          </ac:picMkLst>
-        </pc:picChg>
-        <pc:picChg chg="add del mod">
-          <ac:chgData name="Fatima Pillosu" userId="a6295d4dc9e22643" providerId="LiveId" clId="{9EBBFA1C-5226-4AE6-954C-C02393E29BD8}" dt="2025-07-08T10:36:24.655" v="1429" actId="478"/>
-          <ac:picMkLst>
-            <pc:docMk/>
-            <pc:sldMk cId="1077421182" sldId="256"/>
-            <ac:picMk id="105" creationId="{78ACBD52-6F36-2347-9F34-662136BA5F92}"/>
-          </ac:picMkLst>
-        </pc:picChg>
-        <pc:picChg chg="add del mod">
-          <ac:chgData name="Fatima Pillosu" userId="a6295d4dc9e22643" providerId="LiveId" clId="{9EBBFA1C-5226-4AE6-954C-C02393E29BD8}" dt="2025-07-08T10:36:46.075" v="1433" actId="478"/>
-          <ac:picMkLst>
-            <pc:docMk/>
-            <pc:sldMk cId="1077421182" sldId="256"/>
-            <ac:picMk id="114" creationId="{8ACED81D-A2B0-F0ED-63C9-8B9EA0FDF98A}"/>
-          </ac:picMkLst>
-        </pc:picChg>
-        <pc:picChg chg="add del mod">
-          <ac:chgData name="Fatima Pillosu" userId="a6295d4dc9e22643" providerId="LiveId" clId="{9EBBFA1C-5226-4AE6-954C-C02393E29BD8}" dt="2025-07-08T10:04:07.926" v="557" actId="478"/>
-          <ac:picMkLst>
-            <pc:docMk/>
-            <pc:sldMk cId="1077421182" sldId="256"/>
-            <ac:picMk id="121" creationId="{1503F912-785F-B2D8-A49C-6C51F462E17B}"/>
-          </ac:picMkLst>
-        </pc:picChg>
-        <pc:picChg chg="add del mod">
-          <ac:chgData name="Fatima Pillosu" userId="a6295d4dc9e22643" providerId="LiveId" clId="{9EBBFA1C-5226-4AE6-954C-C02393E29BD8}" dt="2025-07-08T10:04:08.438" v="558" actId="478"/>
-          <ac:picMkLst>
-            <pc:docMk/>
-            <pc:sldMk cId="1077421182" sldId="256"/>
-            <ac:picMk id="122" creationId="{6EF8228A-E7B4-CF64-DFD2-5EDE376B058B}"/>
-          </ac:picMkLst>
-        </pc:picChg>
-        <pc:picChg chg="add del mod">
-          <ac:chgData name="Fatima Pillosu" userId="a6295d4dc9e22643" providerId="LiveId" clId="{9EBBFA1C-5226-4AE6-954C-C02393E29BD8}" dt="2025-07-08T10:04:07.419" v="556" actId="478"/>
-          <ac:picMkLst>
-            <pc:docMk/>
-            <pc:sldMk cId="1077421182" sldId="256"/>
-            <ac:picMk id="124" creationId="{AA7AA62B-B976-F756-C9AC-2085514C251B}"/>
-          </ac:picMkLst>
-        </pc:picChg>
-        <pc:picChg chg="add del mod">
-          <ac:chgData name="Fatima Pillosu" userId="a6295d4dc9e22643" providerId="LiveId" clId="{9EBBFA1C-5226-4AE6-954C-C02393E29BD8}" dt="2025-07-08T10:04:15.370" v="561" actId="478"/>
-          <ac:picMkLst>
-            <pc:docMk/>
-            <pc:sldMk cId="1077421182" sldId="256"/>
-            <ac:picMk id="125" creationId="{910D4C3B-14A9-6DCF-410B-F00EE2DCB6F0}"/>
-          </ac:picMkLst>
-        </pc:picChg>
-        <pc:picChg chg="add del mod">
-          <ac:chgData name="Fatima Pillosu" userId="a6295d4dc9e22643" providerId="LiveId" clId="{9EBBFA1C-5226-4AE6-954C-C02393E29BD8}" dt="2025-07-08T10:37:03.447" v="1436" actId="478"/>
-          <ac:picMkLst>
-            <pc:docMk/>
-            <pc:sldMk cId="1077421182" sldId="256"/>
-            <ac:picMk id="148" creationId="{3BDD2816-E0DB-F88E-13CE-0D67D130839E}"/>
-          </ac:picMkLst>
-        </pc:picChg>
-        <pc:picChg chg="add del mod">
-          <ac:chgData name="Fatima Pillosu" userId="a6295d4dc9e22643" providerId="LiveId" clId="{9EBBFA1C-5226-4AE6-954C-C02393E29BD8}" dt="2025-07-08T11:26:53.185" v="1776" actId="21"/>
-          <ac:picMkLst>
-            <pc:docMk/>
-            <pc:sldMk cId="1077421182" sldId="256"/>
-            <ac:picMk id="157" creationId="{CC6B6E7D-52A0-8818-D813-FE3AE4BF160A}"/>
-          </ac:picMkLst>
-        </pc:picChg>
-        <pc:picChg chg="add del mod">
-          <ac:chgData name="Fatima Pillosu" userId="a6295d4dc9e22643" providerId="LiveId" clId="{9EBBFA1C-5226-4AE6-954C-C02393E29BD8}" dt="2025-07-08T11:26:53.185" v="1776" actId="21"/>
-          <ac:picMkLst>
-            <pc:docMk/>
-            <pc:sldMk cId="1077421182" sldId="256"/>
-            <ac:picMk id="158" creationId="{925CAC98-EFEB-5F74-2738-FAE64508CB01}"/>
-          </ac:picMkLst>
-        </pc:picChg>
-        <pc:picChg chg="add del mod">
-          <ac:chgData name="Fatima Pillosu" userId="a6295d4dc9e22643" providerId="LiveId" clId="{9EBBFA1C-5226-4AE6-954C-C02393E29BD8}" dt="2025-07-08T11:26:53.185" v="1776" actId="21"/>
-          <ac:picMkLst>
-            <pc:docMk/>
-            <pc:sldMk cId="1077421182" sldId="256"/>
-            <ac:picMk id="159" creationId="{41E76222-24D5-E634-1E95-5E370EC6E701}"/>
-          </ac:picMkLst>
-        </pc:picChg>
-        <pc:picChg chg="add del mod">
-          <ac:chgData name="Fatima Pillosu" userId="a6295d4dc9e22643" providerId="LiveId" clId="{9EBBFA1C-5226-4AE6-954C-C02393E29BD8}" dt="2025-07-08T11:26:53.185" v="1776" actId="21"/>
-          <ac:picMkLst>
-            <pc:docMk/>
-            <pc:sldMk cId="1077421182" sldId="256"/>
-            <ac:picMk id="160" creationId="{B188B0C3-2824-0B8E-3A52-915231421F9A}"/>
-          </ac:picMkLst>
-        </pc:picChg>
-        <pc:picChg chg="add del mod">
-          <ac:chgData name="Fatima Pillosu" userId="a6295d4dc9e22643" providerId="LiveId" clId="{9EBBFA1C-5226-4AE6-954C-C02393E29BD8}" dt="2025-07-08T11:21:27.070" v="1626" actId="478"/>
-          <ac:picMkLst>
-            <pc:docMk/>
-            <pc:sldMk cId="1077421182" sldId="256"/>
-            <ac:picMk id="170" creationId="{8E770403-7D97-6592-4531-B435D6024739}"/>
-          </ac:picMkLst>
-        </pc:picChg>
-        <pc:picChg chg="add del mod">
-          <ac:chgData name="Fatima Pillosu" userId="a6295d4dc9e22643" providerId="LiveId" clId="{9EBBFA1C-5226-4AE6-954C-C02393E29BD8}" dt="2025-07-08T11:21:35.565" v="1629" actId="478"/>
-          <ac:picMkLst>
-            <pc:docMk/>
-            <pc:sldMk cId="1077421182" sldId="256"/>
-            <ac:picMk id="180" creationId="{E9E40BFC-0DF8-93C9-3767-13E8AA9D26E7}"/>
-          </ac:picMkLst>
-        </pc:picChg>
-        <pc:picChg chg="add del mod">
-          <ac:chgData name="Fatima Pillosu" userId="a6295d4dc9e22643" providerId="LiveId" clId="{9EBBFA1C-5226-4AE6-954C-C02393E29BD8}" dt="2025-07-08T11:21:44.057" v="1632" actId="478"/>
-          <ac:picMkLst>
-            <pc:docMk/>
-            <pc:sldMk cId="1077421182" sldId="256"/>
-            <ac:picMk id="190" creationId="{8469B452-3FA3-E03F-3292-0F59671CA7A1}"/>
-          </ac:picMkLst>
-        </pc:picChg>
-        <pc:picChg chg="add del mod">
-          <ac:chgData name="Fatima Pillosu" userId="a6295d4dc9e22643" providerId="LiveId" clId="{9EBBFA1C-5226-4AE6-954C-C02393E29BD8}" dt="2025-07-08T11:26:53.185" v="1776" actId="21"/>
-          <ac:picMkLst>
-            <pc:docMk/>
-            <pc:sldMk cId="1077421182" sldId="256"/>
-            <ac:picMk id="200" creationId="{70AB5CB0-F46A-6FDA-FAEA-321287F426C4}"/>
-          </ac:picMkLst>
-        </pc:picChg>
-        <pc:picChg chg="add del mod">
-          <ac:chgData name="Fatima Pillosu" userId="a6295d4dc9e22643" providerId="LiveId" clId="{9EBBFA1C-5226-4AE6-954C-C02393E29BD8}" dt="2025-07-08T11:26:53.185" v="1776" actId="21"/>
-          <ac:picMkLst>
-            <pc:docMk/>
-            <pc:sldMk cId="1077421182" sldId="256"/>
-            <ac:picMk id="201" creationId="{CDCD772A-C09B-53B6-7BC5-0B26529674D4}"/>
-          </ac:picMkLst>
-        </pc:picChg>
-        <pc:picChg chg="add del mod">
-          <ac:chgData name="Fatima Pillosu" userId="a6295d4dc9e22643" providerId="LiveId" clId="{9EBBFA1C-5226-4AE6-954C-C02393E29BD8}" dt="2025-07-08T11:26:53.185" v="1776" actId="21"/>
-          <ac:picMkLst>
-            <pc:docMk/>
-            <pc:sldMk cId="1077421182" sldId="256"/>
-            <ac:picMk id="202" creationId="{1F5D6664-7DE7-453C-A207-19B0CE0E84D4}"/>
-          </ac:picMkLst>
-        </pc:picChg>
-        <pc:picChg chg="add del mod">
-          <ac:chgData name="Fatima Pillosu" userId="a6295d4dc9e22643" providerId="LiveId" clId="{9EBBFA1C-5226-4AE6-954C-C02393E29BD8}" dt="2025-07-08T11:26:53.185" v="1776" actId="21"/>
-          <ac:picMkLst>
-            <pc:docMk/>
-            <pc:sldMk cId="1077421182" sldId="256"/>
-            <ac:picMk id="203" creationId="{C1166BFA-FB85-F47B-CDF1-B97A0CAE5363}"/>
-          </ac:picMkLst>
-        </pc:picChg>
-        <pc:picChg chg="add mod">
-          <ac:chgData name="Fatima Pillosu" userId="a6295d4dc9e22643" providerId="LiveId" clId="{9EBBFA1C-5226-4AE6-954C-C02393E29BD8}" dt="2025-07-08T11:27:01.417" v="1777"/>
-          <ac:picMkLst>
-            <pc:docMk/>
-            <pc:sldMk cId="1077421182" sldId="256"/>
-            <ac:picMk id="205" creationId="{61F458EB-8241-BB7B-F508-0038D2F3FB46}"/>
-          </ac:picMkLst>
-        </pc:picChg>
-        <pc:picChg chg="add mod">
-          <ac:chgData name="Fatima Pillosu" userId="a6295d4dc9e22643" providerId="LiveId" clId="{9EBBFA1C-5226-4AE6-954C-C02393E29BD8}" dt="2025-07-08T11:27:01.417" v="1777"/>
-          <ac:picMkLst>
-            <pc:docMk/>
-            <pc:sldMk cId="1077421182" sldId="256"/>
-            <ac:picMk id="206" creationId="{B1760ABD-9E87-189C-EDCB-2E309468CC25}"/>
-          </ac:picMkLst>
-        </pc:picChg>
-        <pc:picChg chg="add mod">
-          <ac:chgData name="Fatima Pillosu" userId="a6295d4dc9e22643" providerId="LiveId" clId="{9EBBFA1C-5226-4AE6-954C-C02393E29BD8}" dt="2025-07-08T11:27:01.417" v="1777"/>
-          <ac:picMkLst>
-            <pc:docMk/>
-            <pc:sldMk cId="1077421182" sldId="256"/>
-            <ac:picMk id="207" creationId="{EE35B710-4E64-50C8-A8AA-14ABD233A5A8}"/>
-          </ac:picMkLst>
-        </pc:picChg>
-        <pc:picChg chg="add mod">
-          <ac:chgData name="Fatima Pillosu" userId="a6295d4dc9e22643" providerId="LiveId" clId="{9EBBFA1C-5226-4AE6-954C-C02393E29BD8}" dt="2025-07-08T11:27:01.417" v="1777"/>
-          <ac:picMkLst>
-            <pc:docMk/>
-            <pc:sldMk cId="1077421182" sldId="256"/>
-            <ac:picMk id="208" creationId="{552DE0A6-ACDE-EA18-BFDA-430051B44480}"/>
-          </ac:picMkLst>
-        </pc:picChg>
-        <pc:picChg chg="add mod">
-          <ac:chgData name="Fatima Pillosu" userId="a6295d4dc9e22643" providerId="LiveId" clId="{9EBBFA1C-5226-4AE6-954C-C02393E29BD8}" dt="2025-07-08T11:27:01.417" v="1777"/>
-          <ac:picMkLst>
-            <pc:docMk/>
-            <pc:sldMk cId="1077421182" sldId="256"/>
-            <ac:picMk id="294" creationId="{CC6B6E7D-52A0-8818-D813-FE3AE4BF160A}"/>
-          </ac:picMkLst>
-        </pc:picChg>
-        <pc:picChg chg="add mod">
-          <ac:chgData name="Fatima Pillosu" userId="a6295d4dc9e22643" providerId="LiveId" clId="{9EBBFA1C-5226-4AE6-954C-C02393E29BD8}" dt="2025-07-08T11:27:01.417" v="1777"/>
-          <ac:picMkLst>
-            <pc:docMk/>
-            <pc:sldMk cId="1077421182" sldId="256"/>
-            <ac:picMk id="295" creationId="{925CAC98-EFEB-5F74-2738-FAE64508CB01}"/>
-          </ac:picMkLst>
-        </pc:picChg>
-        <pc:picChg chg="add mod">
-          <ac:chgData name="Fatima Pillosu" userId="a6295d4dc9e22643" providerId="LiveId" clId="{9EBBFA1C-5226-4AE6-954C-C02393E29BD8}" dt="2025-07-08T11:27:01.417" v="1777"/>
-          <ac:picMkLst>
-            <pc:docMk/>
-            <pc:sldMk cId="1077421182" sldId="256"/>
-            <ac:picMk id="296" creationId="{41E76222-24D5-E634-1E95-5E370EC6E701}"/>
-          </ac:picMkLst>
-        </pc:picChg>
-        <pc:picChg chg="add mod">
-          <ac:chgData name="Fatima Pillosu" userId="a6295d4dc9e22643" providerId="LiveId" clId="{9EBBFA1C-5226-4AE6-954C-C02393E29BD8}" dt="2025-07-08T11:27:01.417" v="1777"/>
-          <ac:picMkLst>
-            <pc:docMk/>
-            <pc:sldMk cId="1077421182" sldId="256"/>
-            <ac:picMk id="297" creationId="{B188B0C3-2824-0B8E-3A52-915231421F9A}"/>
-          </ac:picMkLst>
-        </pc:picChg>
-        <pc:picChg chg="add mod">
-          <ac:chgData name="Fatima Pillosu" userId="a6295d4dc9e22643" providerId="LiveId" clId="{9EBBFA1C-5226-4AE6-954C-C02393E29BD8}" dt="2025-07-08T11:27:01.417" v="1777"/>
-          <ac:picMkLst>
-            <pc:docMk/>
-            <pc:sldMk cId="1077421182" sldId="256"/>
-            <ac:picMk id="334" creationId="{70AB5CB0-F46A-6FDA-FAEA-321287F426C4}"/>
-          </ac:picMkLst>
-        </pc:picChg>
-        <pc:picChg chg="add mod">
-          <ac:chgData name="Fatima Pillosu" userId="a6295d4dc9e22643" providerId="LiveId" clId="{9EBBFA1C-5226-4AE6-954C-C02393E29BD8}" dt="2025-07-08T11:27:01.417" v="1777"/>
-          <ac:picMkLst>
-            <pc:docMk/>
-            <pc:sldMk cId="1077421182" sldId="256"/>
-            <ac:picMk id="335" creationId="{CDCD772A-C09B-53B6-7BC5-0B26529674D4}"/>
-          </ac:picMkLst>
-        </pc:picChg>
-        <pc:picChg chg="add mod">
-          <ac:chgData name="Fatima Pillosu" userId="a6295d4dc9e22643" providerId="LiveId" clId="{9EBBFA1C-5226-4AE6-954C-C02393E29BD8}" dt="2025-07-08T11:27:01.417" v="1777"/>
-          <ac:picMkLst>
-            <pc:docMk/>
-            <pc:sldMk cId="1077421182" sldId="256"/>
-            <ac:picMk id="336" creationId="{1F5D6664-7DE7-453C-A207-19B0CE0E84D4}"/>
-          </ac:picMkLst>
-        </pc:picChg>
-        <pc:picChg chg="add mod">
-          <ac:chgData name="Fatima Pillosu" userId="a6295d4dc9e22643" providerId="LiveId" clId="{9EBBFA1C-5226-4AE6-954C-C02393E29BD8}" dt="2025-07-08T11:27:01.417" v="1777"/>
-          <ac:picMkLst>
-            <pc:docMk/>
-            <pc:sldMk cId="1077421182" sldId="256"/>
-            <ac:picMk id="337" creationId="{C1166BFA-FB85-F47B-CDF1-B97A0CAE5363}"/>
-          </ac:picMkLst>
-        </pc:picChg>
-        <pc:cxnChg chg="del">
-          <ac:chgData name="Fatima Pillosu" userId="a6295d4dc9e22643" providerId="LiveId" clId="{9EBBFA1C-5226-4AE6-954C-C02393E29BD8}" dt="2025-07-05T00:09:06.328" v="31" actId="478"/>
+        <pc:cxnChg chg="add mod">
+          <ac:chgData name="Fatima Pillosu" userId="a6295d4dc9e22643" providerId="LiveId" clId="{87453732-75AC-4426-B5D3-B7C69C2D4F54}" dt="2026-01-15T15:11:57.697" v="18" actId="1582"/>
           <ac:cxnSpMkLst>
             <pc:docMk/>
             <pc:sldMk cId="1077421182" sldId="256"/>
-            <ac:cxnSpMk id="40" creationId="{1B0ED484-5AE6-7483-5A00-30E83FFCB513}"/>
+            <ac:cxnSpMk id="17" creationId="{CC9A6D3A-471B-B14B-87B6-D81E209C7208}"/>
           </ac:cxnSpMkLst>
         </pc:cxnChg>
-        <pc:cxnChg chg="del">
-          <ac:chgData name="Fatima Pillosu" userId="a6295d4dc9e22643" providerId="LiveId" clId="{9EBBFA1C-5226-4AE6-954C-C02393E29BD8}" dt="2025-07-05T00:09:06.328" v="31" actId="478"/>
-          <ac:cxnSpMkLst>
-            <pc:docMk/>
-            <pc:sldMk cId="1077421182" sldId="256"/>
-            <ac:cxnSpMk id="41" creationId="{EC9F1E64-F616-B34C-EE8A-8C4F34301F3C}"/>
-          </ac:cxnSpMkLst>
-        </pc:cxnChg>
-        <pc:cxnChg chg="del">
-          <ac:chgData name="Fatima Pillosu" userId="a6295d4dc9e22643" providerId="LiveId" clId="{9EBBFA1C-5226-4AE6-954C-C02393E29BD8}" dt="2025-07-05T00:09:06.328" v="31" actId="478"/>
-          <ac:cxnSpMkLst>
-            <pc:docMk/>
-            <pc:sldMk cId="1077421182" sldId="256"/>
-            <ac:cxnSpMk id="42" creationId="{851394A0-0089-69D5-A0FA-C1C27FBBFB5D}"/>
-          </ac:cxnSpMkLst>
-        </pc:cxnChg>
-      </pc:sldChg>
-      <pc:sldChg chg="addSp delSp modSp new del mod">
-        <pc:chgData name="Fatima Pillosu" userId="a6295d4dc9e22643" providerId="LiveId" clId="{9EBBFA1C-5226-4AE6-954C-C02393E29BD8}" dt="2025-07-08T11:26:48.746" v="1775" actId="47"/>
-        <pc:sldMkLst>
-          <pc:docMk/>
-          <pc:sldMk cId="2328451440" sldId="257"/>
-        </pc:sldMkLst>
-        <pc:spChg chg="del">
-          <ac:chgData name="Fatima Pillosu" userId="a6295d4dc9e22643" providerId="LiveId" clId="{9EBBFA1C-5226-4AE6-954C-C02393E29BD8}" dt="2025-07-08T10:04:49.250" v="569" actId="478"/>
-          <ac:spMkLst>
-            <pc:docMk/>
-            <pc:sldMk cId="2328451440" sldId="257"/>
-            <ac:spMk id="2" creationId="{5C30841D-3C94-3BF3-2ABB-BE56725AB964}"/>
-          </ac:spMkLst>
-        </pc:spChg>
-        <pc:spChg chg="del">
-          <ac:chgData name="Fatima Pillosu" userId="a6295d4dc9e22643" providerId="LiveId" clId="{9EBBFA1C-5226-4AE6-954C-C02393E29BD8}" dt="2025-07-08T10:04:50.278" v="570" actId="478"/>
-          <ac:spMkLst>
-            <pc:docMk/>
-            <pc:sldMk cId="2328451440" sldId="257"/>
-            <ac:spMk id="3" creationId="{D9676A0E-A6AB-9922-84CF-589BC0230C86}"/>
-          </ac:spMkLst>
-        </pc:spChg>
-        <pc:picChg chg="add del mod modCrop">
-          <ac:chgData name="Fatima Pillosu" userId="a6295d4dc9e22643" providerId="LiveId" clId="{9EBBFA1C-5226-4AE6-954C-C02393E29BD8}" dt="2025-07-08T10:06:41.108" v="605" actId="21"/>
-          <ac:picMkLst>
-            <pc:docMk/>
-            <pc:sldMk cId="2328451440" sldId="257"/>
-            <ac:picMk id="5" creationId="{61F458EB-8241-BB7B-F508-0038D2F3FB46}"/>
-          </ac:picMkLst>
-        </pc:picChg>
-        <pc:picChg chg="add del mod modCrop">
-          <ac:chgData name="Fatima Pillosu" userId="a6295d4dc9e22643" providerId="LiveId" clId="{9EBBFA1C-5226-4AE6-954C-C02393E29BD8}" dt="2025-07-08T10:06:41.108" v="605" actId="21"/>
-          <ac:picMkLst>
-            <pc:docMk/>
-            <pc:sldMk cId="2328451440" sldId="257"/>
-            <ac:picMk id="7" creationId="{B1760ABD-9E87-189C-EDCB-2E309468CC25}"/>
-          </ac:picMkLst>
-        </pc:picChg>
-        <pc:picChg chg="add del mod modCrop">
-          <ac:chgData name="Fatima Pillosu" userId="a6295d4dc9e22643" providerId="LiveId" clId="{9EBBFA1C-5226-4AE6-954C-C02393E29BD8}" dt="2025-07-08T10:06:41.108" v="605" actId="21"/>
-          <ac:picMkLst>
-            <pc:docMk/>
-            <pc:sldMk cId="2328451440" sldId="257"/>
-            <ac:picMk id="9" creationId="{EE35B710-4E64-50C8-A8AA-14ABD233A5A8}"/>
-          </ac:picMkLst>
-        </pc:picChg>
-        <pc:picChg chg="add del mod modCrop">
-          <ac:chgData name="Fatima Pillosu" userId="a6295d4dc9e22643" providerId="LiveId" clId="{9EBBFA1C-5226-4AE6-954C-C02393E29BD8}" dt="2025-07-08T10:06:41.108" v="605" actId="21"/>
-          <ac:picMkLst>
-            <pc:docMk/>
-            <pc:sldMk cId="2328451440" sldId="257"/>
-            <ac:picMk id="11" creationId="{552DE0A6-ACDE-EA18-BFDA-430051B44480}"/>
-          </ac:picMkLst>
-        </pc:picChg>
-        <pc:picChg chg="add del mod modCrop">
-          <ac:chgData name="Fatima Pillosu" userId="a6295d4dc9e22643" providerId="LiveId" clId="{9EBBFA1C-5226-4AE6-954C-C02393E29BD8}" dt="2025-07-08T10:30:12.319" v="1318" actId="21"/>
-          <ac:picMkLst>
-            <pc:docMk/>
-            <pc:sldMk cId="2328451440" sldId="257"/>
-            <ac:picMk id="13" creationId="{1AE21D96-A12D-362C-19DA-B8306F8DD3B9}"/>
-          </ac:picMkLst>
-        </pc:picChg>
-        <pc:picChg chg="add del mod modCrop">
-          <ac:chgData name="Fatima Pillosu" userId="a6295d4dc9e22643" providerId="LiveId" clId="{9EBBFA1C-5226-4AE6-954C-C02393E29BD8}" dt="2025-07-08T10:30:12.319" v="1318" actId="21"/>
-          <ac:picMkLst>
-            <pc:docMk/>
-            <pc:sldMk cId="2328451440" sldId="257"/>
-            <ac:picMk id="15" creationId="{36CB3AE6-75F7-F088-E118-E63E8FE4273C}"/>
-          </ac:picMkLst>
-        </pc:picChg>
-        <pc:picChg chg="add del mod modCrop">
-          <ac:chgData name="Fatima Pillosu" userId="a6295d4dc9e22643" providerId="LiveId" clId="{9EBBFA1C-5226-4AE6-954C-C02393E29BD8}" dt="2025-07-08T10:30:12.319" v="1318" actId="21"/>
-          <ac:picMkLst>
-            <pc:docMk/>
-            <pc:sldMk cId="2328451440" sldId="257"/>
-            <ac:picMk id="17" creationId="{771A3A47-16B6-1F25-0AFE-E52CD234DDAD}"/>
-          </ac:picMkLst>
-        </pc:picChg>
-        <pc:picChg chg="add del mod modCrop">
-          <ac:chgData name="Fatima Pillosu" userId="a6295d4dc9e22643" providerId="LiveId" clId="{9EBBFA1C-5226-4AE6-954C-C02393E29BD8}" dt="2025-07-08T10:30:12.319" v="1318" actId="21"/>
-          <ac:picMkLst>
-            <pc:docMk/>
-            <pc:sldMk cId="2328451440" sldId="257"/>
-            <ac:picMk id="19" creationId="{7678F921-FAD1-37E6-3DB3-81A3D90A9BAA}"/>
-          </ac:picMkLst>
-        </pc:picChg>
-        <pc:picChg chg="add del mod modCrop">
-          <ac:chgData name="Fatima Pillosu" userId="a6295d4dc9e22643" providerId="LiveId" clId="{9EBBFA1C-5226-4AE6-954C-C02393E29BD8}" dt="2025-07-08T10:32:23.361" v="1355" actId="21"/>
-          <ac:picMkLst>
-            <pc:docMk/>
-            <pc:sldMk cId="2328451440" sldId="257"/>
-            <ac:picMk id="21" creationId="{2CF3E09C-0DD9-1A68-6EF3-64F130F806F7}"/>
-          </ac:picMkLst>
-        </pc:picChg>
-        <pc:picChg chg="add del mod modCrop">
-          <ac:chgData name="Fatima Pillosu" userId="a6295d4dc9e22643" providerId="LiveId" clId="{9EBBFA1C-5226-4AE6-954C-C02393E29BD8}" dt="2025-07-08T10:32:23.361" v="1355" actId="21"/>
-          <ac:picMkLst>
-            <pc:docMk/>
-            <pc:sldMk cId="2328451440" sldId="257"/>
-            <ac:picMk id="23" creationId="{386D1A26-960E-EF7F-13CE-AECE401D12F3}"/>
-          </ac:picMkLst>
-        </pc:picChg>
-        <pc:picChg chg="add del mod modCrop">
-          <ac:chgData name="Fatima Pillosu" userId="a6295d4dc9e22643" providerId="LiveId" clId="{9EBBFA1C-5226-4AE6-954C-C02393E29BD8}" dt="2025-07-08T10:32:23.361" v="1355" actId="21"/>
-          <ac:picMkLst>
-            <pc:docMk/>
-            <pc:sldMk cId="2328451440" sldId="257"/>
-            <ac:picMk id="25" creationId="{5B9F8AAF-9BA5-793A-3FC6-55DEB9A9FEB4}"/>
-          </ac:picMkLst>
-        </pc:picChg>
-        <pc:picChg chg="add del mod modCrop">
-          <ac:chgData name="Fatima Pillosu" userId="a6295d4dc9e22643" providerId="LiveId" clId="{9EBBFA1C-5226-4AE6-954C-C02393E29BD8}" dt="2025-07-08T10:32:23.361" v="1355" actId="21"/>
-          <ac:picMkLst>
-            <pc:docMk/>
-            <pc:sldMk cId="2328451440" sldId="257"/>
-            <ac:picMk id="27" creationId="{5155E0FD-11AA-33F9-6F5A-3258231B328C}"/>
-          </ac:picMkLst>
-        </pc:picChg>
-        <pc:picChg chg="add del mod modCrop">
-          <ac:chgData name="Fatima Pillosu" userId="a6295d4dc9e22643" providerId="LiveId" clId="{9EBBFA1C-5226-4AE6-954C-C02393E29BD8}" dt="2025-07-08T11:15:52.195" v="1466" actId="21"/>
-          <ac:picMkLst>
-            <pc:docMk/>
-            <pc:sldMk cId="2328451440" sldId="257"/>
-            <ac:picMk id="29" creationId="{CC6B6E7D-52A0-8818-D813-FE3AE4BF160A}"/>
-          </ac:picMkLst>
-        </pc:picChg>
-        <pc:picChg chg="add del mod modCrop">
-          <ac:chgData name="Fatima Pillosu" userId="a6295d4dc9e22643" providerId="LiveId" clId="{9EBBFA1C-5226-4AE6-954C-C02393E29BD8}" dt="2025-07-08T11:15:52.195" v="1466" actId="21"/>
-          <ac:picMkLst>
-            <pc:docMk/>
-            <pc:sldMk cId="2328451440" sldId="257"/>
-            <ac:picMk id="31" creationId="{925CAC98-EFEB-5F74-2738-FAE64508CB01}"/>
-          </ac:picMkLst>
-        </pc:picChg>
-        <pc:picChg chg="add del mod modCrop">
-          <ac:chgData name="Fatima Pillosu" userId="a6295d4dc9e22643" providerId="LiveId" clId="{9EBBFA1C-5226-4AE6-954C-C02393E29BD8}" dt="2025-07-08T11:15:52.195" v="1466" actId="21"/>
-          <ac:picMkLst>
-            <pc:docMk/>
-            <pc:sldMk cId="2328451440" sldId="257"/>
-            <ac:picMk id="33" creationId="{41E76222-24D5-E634-1E95-5E370EC6E701}"/>
-          </ac:picMkLst>
-        </pc:picChg>
-        <pc:picChg chg="add del mod modCrop">
-          <ac:chgData name="Fatima Pillosu" userId="a6295d4dc9e22643" providerId="LiveId" clId="{9EBBFA1C-5226-4AE6-954C-C02393E29BD8}" dt="2025-07-08T11:15:52.195" v="1466" actId="21"/>
-          <ac:picMkLst>
-            <pc:docMk/>
-            <pc:sldMk cId="2328451440" sldId="257"/>
-            <ac:picMk id="35" creationId="{B188B0C3-2824-0B8E-3A52-915231421F9A}"/>
-          </ac:picMkLst>
-        </pc:picChg>
-        <pc:picChg chg="add del mod modCrop">
-          <ac:chgData name="Fatima Pillosu" userId="a6295d4dc9e22643" providerId="LiveId" clId="{9EBBFA1C-5226-4AE6-954C-C02393E29BD8}" dt="2025-07-08T11:23:45.651" v="1667" actId="21"/>
-          <ac:picMkLst>
-            <pc:docMk/>
-            <pc:sldMk cId="2328451440" sldId="257"/>
-            <ac:picMk id="37" creationId="{70AB5CB0-F46A-6FDA-FAEA-321287F426C4}"/>
-          </ac:picMkLst>
-        </pc:picChg>
-        <pc:picChg chg="add del mod modCrop">
-          <ac:chgData name="Fatima Pillosu" userId="a6295d4dc9e22643" providerId="LiveId" clId="{9EBBFA1C-5226-4AE6-954C-C02393E29BD8}" dt="2025-07-08T11:23:45.651" v="1667" actId="21"/>
-          <ac:picMkLst>
-            <pc:docMk/>
-            <pc:sldMk cId="2328451440" sldId="257"/>
-            <ac:picMk id="39" creationId="{CDCD772A-C09B-53B6-7BC5-0B26529674D4}"/>
-          </ac:picMkLst>
-        </pc:picChg>
-        <pc:picChg chg="add del mod modCrop">
-          <ac:chgData name="Fatima Pillosu" userId="a6295d4dc9e22643" providerId="LiveId" clId="{9EBBFA1C-5226-4AE6-954C-C02393E29BD8}" dt="2025-07-08T11:23:45.651" v="1667" actId="21"/>
-          <ac:picMkLst>
-            <pc:docMk/>
-            <pc:sldMk cId="2328451440" sldId="257"/>
-            <ac:picMk id="41" creationId="{1F5D6664-7DE7-453C-A207-19B0CE0E84D4}"/>
-          </ac:picMkLst>
-        </pc:picChg>
-        <pc:picChg chg="add del mod modCrop">
-          <ac:chgData name="Fatima Pillosu" userId="a6295d4dc9e22643" providerId="LiveId" clId="{9EBBFA1C-5226-4AE6-954C-C02393E29BD8}" dt="2025-07-08T11:23:45.651" v="1667" actId="21"/>
-          <ac:picMkLst>
-            <pc:docMk/>
-            <pc:sldMk cId="2328451440" sldId="257"/>
-            <ac:picMk id="43" creationId="{C1166BFA-FB85-F47B-CDF1-B97A0CAE5363}"/>
-          </ac:picMkLst>
-        </pc:picChg>
       </pc:sldChg>
     </pc:docChg>
   </pc:docChgLst>
@@ -4135,7 +352,7 @@
           <a:p>
             <a:fld id="{F0820250-0589-45C6-A87F-3E34BBC48915}" type="datetimeFigureOut">
               <a:rPr lang="en-GB" smtClean="0"/>
-              <a:t>10/07/2025</a:t>
+              <a:t>15/01/2026</a:t>
             </a:fld>
             <a:endParaRPr lang="en-GB"/>
           </a:p>
@@ -4305,7 +522,7 @@
           <a:p>
             <a:fld id="{F0820250-0589-45C6-A87F-3E34BBC48915}" type="datetimeFigureOut">
               <a:rPr lang="en-GB" smtClean="0"/>
-              <a:t>10/07/2025</a:t>
+              <a:t>15/01/2026</a:t>
             </a:fld>
             <a:endParaRPr lang="en-GB"/>
           </a:p>
@@ -4485,7 +702,7 @@
           <a:p>
             <a:fld id="{F0820250-0589-45C6-A87F-3E34BBC48915}" type="datetimeFigureOut">
               <a:rPr lang="en-GB" smtClean="0"/>
-              <a:t>10/07/2025</a:t>
+              <a:t>15/01/2026</a:t>
             </a:fld>
             <a:endParaRPr lang="en-GB"/>
           </a:p>
@@ -4655,7 +872,7 @@
           <a:p>
             <a:fld id="{F0820250-0589-45C6-A87F-3E34BBC48915}" type="datetimeFigureOut">
               <a:rPr lang="en-GB" smtClean="0"/>
-              <a:t>10/07/2025</a:t>
+              <a:t>15/01/2026</a:t>
             </a:fld>
             <a:endParaRPr lang="en-GB"/>
           </a:p>
@@ -4901,7 +1118,7 @@
           <a:p>
             <a:fld id="{F0820250-0589-45C6-A87F-3E34BBC48915}" type="datetimeFigureOut">
               <a:rPr lang="en-GB" smtClean="0"/>
-              <a:t>10/07/2025</a:t>
+              <a:t>15/01/2026</a:t>
             </a:fld>
             <a:endParaRPr lang="en-GB"/>
           </a:p>
@@ -5133,7 +1350,7 @@
           <a:p>
             <a:fld id="{F0820250-0589-45C6-A87F-3E34BBC48915}" type="datetimeFigureOut">
               <a:rPr lang="en-GB" smtClean="0"/>
-              <a:t>10/07/2025</a:t>
+              <a:t>15/01/2026</a:t>
             </a:fld>
             <a:endParaRPr lang="en-GB"/>
           </a:p>
@@ -5500,7 +1717,7 @@
           <a:p>
             <a:fld id="{F0820250-0589-45C6-A87F-3E34BBC48915}" type="datetimeFigureOut">
               <a:rPr lang="en-GB" smtClean="0"/>
-              <a:t>10/07/2025</a:t>
+              <a:t>15/01/2026</a:t>
             </a:fld>
             <a:endParaRPr lang="en-GB"/>
           </a:p>
@@ -5618,7 +1835,7 @@
           <a:p>
             <a:fld id="{F0820250-0589-45C6-A87F-3E34BBC48915}" type="datetimeFigureOut">
               <a:rPr lang="en-GB" smtClean="0"/>
-              <a:t>10/07/2025</a:t>
+              <a:t>15/01/2026</a:t>
             </a:fld>
             <a:endParaRPr lang="en-GB"/>
           </a:p>
@@ -5713,7 +1930,7 @@
           <a:p>
             <a:fld id="{F0820250-0589-45C6-A87F-3E34BBC48915}" type="datetimeFigureOut">
               <a:rPr lang="en-GB" smtClean="0"/>
-              <a:t>10/07/2025</a:t>
+              <a:t>15/01/2026</a:t>
             </a:fld>
             <a:endParaRPr lang="en-GB"/>
           </a:p>
@@ -5990,7 +2207,7 @@
           <a:p>
             <a:fld id="{F0820250-0589-45C6-A87F-3E34BBC48915}" type="datetimeFigureOut">
               <a:rPr lang="en-GB" smtClean="0"/>
-              <a:t>10/07/2025</a:t>
+              <a:t>15/01/2026</a:t>
             </a:fld>
             <a:endParaRPr lang="en-GB"/>
           </a:p>
@@ -6247,7 +2464,7 @@
           <a:p>
             <a:fld id="{F0820250-0589-45C6-A87F-3E34BBC48915}" type="datetimeFigureOut">
               <a:rPr lang="en-GB" smtClean="0"/>
-              <a:t>10/07/2025</a:t>
+              <a:t>15/01/2026</a:t>
             </a:fld>
             <a:endParaRPr lang="en-GB"/>
           </a:p>
@@ -6460,7 +2677,7 @@
           <a:p>
             <a:fld id="{F0820250-0589-45C6-A87F-3E34BBC48915}" type="datetimeFigureOut">
               <a:rPr lang="en-GB" smtClean="0"/>
-              <a:t>10/07/2025</a:t>
+              <a:t>15/01/2026</a:t>
             </a:fld>
             <a:endParaRPr lang="en-GB"/>
           </a:p>
@@ -16215,7 +12432,7 @@
         </p:nvSpPr>
         <p:spPr>
           <a:xfrm>
-            <a:off x="3827291" y="1356492"/>
+            <a:off x="3888763" y="1356492"/>
             <a:ext cx="207108" cy="215444"/>
           </a:xfrm>
           <a:prstGeom prst="rect">
@@ -16365,7 +12582,7 @@
         </p:nvSpPr>
         <p:spPr>
           <a:xfrm>
-            <a:off x="3827291" y="2575769"/>
+            <a:off x="3888763" y="2575769"/>
             <a:ext cx="208711" cy="215444"/>
           </a:xfrm>
           <a:prstGeom prst="rect">
@@ -16515,7 +12732,7 @@
         </p:nvSpPr>
         <p:spPr>
           <a:xfrm>
-            <a:off x="3827291" y="3824743"/>
+            <a:off x="3888763" y="3824743"/>
             <a:ext cx="229550" cy="215444"/>
           </a:xfrm>
           <a:prstGeom prst="rect">
@@ -16665,7 +12882,7 @@
         </p:nvSpPr>
         <p:spPr>
           <a:xfrm>
-            <a:off x="3827291" y="5065766"/>
+            <a:off x="3888763" y="4973558"/>
             <a:ext cx="207108" cy="215444"/>
           </a:xfrm>
           <a:prstGeom prst="rect">
@@ -16695,6 +12912,412 @@
               <a:t>l</a:t>
             </a:r>
             <a:endParaRPr lang="en-GB" sz="800" dirty="0">
+              <a:latin typeface="Calibri Light" panose="020F0302020204030204" pitchFamily="34" charset="0"/>
+              <a:cs typeface="Calibri Light" panose="020F0302020204030204" pitchFamily="34" charset="0"/>
+            </a:endParaRPr>
+          </a:p>
+        </p:txBody>
+      </p:sp>
+      <p:sp>
+        <p:nvSpPr>
+          <p:cNvPr id="2" name="Rectangle 1">
+            <a:extLst>
+              <a:ext uri="{FF2B5EF4-FFF2-40B4-BE49-F238E27FC236}">
+                <a16:creationId xmlns:a16="http://schemas.microsoft.com/office/drawing/2014/main" id="{F594DD68-6077-B8F7-4559-E4BBDC6E9D6F}"/>
+              </a:ext>
+            </a:extLst>
+          </p:cNvPr>
+          <p:cNvSpPr/>
+          <p:nvPr/>
+        </p:nvSpPr>
+        <p:spPr>
+          <a:xfrm rot="5400000">
+            <a:off x="721117" y="4866202"/>
+            <a:ext cx="181750" cy="821596"/>
+          </a:xfrm>
+          <a:prstGeom prst="rect">
+            <a:avLst/>
+          </a:prstGeom>
+          <a:noFill/>
+          <a:ln w="3175">
+            <a:noFill/>
+          </a:ln>
+        </p:spPr>
+        <p:style>
+          <a:lnRef idx="2">
+            <a:schemeClr val="accent1">
+              <a:shade val="15000"/>
+            </a:schemeClr>
+          </a:lnRef>
+          <a:fillRef idx="1">
+            <a:schemeClr val="accent1"/>
+          </a:fillRef>
+          <a:effectRef idx="0">
+            <a:schemeClr val="accent1"/>
+          </a:effectRef>
+          <a:fontRef idx="minor">
+            <a:schemeClr val="lt1"/>
+          </a:fontRef>
+        </p:style>
+        <p:txBody>
+          <a:bodyPr vert="vert270" rtlCol="0" anchor="ctr"/>
+          <a:lstStyle/>
+          <a:p>
+            <a:pPr algn="ctr"/>
+            <a:r>
+              <a:rPr lang="en-US" sz="700" dirty="0">
+                <a:solidFill>
+                  <a:schemeClr val="tx1">
+                    <a:lumMod val="75000"/>
+                    <a:lumOff val="25000"/>
+                  </a:schemeClr>
+                </a:solidFill>
+                <a:latin typeface="Calibri Light" panose="020F0302020204030204" pitchFamily="34" charset="0"/>
+                <a:cs typeface="Calibri Light" panose="020F0302020204030204" pitchFamily="34" charset="0"/>
+              </a:rPr>
+              <a:t>No skill</a:t>
+            </a:r>
+            <a:endParaRPr lang="en-GB" sz="700" dirty="0">
+              <a:solidFill>
+                <a:schemeClr val="tx1">
+                  <a:lumMod val="75000"/>
+                  <a:lumOff val="25000"/>
+                </a:schemeClr>
+              </a:solidFill>
+              <a:latin typeface="Calibri Light" panose="020F0302020204030204" pitchFamily="34" charset="0"/>
+              <a:cs typeface="Calibri Light" panose="020F0302020204030204" pitchFamily="34" charset="0"/>
+            </a:endParaRPr>
+          </a:p>
+        </p:txBody>
+      </p:sp>
+      <p:sp>
+        <p:nvSpPr>
+          <p:cNvPr id="15" name="Rectangle 14">
+            <a:extLst>
+              <a:ext uri="{FF2B5EF4-FFF2-40B4-BE49-F238E27FC236}">
+                <a16:creationId xmlns:a16="http://schemas.microsoft.com/office/drawing/2014/main" id="{A1FA5D73-76D9-F5FC-CD81-0ADF5B5B845B}"/>
+              </a:ext>
+            </a:extLst>
+          </p:cNvPr>
+          <p:cNvSpPr/>
+          <p:nvPr/>
+        </p:nvSpPr>
+        <p:spPr>
+          <a:xfrm rot="5400000">
+            <a:off x="2033760" y="4875915"/>
+            <a:ext cx="181750" cy="821596"/>
+          </a:xfrm>
+          <a:prstGeom prst="rect">
+            <a:avLst/>
+          </a:prstGeom>
+          <a:noFill/>
+          <a:ln w="3175">
+            <a:noFill/>
+          </a:ln>
+        </p:spPr>
+        <p:style>
+          <a:lnRef idx="2">
+            <a:schemeClr val="accent1">
+              <a:shade val="15000"/>
+            </a:schemeClr>
+          </a:lnRef>
+          <a:fillRef idx="1">
+            <a:schemeClr val="accent1"/>
+          </a:fillRef>
+          <a:effectRef idx="0">
+            <a:schemeClr val="accent1"/>
+          </a:effectRef>
+          <a:fontRef idx="minor">
+            <a:schemeClr val="lt1"/>
+          </a:fontRef>
+        </p:style>
+        <p:txBody>
+          <a:bodyPr vert="vert270" rtlCol="0" anchor="ctr"/>
+          <a:lstStyle/>
+          <a:p>
+            <a:pPr algn="ctr"/>
+            <a:r>
+              <a:rPr lang="en-US" sz="700" dirty="0">
+                <a:solidFill>
+                  <a:schemeClr val="tx1">
+                    <a:lumMod val="75000"/>
+                    <a:lumOff val="25000"/>
+                  </a:schemeClr>
+                </a:solidFill>
+                <a:latin typeface="Calibri Light" panose="020F0302020204030204" pitchFamily="34" charset="0"/>
+                <a:cs typeface="Calibri Light" panose="020F0302020204030204" pitchFamily="34" charset="0"/>
+              </a:rPr>
+              <a:t>No skill</a:t>
+            </a:r>
+            <a:endParaRPr lang="en-GB" sz="700" dirty="0">
+              <a:solidFill>
+                <a:schemeClr val="tx1">
+                  <a:lumMod val="75000"/>
+                  <a:lumOff val="25000"/>
+                </a:schemeClr>
+              </a:solidFill>
+              <a:latin typeface="Calibri Light" panose="020F0302020204030204" pitchFamily="34" charset="0"/>
+              <a:cs typeface="Calibri Light" panose="020F0302020204030204" pitchFamily="34" charset="0"/>
+            </a:endParaRPr>
+          </a:p>
+        </p:txBody>
+      </p:sp>
+      <p:cxnSp>
+        <p:nvCxnSpPr>
+          <p:cNvPr id="17" name="Straight Connector 16">
+            <a:extLst>
+              <a:ext uri="{FF2B5EF4-FFF2-40B4-BE49-F238E27FC236}">
+                <a16:creationId xmlns:a16="http://schemas.microsoft.com/office/drawing/2014/main" id="{CC9A6D3A-471B-B14B-87B6-D81E209C7208}"/>
+              </a:ext>
+            </a:extLst>
+          </p:cNvPr>
+          <p:cNvCxnSpPr>
+            <a:stCxn id="297" idx="1"/>
+            <a:endCxn id="297" idx="3"/>
+          </p:cNvCxnSpPr>
+          <p:nvPr/>
+        </p:nvCxnSpPr>
+        <p:spPr>
+          <a:xfrm>
+            <a:off x="3299481" y="4817727"/>
+            <a:ext cx="832590" cy="0"/>
+          </a:xfrm>
+          <a:prstGeom prst="line">
+            <a:avLst/>
+          </a:prstGeom>
+          <a:ln w="6350">
+            <a:solidFill>
+              <a:schemeClr val="tx1">
+                <a:lumMod val="65000"/>
+                <a:lumOff val="35000"/>
+              </a:schemeClr>
+            </a:solidFill>
+          </a:ln>
+        </p:spPr>
+        <p:style>
+          <a:lnRef idx="2">
+            <a:schemeClr val="accent1"/>
+          </a:lnRef>
+          <a:fillRef idx="0">
+            <a:schemeClr val="accent1"/>
+          </a:fillRef>
+          <a:effectRef idx="1">
+            <a:schemeClr val="accent1"/>
+          </a:effectRef>
+          <a:fontRef idx="minor">
+            <a:schemeClr val="tx1"/>
+          </a:fontRef>
+        </p:style>
+      </p:cxnSp>
+      <p:sp>
+        <p:nvSpPr>
+          <p:cNvPr id="18" name="Rectangle 17">
+            <a:extLst>
+              <a:ext uri="{FF2B5EF4-FFF2-40B4-BE49-F238E27FC236}">
+                <a16:creationId xmlns:a16="http://schemas.microsoft.com/office/drawing/2014/main" id="{11317708-710B-0818-A9AD-4B69D3FE07B9}"/>
+              </a:ext>
+            </a:extLst>
+          </p:cNvPr>
+          <p:cNvSpPr/>
+          <p:nvPr/>
+        </p:nvSpPr>
+        <p:spPr>
+          <a:xfrm rot="5400000">
+            <a:off x="3620101" y="4467655"/>
+            <a:ext cx="181750" cy="821596"/>
+          </a:xfrm>
+          <a:prstGeom prst="rect">
+            <a:avLst/>
+          </a:prstGeom>
+          <a:noFill/>
+          <a:ln w="3175">
+            <a:noFill/>
+          </a:ln>
+        </p:spPr>
+        <p:style>
+          <a:lnRef idx="2">
+            <a:schemeClr val="accent1">
+              <a:shade val="15000"/>
+            </a:schemeClr>
+          </a:lnRef>
+          <a:fillRef idx="1">
+            <a:schemeClr val="accent1"/>
+          </a:fillRef>
+          <a:effectRef idx="0">
+            <a:schemeClr val="accent1"/>
+          </a:effectRef>
+          <a:fontRef idx="minor">
+            <a:schemeClr val="lt1"/>
+          </a:fontRef>
+        </p:style>
+        <p:txBody>
+          <a:bodyPr vert="vert270" rtlCol="0" anchor="ctr"/>
+          <a:lstStyle/>
+          <a:p>
+            <a:pPr algn="ctr"/>
+            <a:r>
+              <a:rPr lang="en-US" sz="700" dirty="0">
+                <a:solidFill>
+                  <a:schemeClr val="tx1">
+                    <a:lumMod val="75000"/>
+                    <a:lumOff val="25000"/>
+                  </a:schemeClr>
+                </a:solidFill>
+                <a:latin typeface="Calibri Light" panose="020F0302020204030204" pitchFamily="34" charset="0"/>
+                <a:cs typeface="Calibri Light" panose="020F0302020204030204" pitchFamily="34" charset="0"/>
+              </a:rPr>
+              <a:t>Perfect bias</a:t>
+            </a:r>
+            <a:endParaRPr lang="en-GB" sz="700" dirty="0">
+              <a:solidFill>
+                <a:schemeClr val="tx1">
+                  <a:lumMod val="75000"/>
+                  <a:lumOff val="25000"/>
+                </a:schemeClr>
+              </a:solidFill>
+              <a:latin typeface="Calibri Light" panose="020F0302020204030204" pitchFamily="34" charset="0"/>
+              <a:cs typeface="Calibri Light" panose="020F0302020204030204" pitchFamily="34" charset="0"/>
+            </a:endParaRPr>
+          </a:p>
+        </p:txBody>
+      </p:sp>
+      <p:sp>
+        <p:nvSpPr>
+          <p:cNvPr id="19" name="Rectangle 18">
+            <a:extLst>
+              <a:ext uri="{FF2B5EF4-FFF2-40B4-BE49-F238E27FC236}">
+                <a16:creationId xmlns:a16="http://schemas.microsoft.com/office/drawing/2014/main" id="{0181E6C9-305B-B00E-0E3B-2E6DB4B1BD3D}"/>
+              </a:ext>
+            </a:extLst>
+          </p:cNvPr>
+          <p:cNvSpPr/>
+          <p:nvPr/>
+        </p:nvSpPr>
+        <p:spPr>
+          <a:xfrm rot="5400000">
+            <a:off x="3541000" y="4845858"/>
+            <a:ext cx="181750" cy="821596"/>
+          </a:xfrm>
+          <a:prstGeom prst="rect">
+            <a:avLst/>
+          </a:prstGeom>
+          <a:noFill/>
+          <a:ln w="3175">
+            <a:noFill/>
+          </a:ln>
+        </p:spPr>
+        <p:style>
+          <a:lnRef idx="2">
+            <a:schemeClr val="accent1">
+              <a:shade val="15000"/>
+            </a:schemeClr>
+          </a:lnRef>
+          <a:fillRef idx="1">
+            <a:schemeClr val="accent1"/>
+          </a:fillRef>
+          <a:effectRef idx="0">
+            <a:schemeClr val="accent1"/>
+          </a:effectRef>
+          <a:fontRef idx="minor">
+            <a:schemeClr val="lt1"/>
+          </a:fontRef>
+        </p:style>
+        <p:txBody>
+          <a:bodyPr vert="vert270" rtlCol="0" anchor="ctr"/>
+          <a:lstStyle/>
+          <a:p>
+            <a:pPr algn="ctr"/>
+            <a:r>
+              <a:rPr lang="en-US" sz="700" dirty="0">
+                <a:solidFill>
+                  <a:schemeClr val="tx1">
+                    <a:lumMod val="75000"/>
+                    <a:lumOff val="25000"/>
+                  </a:schemeClr>
+                </a:solidFill>
+                <a:latin typeface="Calibri Light" panose="020F0302020204030204" pitchFamily="34" charset="0"/>
+                <a:cs typeface="Calibri Light" panose="020F0302020204030204" pitchFamily="34" charset="0"/>
+              </a:rPr>
+              <a:t>Underprediction</a:t>
+            </a:r>
+            <a:endParaRPr lang="en-GB" sz="700" dirty="0">
+              <a:solidFill>
+                <a:schemeClr val="tx1">
+                  <a:lumMod val="75000"/>
+                  <a:lumOff val="25000"/>
+                </a:schemeClr>
+              </a:solidFill>
+              <a:latin typeface="Calibri Light" panose="020F0302020204030204" pitchFamily="34" charset="0"/>
+              <a:cs typeface="Calibri Light" panose="020F0302020204030204" pitchFamily="34" charset="0"/>
+            </a:endParaRPr>
+          </a:p>
+        </p:txBody>
+      </p:sp>
+      <p:sp>
+        <p:nvSpPr>
+          <p:cNvPr id="20" name="Rectangle 19">
+            <a:extLst>
+              <a:ext uri="{FF2B5EF4-FFF2-40B4-BE49-F238E27FC236}">
+                <a16:creationId xmlns:a16="http://schemas.microsoft.com/office/drawing/2014/main" id="{C179A471-9FB0-A3D7-54EB-9A69D4D86A00}"/>
+              </a:ext>
+            </a:extLst>
+          </p:cNvPr>
+          <p:cNvSpPr/>
+          <p:nvPr/>
+        </p:nvSpPr>
+        <p:spPr>
+          <a:xfrm rot="5400000">
+            <a:off x="3601608" y="3951733"/>
+            <a:ext cx="181750" cy="821596"/>
+          </a:xfrm>
+          <a:prstGeom prst="rect">
+            <a:avLst/>
+          </a:prstGeom>
+          <a:noFill/>
+          <a:ln w="3175">
+            <a:noFill/>
+          </a:ln>
+        </p:spPr>
+        <p:style>
+          <a:lnRef idx="2">
+            <a:schemeClr val="accent1">
+              <a:shade val="15000"/>
+            </a:schemeClr>
+          </a:lnRef>
+          <a:fillRef idx="1">
+            <a:schemeClr val="accent1"/>
+          </a:fillRef>
+          <a:effectRef idx="0">
+            <a:schemeClr val="accent1"/>
+          </a:effectRef>
+          <a:fontRef idx="minor">
+            <a:schemeClr val="lt1"/>
+          </a:fontRef>
+        </p:style>
+        <p:txBody>
+          <a:bodyPr vert="vert270" rtlCol="0" anchor="ctr"/>
+          <a:lstStyle/>
+          <a:p>
+            <a:r>
+              <a:rPr lang="en-US" sz="700" dirty="0">
+                <a:solidFill>
+                  <a:schemeClr val="tx1">
+                    <a:lumMod val="75000"/>
+                    <a:lumOff val="25000"/>
+                  </a:schemeClr>
+                </a:solidFill>
+                <a:latin typeface="Calibri Light" panose="020F0302020204030204" pitchFamily="34" charset="0"/>
+                <a:cs typeface="Calibri Light" panose="020F0302020204030204" pitchFamily="34" charset="0"/>
+              </a:rPr>
+              <a:t>Overprediction</a:t>
+            </a:r>
+            <a:endParaRPr lang="en-GB" sz="700" dirty="0">
+              <a:solidFill>
+                <a:schemeClr val="tx1">
+                  <a:lumMod val="75000"/>
+                  <a:lumOff val="25000"/>
+                </a:schemeClr>
+              </a:solidFill>
               <a:latin typeface="Calibri Light" panose="020F0302020204030204" pitchFamily="34" charset="0"/>
               <a:cs typeface="Calibri Light" panose="020F0302020204030204" pitchFamily="34" charset="0"/>
             </a:endParaRPr>

--- a/chapter_06/figures/verif_training_test_overall.pptx
+++ b/chapter_06/figures/verif_training_test_overall.pptx
@@ -115,7 +115,7 @@
 <file path=ppt/revisionInfo.xml><?xml version="1.0" encoding="utf-8"?>
 <p1510:revInfo xmlns:a="http://schemas.openxmlformats.org/drawingml/2006/main" xmlns:r="http://schemas.openxmlformats.org/officeDocument/2006/relationships" xmlns:p1510="http://schemas.microsoft.com/office/powerpoint/2015/10/main">
   <p1510:revLst>
-    <p1510:client id="{813C141E-0375-439C-ABB4-2AEF7A1F8DC9}" v="5" dt="2026-01-15T15:13:13.210"/>
+    <p1510:client id="{813C141E-0375-439C-ABB4-2AEF7A1F8DC9}" v="8" dt="2026-01-15T15:15:18.327"/>
   </p1510:revLst>
 </p1510:revInfo>
 </file>
@@ -125,12 +125,12 @@
   <pc:docChgLst>
     <pc:chgData name="Fatima Pillosu" userId="a6295d4dc9e22643" providerId="LiveId" clId="{87453732-75AC-4426-B5D3-B7C69C2D4F54}"/>
     <pc:docChg chg="modSld">
-      <pc:chgData name="Fatima Pillosu" userId="a6295d4dc9e22643" providerId="LiveId" clId="{87453732-75AC-4426-B5D3-B7C69C2D4F54}" dt="2026-01-15T15:13:29.050" v="108" actId="1037"/>
+      <pc:chgData name="Fatima Pillosu" userId="a6295d4dc9e22643" providerId="LiveId" clId="{87453732-75AC-4426-B5D3-B7C69C2D4F54}" dt="2026-01-15T15:15:52.884" v="120" actId="14100"/>
       <pc:docMkLst>
         <pc:docMk/>
       </pc:docMkLst>
       <pc:sldChg chg="addSp modSp mod">
-        <pc:chgData name="Fatima Pillosu" userId="a6295d4dc9e22643" providerId="LiveId" clId="{87453732-75AC-4426-B5D3-B7C69C2D4F54}" dt="2026-01-15T15:13:29.050" v="108" actId="1037"/>
+        <pc:chgData name="Fatima Pillosu" userId="a6295d4dc9e22643" providerId="LiveId" clId="{87453732-75AC-4426-B5D3-B7C69C2D4F54}" dt="2026-01-15T15:15:52.884" v="120" actId="14100"/>
         <pc:sldMkLst>
           <pc:docMk/>
           <pc:sldMk cId="1077421182" sldId="256"/>
@@ -208,11 +208,35 @@
           </ac:spMkLst>
         </pc:spChg>
         <pc:cxnChg chg="add mod">
-          <ac:chgData name="Fatima Pillosu" userId="a6295d4dc9e22643" providerId="LiveId" clId="{87453732-75AC-4426-B5D3-B7C69C2D4F54}" dt="2026-01-15T15:11:57.697" v="18" actId="1582"/>
+          <ac:chgData name="Fatima Pillosu" userId="a6295d4dc9e22643" providerId="LiveId" clId="{87453732-75AC-4426-B5D3-B7C69C2D4F54}" dt="2026-01-15T15:15:41.170" v="119" actId="14100"/>
+          <ac:cxnSpMkLst>
+            <pc:docMk/>
+            <pc:sldMk cId="1077421182" sldId="256"/>
+            <ac:cxnSpMk id="16" creationId="{2D6DAAB9-15DB-5843-6C26-5E435F057C02}"/>
+          </ac:cxnSpMkLst>
+        </pc:cxnChg>
+        <pc:cxnChg chg="add mod">
+          <ac:chgData name="Fatima Pillosu" userId="a6295d4dc9e22643" providerId="LiveId" clId="{87453732-75AC-4426-B5D3-B7C69C2D4F54}" dt="2026-01-15T15:15:41.170" v="119" actId="14100"/>
           <ac:cxnSpMkLst>
             <pc:docMk/>
             <pc:sldMk cId="1077421182" sldId="256"/>
             <ac:cxnSpMk id="17" creationId="{CC9A6D3A-471B-B14B-87B6-D81E209C7208}"/>
+          </ac:cxnSpMkLst>
+        </pc:cxnChg>
+        <pc:cxnChg chg="add mod">
+          <ac:chgData name="Fatima Pillosu" userId="a6295d4dc9e22643" providerId="LiveId" clId="{87453732-75AC-4426-B5D3-B7C69C2D4F54}" dt="2026-01-15T15:15:52.884" v="120" actId="14100"/>
+          <ac:cxnSpMkLst>
+            <pc:docMk/>
+            <pc:sldMk cId="1077421182" sldId="256"/>
+            <ac:cxnSpMk id="21" creationId="{EBDDB212-98B2-67C0-8D05-CE6A3A1111F1}"/>
+          </ac:cxnSpMkLst>
+        </pc:cxnChg>
+        <pc:cxnChg chg="add mod">
+          <ac:chgData name="Fatima Pillosu" userId="a6295d4dc9e22643" providerId="LiveId" clId="{87453732-75AC-4426-B5D3-B7C69C2D4F54}" dt="2026-01-15T15:15:52.884" v="120" actId="14100"/>
+          <ac:cxnSpMkLst>
+            <pc:docMk/>
+            <pc:sldMk cId="1077421182" sldId="256"/>
+            <ac:cxnSpMk id="22" creationId="{AD131F48-62C9-B745-AC6F-44AC717CC559}"/>
           </ac:cxnSpMkLst>
         </pc:cxnChg>
       </pc:sldChg>
@@ -13080,7 +13104,7 @@
         <p:spPr>
           <a:xfrm>
             <a:off x="3299481" y="4817727"/>
-            <a:ext cx="832590" cy="0"/>
+            <a:ext cx="828000" cy="0"/>
           </a:xfrm>
           <a:prstGeom prst="line">
             <a:avLst/>
@@ -13324,6 +13348,138 @@
           </a:p>
         </p:txBody>
       </p:sp>
+      <p:cxnSp>
+        <p:nvCxnSpPr>
+          <p:cNvPr id="16" name="Straight Connector 15">
+            <a:extLst>
+              <a:ext uri="{FF2B5EF4-FFF2-40B4-BE49-F238E27FC236}">
+                <a16:creationId xmlns:a16="http://schemas.microsoft.com/office/drawing/2014/main" id="{2D6DAAB9-15DB-5843-6C26-5E435F057C02}"/>
+              </a:ext>
+            </a:extLst>
+          </p:cNvPr>
+          <p:cNvCxnSpPr/>
+          <p:nvPr/>
+        </p:nvCxnSpPr>
+        <p:spPr>
+          <a:xfrm>
+            <a:off x="3307610" y="3580013"/>
+            <a:ext cx="828000" cy="0"/>
+          </a:xfrm>
+          <a:prstGeom prst="line">
+            <a:avLst/>
+          </a:prstGeom>
+          <a:ln w="6350">
+            <a:solidFill>
+              <a:schemeClr val="tx1">
+                <a:lumMod val="65000"/>
+                <a:lumOff val="35000"/>
+              </a:schemeClr>
+            </a:solidFill>
+          </a:ln>
+        </p:spPr>
+        <p:style>
+          <a:lnRef idx="2">
+            <a:schemeClr val="accent1"/>
+          </a:lnRef>
+          <a:fillRef idx="0">
+            <a:schemeClr val="accent1"/>
+          </a:fillRef>
+          <a:effectRef idx="1">
+            <a:schemeClr val="accent1"/>
+          </a:effectRef>
+          <a:fontRef idx="minor">
+            <a:schemeClr val="tx1"/>
+          </a:fontRef>
+        </p:style>
+      </p:cxnSp>
+      <p:cxnSp>
+        <p:nvCxnSpPr>
+          <p:cNvPr id="21" name="Straight Connector 20">
+            <a:extLst>
+              <a:ext uri="{FF2B5EF4-FFF2-40B4-BE49-F238E27FC236}">
+                <a16:creationId xmlns:a16="http://schemas.microsoft.com/office/drawing/2014/main" id="{EBDDB212-98B2-67C0-8D05-CE6A3A1111F1}"/>
+              </a:ext>
+            </a:extLst>
+          </p:cNvPr>
+          <p:cNvCxnSpPr/>
+          <p:nvPr/>
+        </p:nvCxnSpPr>
+        <p:spPr>
+          <a:xfrm>
+            <a:off x="3312462" y="2318493"/>
+            <a:ext cx="820800" cy="0"/>
+          </a:xfrm>
+          <a:prstGeom prst="line">
+            <a:avLst/>
+          </a:prstGeom>
+          <a:ln w="6350">
+            <a:solidFill>
+              <a:schemeClr val="tx1">
+                <a:lumMod val="65000"/>
+                <a:lumOff val="35000"/>
+              </a:schemeClr>
+            </a:solidFill>
+          </a:ln>
+        </p:spPr>
+        <p:style>
+          <a:lnRef idx="2">
+            <a:schemeClr val="accent1"/>
+          </a:lnRef>
+          <a:fillRef idx="0">
+            <a:schemeClr val="accent1"/>
+          </a:fillRef>
+          <a:effectRef idx="1">
+            <a:schemeClr val="accent1"/>
+          </a:effectRef>
+          <a:fontRef idx="minor">
+            <a:schemeClr val="tx1"/>
+          </a:fontRef>
+        </p:style>
+      </p:cxnSp>
+      <p:cxnSp>
+        <p:nvCxnSpPr>
+          <p:cNvPr id="22" name="Straight Connector 21">
+            <a:extLst>
+              <a:ext uri="{FF2B5EF4-FFF2-40B4-BE49-F238E27FC236}">
+                <a16:creationId xmlns:a16="http://schemas.microsoft.com/office/drawing/2014/main" id="{AD131F48-62C9-B745-AC6F-44AC717CC559}"/>
+              </a:ext>
+            </a:extLst>
+          </p:cNvPr>
+          <p:cNvCxnSpPr/>
+          <p:nvPr/>
+        </p:nvCxnSpPr>
+        <p:spPr>
+          <a:xfrm>
+            <a:off x="3307610" y="1120641"/>
+            <a:ext cx="820800" cy="0"/>
+          </a:xfrm>
+          <a:prstGeom prst="line">
+            <a:avLst/>
+          </a:prstGeom>
+          <a:ln w="6350">
+            <a:solidFill>
+              <a:schemeClr val="tx1">
+                <a:lumMod val="65000"/>
+                <a:lumOff val="35000"/>
+              </a:schemeClr>
+            </a:solidFill>
+          </a:ln>
+        </p:spPr>
+        <p:style>
+          <a:lnRef idx="2">
+            <a:schemeClr val="accent1"/>
+          </a:lnRef>
+          <a:fillRef idx="0">
+            <a:schemeClr val="accent1"/>
+          </a:fillRef>
+          <a:effectRef idx="1">
+            <a:schemeClr val="accent1"/>
+          </a:effectRef>
+          <a:fontRef idx="minor">
+            <a:schemeClr val="tx1"/>
+          </a:fontRef>
+        </p:style>
+      </p:cxnSp>
     </p:spTree>
     <p:extLst>
       <p:ext uri="{BB962C8B-B14F-4D97-AF65-F5344CB8AC3E}">
